--- a/presentation/Qadam_ArcSolo_pitch_RU.pptx
+++ b/presentation/Qadam_ArcSolo_pitch_RU.pptx
@@ -11388,7 +11388,7 @@
               </a:defRPr>
             </a:pPr>
             <a:r>
-              <a:t>Факты ≠ идеи</a:t>
+              <a:t>Факты и идеи</a:t>
             </a:r>
           </a:p>
         </p:txBody>

--- a/presentation/Qadam_ArcSolo_pitch_RU.pptx
+++ b/presentation/Qadam_ArcSolo_pitch_RU.pptx
@@ -594,7 +594,7 @@
           <a:p/>
           <a:p>
             <a:r>
-              <a:t>Мы не пытаемся скрыть границы прототипа. Сейчас данные покрывают пять районов, а пешее время оценивается по расстоянию с коэффициентом обхода. Следующий технический шаг — пешеходный граф с реальными входами и переходами. Следующий шаг по данным — проверенные описания и расписания от партнёров. Затем подключаем живую модель и оцениваем её на сценариях с пользователями. После этого имеет смысл добавлять события и групповое планирование, не размывая базовую полезность.</a:t>
+              <a:t>Мы не пытаемся скрыть границы прототипа. Сейчас данные покрывают пять районов, а пешее время оценивается по расстоянию с коэффициентом обхода. Следующий технический шаг — пешеходный граф с реальными входами и переходами. Следующий шаг по данным — проверенные описания и расписания от партнёров. Живую модель уже подключили; теперь оцениваем её на сценариях с пользователями. После этого имеет смысл добавлять события и групповое планирование, не размывая базовую полезность.</a:t>
             </a:r>
           </a:p>
         </p:txBody>
@@ -1050,7 +1050,7 @@
           <a:p/>
           <a:p>
             <a:r>
-              <a:t>Наш RAG начинается с реальных документов POI. Поиск сочетает BM25 и небольшой многоязычный словарь намерений. Затем строгие проверки исключают слишком далёкие места, неподходящие категории и визиты, которые не укладываются в известное расписание. Только после этого Gemini может выбрать идеи действий для найденных мест. Ответ ограничен разрешёнными идентификаторами и проверяется кодом. Это намеренно узкая генерация: модель не придумывает часы, адреса или новые заведения. Сейчас без ключа работает честно обозначенный шаблонный режим; живой вызов модели мы не выдаём за уже проверенный.</a:t>
+              <a:t>Наш RAG начинается с реальных документов POI. Поиск сочетает BM25 и небольшой многоязычный словарь намерений. Затем строгие проверки исключают слишком далёкие места, неподходящие категории и визиты, которые не укладываются в известное расписание. Только после этого Gemini может выбрать идеи действий для найденных мест. Ответ ограничен разрешёнными идентификаторами и проверяется кодом. Это намеренно узкая генерация: модель не придумывает часы, адреса или новые заведения. Живой вызов проверен локально и на размещённом демо. При ошибке провайдера остаётся честно обозначенный шаблонный режим.</a:t>
             </a:r>
           </a:p>
         </p:txBody>
@@ -5702,7 +5702,7 @@
               </a:defRPr>
             </a:pPr>
             <a:r>
-              <a:t>Живой Gemini, оценка полезности и устойчивости.</a:t>
+              <a:t>Оценка полезности и устойчивости на сценариях.</a:t>
             </a:r>
           </a:p>
         </p:txBody>
@@ -10630,7 +10630,7 @@
               </a:defRPr>
             </a:pPr>
             <a:r>
-              <a:t>Gemini*</a:t>
+              <a:t>Gemini</a:t>
             </a:r>
           </a:p>
         </p:txBody>
@@ -10966,7 +10966,7 @@
               </a:defRPr>
             </a:pPr>
             <a:r>
-              <a:t>* Без ключа работает явно обозначенный поиск с шаблонными идеями.</a:t>
+              <a:t>Живой Gemini проверен локально и на hosted-демо · 18.10.2026.</a:t>
             </a:r>
           </a:p>
         </p:txBody>
@@ -11033,7 +11033,7 @@
               </a:defRPr>
             </a:pPr>
             <a:r>
-              <a:t>Адаптер проверен на mock-ответах; живой вызов требует серверного ключа.</a:t>
+              <a:t>Ответ проходит проверку. При ошибке — явно обозначенные шаблонные идеи.</a:t>
             </a:r>
           </a:p>
         </p:txBody>

--- a/presentation/Qadam_ArcSolo_pitch_RU.pptx
+++ b/presentation/Qadam_ArcSolo_pitch_RU.pptx
@@ -16,6 +16,7 @@
     <p:sldId id="264" r:id="rId16"/>
     <p:sldId id="265" r:id="rId17"/>
     <p:sldId id="266" r:id="rId18"/>
+    <p:sldId id="267" r:id="rId19"/>
   </p:sldIdLst>
   <p:sldSz cx="12191999" cy="6858000" type="screen4x3"/>
   <p:notesSz cx="6858000" cy="9144000"/>
@@ -594,7 +595,7 @@
           <a:p/>
           <a:p>
             <a:r>
-              <a:t>Мы не пытаемся скрыть границы прототипа. Сейчас данные покрывают пять районов, а пешее время оценивается по расстоянию с коэффициентом обхода. Следующий технический шаг — пешеходный граф с реальными входами и переходами. Следующий шаг по данным — проверенные описания и расписания от партнёров. Живую модель уже подключили; теперь оцениваем её на сценариях с пользователями. После этого имеет смысл добавлять события и групповое планирование, не размывая базовую полезность.</a:t>
+              <a:t>Мы видим бесплатный пользовательский сценарий и потенциальную B2B-модель: виджет для отелей, городских порталов и организаторов мероприятий. Но это гипотеза, а не заявка на уже существующую выручку. Следующий шаг — двухнедельный пилот с двадцатью пользователями на трёх сценариях. Будем измерять полезность рекомендации, время до выбора и ошибки ограничений. Если появятся партнёрские размещения, они будут маркироваться и не смогут обойти фильтры времени или доступности.</a:t>
             </a:r>
           </a:p>
         </p:txBody>
@@ -664,6 +665,82 @@
           <a:lstStyle/>
           <a:p>
             <a:r>
+              <a:t>35 секунд</a:t>
+            </a:r>
+          </a:p>
+          <a:p/>
+          <a:p>
+            <a:r>
+              <a:t>Мы не пытаемся скрыть границы прототипа. Сейчас данные покрывают пять районов, а пешее время оценивается по расстоянию с коэффициентом обхода. Следующий технический шаг — пешеходный граф с реальными входами и переходами. Следующий шаг по данным — проверенные описания и расписания от партнёров. Живую модель проверили на трёх сценариях; впереди оценка полезности с настоящими пользователями. После этого имеет смысл добавлять события и улучшать маршруты, опираясь на реальные отзывы.</a:t>
+            </a:r>
+          </a:p>
+        </p:txBody>
+      </p:sp>
+      <p:sp>
+        <p:nvSpPr>
+          <p:cNvPr id="4" name="Slide Number Placeholder 3"/>
+          <p:cNvSpPr>
+            <a:spLocks noGrp="1"/>
+          </p:cNvSpPr>
+          <p:nvPr>
+            <p:ph type="sldNum" idx="5" sz="quarter"/>
+          </p:nvPr>
+        </p:nvSpPr>
+        <p:spPr/>
+      </p:sp>
+    </p:spTree>
+  </p:cSld>
+  <p:clrMapOvr>
+    <a:masterClrMapping/>
+  </p:clrMapOvr>
+</p:notes>
+</file>
+
+<file path=ppt/notesSlides/notesSlide12.xml><?xml version="1.0" encoding="utf-8"?>
+<p:notes xmlns:a="http://schemas.openxmlformats.org/drawingml/2006/main" xmlns:p="http://schemas.openxmlformats.org/presentationml/2006/main" xmlns:r="http://schemas.openxmlformats.org/officeDocument/2006/relationships">
+  <p:cSld>
+    <p:spTree>
+      <p:nvGrpSpPr>
+        <p:cNvPr id="1" name=""/>
+        <p:cNvGrpSpPr/>
+        <p:nvPr/>
+      </p:nvGrpSpPr>
+      <p:grpSpPr>
+        <a:xfrm>
+          <a:off x="0" y="0"/>
+          <a:ext cx="0" cy="0"/>
+          <a:chOff x="0" y="0"/>
+          <a:chExt cx="0" cy="0"/>
+        </a:xfrm>
+      </p:grpSpPr>
+      <p:sp>
+        <p:nvSpPr>
+          <p:cNvPr id="2" name="Slide Image Placeholder 1"/>
+          <p:cNvSpPr>
+            <a:spLocks noGrp="1"/>
+          </p:cNvSpPr>
+          <p:nvPr>
+            <p:ph type="sldImg" idx="2"/>
+          </p:nvPr>
+        </p:nvSpPr>
+        <p:spPr/>
+      </p:sp>
+      <p:sp>
+        <p:nvSpPr>
+          <p:cNvPr id="3" name="Notes Placeholder 2"/>
+          <p:cNvSpPr>
+            <a:spLocks noGrp="1"/>
+          </p:cNvSpPr>
+          <p:nvPr>
+            <p:ph type="body" idx="3" sz="quarter"/>
+          </p:nvPr>
+        </p:nvSpPr>
+        <p:spPr/>
+        <p:txBody>
+          <a:bodyPr/>
+          <a:lstStyle/>
+          <a:p>
+            <a:r>
               <a:t>25 секунд</a:t>
             </a:r>
           </a:p>
@@ -898,7 +975,7 @@
           <a:p/>
           <a:p>
             <a:r>
-              <a:t>Переключимся на демо и нажмём «Час рядом с EXPO». Система находит три разных варианта и предлагает маршрут с кофе и садом: примерно двадцать пять минут на ходьбу и тридцать пять на остановки. Вместе — шестьдесят минут, включая возвращение. Обратите внимание: для сада часы работы неизвестны, и приложение не говорит, что он открыт. Теперь выберем тихое кафе с розеткой. Мы увидим кафе, но также предупреждение: розетки и тишина не подтверждены. И наконец уменьшим время: если ничего не подходит, система честно покажет пустой результат. Вернёмся к слайдам.</a:t>
+              <a:t>Переключимся на демо и нажмём «Час рядом с EXPO». Система находит три разных варианта и предлагает маршрут с короткой паузой и общественной аллеей: примерно тридцать одну минуту на ходьбу и двадцать на короткие остановки. Вместе — пятьдесят одна минута, включая возвращение. Обратите внимание: сады кампуса NU исключены после проверки правил доступа. Место на карте ещё не означает свободный вход. Теперь выберем тихое кафе с розеткой. Мы увидим кафе, но также предупреждение: розетки и тишина не подтверждены. И наконец уменьшим время: если ничего не подходит, система честно покажет пустой результат. Вернёмся к слайдам.</a:t>
             </a:r>
           </a:p>
         </p:txBody>
@@ -974,7 +1051,7 @@
           <a:p/>
           <a:p>
             <a:r>
-              <a:t>Важное требование трека — собрать данные автоматически. Наш скрипт получает открытые данные OpenStreetMap, фильтрует категории и удаляет дубликаты. В снимке двести девяносто восемь именованных мест в пяти районах. У ста двух есть часы работы, у двадцати шести — тег доступности. Исходных описаний в этих записях не было: короткие описания честно собраны из тегов. Мы сохраняем происхождение каждой записи и можем воспроизвести обработку без интернета. Дата скачивания не выдаётся за дату проверки заведения.</a:t>
+              <a:t>Важное требование трека — собрать данные автоматически. Наш скрипт получает открытые данные OpenStreetMap, фильтрует категории и удаляет дубликаты. В снимке триста именованных мест в пяти районах. У ста двух есть часы работы, у двадцати шести — тег доступности. Краткие описания карты собраны из тегов. Отдельно добавлен двадцать один факт об одиннадцати местах из официальных источников. Так мы обнаружили закрытие музея по понедельникам и ограничения входа в кампус. Мы сохраняем происхождение каждой записи и можем воспроизвести обработку без интернета. Дата скачивания не выдаётся за дату проверки заведения.</a:t>
             </a:r>
           </a:p>
         </p:txBody>
@@ -1050,7 +1127,7 @@
           <a:p/>
           <a:p>
             <a:r>
-              <a:t>Наш RAG начинается с реальных документов POI. Поиск сочетает BM25 и небольшой многоязычный словарь намерений. Затем строгие проверки исключают слишком далёкие места, неподходящие категории и визиты, которые не укладываются в известное расписание. Только после этого Gemini может выбрать идеи действий для найденных мест. Ответ ограничен разрешёнными идентификаторами и проверяется кодом. Это намеренно узкая генерация: модель не придумывает часы, адреса или новые заведения. Живой вызов проверен локально и на размещённом демо. При ошибке провайдера остаётся честно обозначенный шаблонный режим.</a:t>
+              <a:t>Наш RAG начинается с реальных документов POI. Поиск сочетает BM25 и небольшой многоязычный словарь намерений. Затем строгие проверки исключают слишком далёкие места, неподходящие категории и визиты, которые не укладываются в известное расписание. Затем Gemini пишет короткое объяснение, занятие и маленькую миссию по найденным фактам, настроению и интересам компании. Код проверяет места, принадлежность цитат и типичные неподтверждённые обещания. Для внешнего осмотра Байтерека недоступны факты о внутренних экспонатах. Но это не доказательство каждой фразы: исходные факты показаны отдельно. Живой вызов проверен локально и на размещённом демо. При ошибке провайдера остаётся честно обозначенный шаблонный режим.</a:t>
             </a:r>
           </a:p>
         </p:txBody>
@@ -1120,13 +1197,13 @@
           <a:lstStyle/>
           <a:p>
             <a:r>
-              <a:t>35 секунд</a:t>
+              <a:t>30 секунд</a:t>
             </a:r>
           </a:p>
           <a:p/>
           <a:p>
             <a:r>
-              <a:t>На этом экране видно нашу главную продуктовую особенность: отсутствие сведений не превращается в уверенное обещание. Мы разделяем факты из POI и предложенные действия. Тег доступности заведения не означает проверенный маршрут без ступеней. Точные координаты остаются в памяти браузера, история местоположения не сохраняется. Для карты не нужны сторонние тайлы. В опциональный запрос Gemini уходят только публичные места и несколько флагов предпочтений. При этом мы честно отмечаем, что инфраструктура провайдеров может обрабатывать сетевые метаданные.</a:t>
+              <a:t>Представьте троих друзей: одному нужен кофе, другому природа, третьему достопримечательность. Маршрут показывает, что учтены все три интереса. Если начинается дождь, план Б пересчитывает маршрут и честно показывает, чей интерес больше не помещается. Остальные ограничения сохраняются. Можно сравнить вариант на пятнадцать минут короче и вернуть исходный план. А маленькие миссии превращают остановки в наблюдения и разговоры.</a:t>
             </a:r>
           </a:p>
         </p:txBody>
@@ -1196,13 +1273,13 @@
           <a:lstStyle/>
           <a:p>
             <a:r>
-              <a:t>30 секунд</a:t>
+              <a:t>35 секунд</a:t>
             </a:r>
           </a:p>
           <a:p/>
           <a:p>
             <a:r>
-              <a:t>Мы проверили не только удачный сценарий. Есть тридцать два теста движка, API и собранного Worker, сто шестьдесят комбинаций контекста, восемь приёмочных сценариев и семнадцать проверок браузера. Среди них — закрытие заведения во время визита, слишком короткий бюджет, отсутствие данных, неверные ответы модели, мобильная вёрстка и отсутствие отправки координат. Это инженерные проверки прототипа. Они не означают, что мы уже измерили удовлетворённость реальных пользователей или качество живой модели.</a:t>
+              <a:t>На этом экране видно нашу главную продуктовую особенность: отсутствие сведений не превращается в уверенное обещание. Мы разделяем факты из POI и предложенные действия. Тег доступности заведения не означает проверенный маршрут без ступеней. Точные координаты остаются в памяти браузера, история местоположения не сохраняется. Для карты не нужны сторонние тайлы. В опциональный запрос Gemini уходят только публичные места и несколько флагов предпочтений. При этом мы честно отмечаем, что инфраструктура провайдеров может обрабатывать сетевые метаданные.</a:t>
             </a:r>
           </a:p>
         </p:txBody>
@@ -1272,13 +1349,13 @@
           <a:lstStyle/>
           <a:p>
             <a:r>
-              <a:t>35 секунд</a:t>
+              <a:t>30 секунд</a:t>
             </a:r>
           </a:p>
           <a:p/>
           <a:p>
             <a:r>
-              <a:t>Мы видим бесплатный пользовательский сценарий и потенциальную B2B-модель: виджет для отелей, городских порталов и организаторов мероприятий. Но это гипотеза, а не заявка на уже существующую выручку. Следующий шаг — двухнедельный пилот с двадцатью пользователями на трёх сценариях. Будем измерять полезность рекомендации, время до выбора и ошибки ограничений. Если появятся партнёрские размещения, они будут маркироваться и не смогут обойти фильтры времени или доступности.</a:t>
+              <a:t>Мы проверили не только удачный сценарий. Есть сорок семь тестов движка, API и собранного Worker, сто шестьдесят комбинаций контекста, двенадцать приёмочных сценариев и двадцать семь проверок браузера. Среди них — закрытие заведения во время визита, слишком короткий бюджет, отсутствие данных, неверные ответы модели, мобильная вёрстка и отсутствие отправки координат. Это инженерные проверки прототипа. Они не означают, что мы уже измерили удовлетворённость реальных пользователей или качество живой модели.</a:t>
             </a:r>
           </a:p>
         </p:txBody>
@@ -5005,7 +5082,7 @@
               </a:defRPr>
             </a:pPr>
             <a:r>
-              <a:t>10 / СЛЕДУЮЩИЙ ШАГ</a:t>
+              <a:t>10 / БИЗНЕС-ГИПОТЕЗА</a:t>
             </a:r>
           </a:p>
         </p:txBody>
@@ -5019,7 +5096,7 @@
         <p:spPr>
           <a:xfrm>
             <a:off x="533400" y="876300"/>
-            <a:ext cx="11049000" cy="1055370"/>
+            <a:ext cx="11049000" cy="573405"/>
           </a:xfrm>
           <a:prstGeom prst="rect">
             <a:avLst/>
@@ -5050,29 +5127,7 @@
               </a:defRPr>
             </a:pPr>
             <a:r>
-              <a:t>Честные ограничения превращаем в план</a:t>
-            </a:r>
-          </a:p>
-          <a:p>
-            <a:pPr>
-              <a:lnSpc>
-                <a:spcPts val="3794"/>
-              </a:lnSpc>
-              <a:spcBef>
-                <a:spcPts val="0"/>
-              </a:spcBef>
-              <a:spcAft>
-                <a:spcPts val="0"/>
-              </a:spcAft>
-              <a:defRPr sz="3300" b="0">
-                <a:solidFill>
-                  <a:srgbClr val="203E36"/>
-                </a:solidFill>
-                <a:latin typeface="Noto Serif"/>
-              </a:defRPr>
-            </a:pPr>
-            <a:r>
-              <a:t>развития.</a:t>
+              <a:t>Сначала польза человеку. Затем городской сервис.</a:t>
             </a:r>
           </a:p>
         </p:txBody>
@@ -5175,8 +5230,8 @@
         </p:nvSpPr>
         <p:spPr>
           <a:xfrm>
-            <a:off x="533400" y="2171700"/>
-            <a:ext cx="11125200" cy="708660"/>
+            <a:off x="533400" y="2133600"/>
+            <a:ext cx="5410200" cy="3429000"/>
           </a:xfrm>
           <a:prstGeom prst="roundRect">
             <a:avLst>
@@ -5184,7 +5239,7 @@
             </a:avLst>
           </a:prstGeom>
           <a:solidFill>
-            <a:srgbClr val="FFFEFA"/>
+            <a:srgbClr val="203E36"/>
           </a:solidFill>
           <a:ln>
             <a:noFill/>
@@ -5220,39 +5275,39 @@
         </p:nvSpPr>
         <p:spPr>
           <a:xfrm>
-            <a:off x="762000" y="2346960"/>
-            <a:ext cx="4495800" cy="374294"/>
-          </a:xfrm>
-          <a:prstGeom prst="rect">
-            <a:avLst/>
-          </a:prstGeom>
-          <a:noFill/>
-        </p:spPr>
-        <p:txBody>
-          <a:bodyPr wrap="none" lIns="0" rIns="0" tIns="0" bIns="0">
-            <a:spAutoFit/>
-          </a:bodyPr>
-          <a:lstStyle/>
-          <a:p>
-            <a:pPr>
-              <a:lnSpc>
-                <a:spcPts val="2227"/>
-              </a:lnSpc>
-              <a:spcBef>
-                <a:spcPts val="0"/>
-              </a:spcBef>
-              <a:spcAft>
-                <a:spcPts val="0"/>
-              </a:spcAft>
-              <a:defRPr sz="1739" b="0">
-                <a:solidFill>
-                  <a:srgbClr val="203E36"/>
+            <a:off x="800100" y="2438400"/>
+            <a:ext cx="4838700" cy="510844"/>
+          </a:xfrm>
+          <a:prstGeom prst="rect">
+            <a:avLst/>
+          </a:prstGeom>
+          <a:noFill/>
+        </p:spPr>
+        <p:txBody>
+          <a:bodyPr wrap="none" lIns="0" rIns="0" tIns="0" bIns="0">
+            <a:spAutoFit/>
+          </a:bodyPr>
+          <a:lstStyle/>
+          <a:p>
+            <a:pPr>
+              <a:lnSpc>
+                <a:spcPts val="3302"/>
+              </a:lnSpc>
+              <a:spcBef>
+                <a:spcPts val="0"/>
+              </a:spcBef>
+              <a:spcAft>
+                <a:spcPts val="0"/>
+              </a:spcAft>
+              <a:defRPr sz="2580" b="0">
+                <a:solidFill>
+                  <a:srgbClr val="D6ED92"/>
                 </a:solidFill>
                 <a:latin typeface="Noto Serif"/>
               </a:defRPr>
             </a:pPr>
             <a:r>
-              <a:t>Данные неполные</a:t>
+              <a:t>Бесплатно для прогулки</a:t>
             </a:r>
           </a:p>
         </p:txBody>
@@ -5265,39 +5320,61 @@
         </p:nvSpPr>
         <p:spPr>
           <a:xfrm>
-            <a:off x="5394960" y="2324100"/>
-            <a:ext cx="533400" cy="423062"/>
-          </a:xfrm>
-          <a:prstGeom prst="rect">
-            <a:avLst/>
-          </a:prstGeom>
-          <a:noFill/>
-        </p:spPr>
-        <p:txBody>
-          <a:bodyPr wrap="none" lIns="0" rIns="0" tIns="0" bIns="0">
-            <a:spAutoFit/>
-          </a:bodyPr>
-          <a:lstStyle/>
-          <a:p>
-            <a:pPr>
-              <a:lnSpc>
-                <a:spcPts val="2611"/>
-              </a:lnSpc>
-              <a:spcBef>
-                <a:spcPts val="0"/>
-              </a:spcBef>
-              <a:spcAft>
-                <a:spcPts val="0"/>
-              </a:spcAft>
-              <a:defRPr sz="2039" b="0">
-                <a:solidFill>
-                  <a:srgbClr val="687768"/>
+            <a:off x="800100" y="3223260"/>
+            <a:ext cx="4762500" cy="696163"/>
+          </a:xfrm>
+          <a:prstGeom prst="rect">
+            <a:avLst/>
+          </a:prstGeom>
+          <a:noFill/>
+        </p:spPr>
+        <p:txBody>
+          <a:bodyPr wrap="none" lIns="0" rIns="0" tIns="0" bIns="0">
+            <a:spAutoFit/>
+          </a:bodyPr>
+          <a:lstStyle/>
+          <a:p>
+            <a:pPr>
+              <a:lnSpc>
+                <a:spcPts val="2380"/>
+              </a:lnSpc>
+              <a:spcBef>
+                <a:spcPts val="0"/>
+              </a:spcBef>
+              <a:spcAft>
+                <a:spcPts val="0"/>
+              </a:spcAft>
+              <a:defRPr sz="1859" b="0">
+                <a:solidFill>
+                  <a:srgbClr val="FFFEFA"/>
                 </a:solidFill>
                 <a:latin typeface="Noto Sans"/>
               </a:defRPr>
             </a:pPr>
             <a:r>
-              <a:t>→</a:t>
+              <a:t>Жители, родители, туристы.</a:t>
+            </a:r>
+          </a:p>
+          <a:p>
+            <a:pPr>
+              <a:lnSpc>
+                <a:spcPts val="2380"/>
+              </a:lnSpc>
+              <a:spcBef>
+                <a:spcPts val="0"/>
+              </a:spcBef>
+              <a:spcAft>
+                <a:spcPts val="0"/>
+              </a:spcAft>
+              <a:defRPr sz="1859" b="0">
+                <a:solidFill>
+                  <a:srgbClr val="FFFEFA"/>
+                </a:solidFill>
+                <a:latin typeface="Noto Sans"/>
+              </a:defRPr>
+            </a:pPr>
+            <a:r>
+              <a:t>Короткий план без регистрации.</a:t>
             </a:r>
           </a:p>
         </p:txBody>
@@ -5310,39 +5387,61 @@
         </p:nvSpPr>
         <p:spPr>
           <a:xfrm>
-            <a:off x="6057900" y="2369820"/>
-            <a:ext cx="5334000" cy="345033"/>
-          </a:xfrm>
-          <a:prstGeom prst="rect">
-            <a:avLst/>
-          </a:prstGeom>
-          <a:noFill/>
-        </p:spPr>
-        <p:txBody>
-          <a:bodyPr wrap="none" lIns="0" rIns="0" tIns="0" bIns="0">
-            <a:spAutoFit/>
-          </a:bodyPr>
-          <a:lstStyle/>
-          <a:p>
-            <a:pPr>
-              <a:lnSpc>
-                <a:spcPts val="1996"/>
-              </a:lnSpc>
-              <a:spcBef>
-                <a:spcPts val="0"/>
-              </a:spcBef>
-              <a:spcAft>
-                <a:spcPts val="0"/>
-              </a:spcAft>
-              <a:defRPr sz="1560" b="0">
-                <a:solidFill>
-                  <a:srgbClr val="687768"/>
+            <a:off x="800100" y="4343400"/>
+            <a:ext cx="4762500" cy="618134"/>
+          </a:xfrm>
+          <a:prstGeom prst="rect">
+            <a:avLst/>
+          </a:prstGeom>
+          <a:noFill/>
+        </p:spPr>
+        <p:txBody>
+          <a:bodyPr wrap="none" lIns="0" rIns="0" tIns="0" bIns="0">
+            <a:spAutoFit/>
+          </a:bodyPr>
+          <a:lstStyle/>
+          <a:p>
+            <a:pPr>
+              <a:lnSpc>
+                <a:spcPts val="2073"/>
+              </a:lnSpc>
+              <a:spcBef>
+                <a:spcPts val="0"/>
+              </a:spcBef>
+              <a:spcAft>
+                <a:spcPts val="0"/>
+              </a:spcAft>
+              <a:defRPr sz="1620" b="0">
+                <a:solidFill>
+                  <a:srgbClr val="C1CEBC"/>
                 </a:solidFill>
                 <a:latin typeface="Noto Sans"/>
               </a:defRPr>
             </a:pPr>
             <a:r>
-              <a:t>Проверенные описания и расписания от партнёров.</a:t>
+              <a:t>Ценность: меньше времени на выбор,</a:t>
+            </a:r>
+          </a:p>
+          <a:p>
+            <a:pPr>
+              <a:lnSpc>
+                <a:spcPts val="2073"/>
+              </a:lnSpc>
+              <a:spcBef>
+                <a:spcPts val="0"/>
+              </a:spcBef>
+              <a:spcAft>
+                <a:spcPts val="0"/>
+              </a:spcAft>
+              <a:defRPr sz="1620" b="0">
+                <a:solidFill>
+                  <a:srgbClr val="C1CEBC"/>
+                </a:solidFill>
+                <a:latin typeface="Noto Sans"/>
+              </a:defRPr>
+            </a:pPr>
+            <a:r>
+              <a:t>больше понятных действий рядом.</a:t>
             </a:r>
           </a:p>
         </p:txBody>
@@ -5355,8 +5454,8 @@
         </p:nvSpPr>
         <p:spPr>
           <a:xfrm>
-            <a:off x="533400" y="3063240"/>
-            <a:ext cx="11125200" cy="708660"/>
+            <a:off x="6210300" y="2133600"/>
+            <a:ext cx="5448300" cy="3429000"/>
           </a:xfrm>
           <a:prstGeom prst="roundRect">
             <a:avLst>
@@ -5400,31 +5499,31 @@
         </p:nvSpPr>
         <p:spPr>
           <a:xfrm>
-            <a:off x="762000" y="3238500"/>
-            <a:ext cx="4495800" cy="374294"/>
-          </a:xfrm>
-          <a:prstGeom prst="rect">
-            <a:avLst/>
-          </a:prstGeom>
-          <a:noFill/>
-        </p:spPr>
-        <p:txBody>
-          <a:bodyPr wrap="none" lIns="0" rIns="0" tIns="0" bIns="0">
-            <a:spAutoFit/>
-          </a:bodyPr>
-          <a:lstStyle/>
-          <a:p>
-            <a:pPr>
-              <a:lnSpc>
-                <a:spcPts val="2227"/>
-              </a:lnSpc>
-              <a:spcBef>
-                <a:spcPts val="0"/>
-              </a:spcBef>
-              <a:spcAft>
-                <a:spcPts val="0"/>
-              </a:spcAft>
-              <a:defRPr sz="1739" b="0">
+            <a:off x="6477000" y="2438400"/>
+            <a:ext cx="4876800" cy="510844"/>
+          </a:xfrm>
+          <a:prstGeom prst="rect">
+            <a:avLst/>
+          </a:prstGeom>
+          <a:noFill/>
+        </p:spPr>
+        <p:txBody>
+          <a:bodyPr wrap="none" lIns="0" rIns="0" tIns="0" bIns="0">
+            <a:spAutoFit/>
+          </a:bodyPr>
+          <a:lstStyle/>
+          <a:p>
+            <a:pPr>
+              <a:lnSpc>
+                <a:spcPts val="3302"/>
+              </a:lnSpc>
+              <a:spcBef>
+                <a:spcPts val="0"/>
+              </a:spcBef>
+              <a:spcAft>
+                <a:spcPts val="0"/>
+              </a:spcAft>
+              <a:defRPr sz="2580" b="0">
                 <a:solidFill>
                   <a:srgbClr val="203E36"/>
                 </a:solidFill>
@@ -5432,7 +5531,7 @@
               </a:defRPr>
             </a:pPr>
             <a:r>
-              <a:t>Дорога приблизительная</a:t>
+              <a:t>B2B после пилота</a:t>
             </a:r>
           </a:p>
         </p:txBody>
@@ -5445,31 +5544,31 @@
         </p:nvSpPr>
         <p:spPr>
           <a:xfrm>
-            <a:off x="5394960" y="3215640"/>
-            <a:ext cx="533400" cy="423062"/>
-          </a:xfrm>
-          <a:prstGeom prst="rect">
-            <a:avLst/>
-          </a:prstGeom>
-          <a:noFill/>
-        </p:spPr>
-        <p:txBody>
-          <a:bodyPr wrap="none" lIns="0" rIns="0" tIns="0" bIns="0">
-            <a:spAutoFit/>
-          </a:bodyPr>
-          <a:lstStyle/>
-          <a:p>
-            <a:pPr>
-              <a:lnSpc>
-                <a:spcPts val="2611"/>
-              </a:lnSpc>
-              <a:spcBef>
-                <a:spcPts val="0"/>
-              </a:spcBef>
-              <a:spcAft>
-                <a:spcPts val="0"/>
-              </a:spcAft>
-              <a:defRPr sz="2039" b="0">
+            <a:off x="6477000" y="3223260"/>
+            <a:ext cx="4762500" cy="696163"/>
+          </a:xfrm>
+          <a:prstGeom prst="rect">
+            <a:avLst/>
+          </a:prstGeom>
+          <a:noFill/>
+        </p:spPr>
+        <p:txBody>
+          <a:bodyPr wrap="none" lIns="0" rIns="0" tIns="0" bIns="0">
+            <a:spAutoFit/>
+          </a:bodyPr>
+          <a:lstStyle/>
+          <a:p>
+            <a:pPr>
+              <a:lnSpc>
+                <a:spcPts val="2380"/>
+              </a:lnSpc>
+              <a:spcBef>
+                <a:spcPts val="0"/>
+              </a:spcBef>
+              <a:spcAft>
+                <a:spcPts val="0"/>
+              </a:spcAft>
+              <a:defRPr sz="1859" b="0">
                 <a:solidFill>
                   <a:srgbClr val="687768"/>
                 </a:solidFill>
@@ -5477,7 +5576,29 @@
               </a:defRPr>
             </a:pPr>
             <a:r>
-              <a:t>→</a:t>
+              <a:t>Отели, городские порталы,</a:t>
+            </a:r>
+          </a:p>
+          <a:p>
+            <a:pPr>
+              <a:lnSpc>
+                <a:spcPts val="2380"/>
+              </a:lnSpc>
+              <a:spcBef>
+                <a:spcPts val="0"/>
+              </a:spcBef>
+              <a:spcAft>
+                <a:spcPts val="0"/>
+              </a:spcAft>
+              <a:defRPr sz="1859" b="0">
+                <a:solidFill>
+                  <a:srgbClr val="687768"/>
+                </a:solidFill>
+                <a:latin typeface="Noto Sans"/>
+              </a:defRPr>
+            </a:pPr>
+            <a:r>
+              <a:t>организаторы мероприятий.</a:t>
             </a:r>
           </a:p>
         </p:txBody>
@@ -5490,31 +5611,31 @@
         </p:nvSpPr>
         <p:spPr>
           <a:xfrm>
-            <a:off x="6057900" y="3261360"/>
-            <a:ext cx="5334000" cy="345033"/>
-          </a:xfrm>
-          <a:prstGeom prst="rect">
-            <a:avLst/>
-          </a:prstGeom>
-          <a:noFill/>
-        </p:spPr>
-        <p:txBody>
-          <a:bodyPr wrap="none" lIns="0" rIns="0" tIns="0" bIns="0">
-            <a:spAutoFit/>
-          </a:bodyPr>
-          <a:lstStyle/>
-          <a:p>
-            <a:pPr>
-              <a:lnSpc>
-                <a:spcPts val="1996"/>
-              </a:lnSpc>
-              <a:spcBef>
-                <a:spcPts val="0"/>
-              </a:spcBef>
-              <a:spcAft>
-                <a:spcPts val="0"/>
-              </a:spcAft>
-              <a:defRPr sz="1560" b="0">
+            <a:off x="6477000" y="4305300"/>
+            <a:ext cx="4762500" cy="881481"/>
+          </a:xfrm>
+          <a:prstGeom prst="rect">
+            <a:avLst/>
+          </a:prstGeom>
+          <a:noFill/>
+        </p:spPr>
+        <p:txBody>
+          <a:bodyPr wrap="none" lIns="0" rIns="0" tIns="0" bIns="0">
+            <a:spAutoFit/>
+          </a:bodyPr>
+          <a:lstStyle/>
+          <a:p>
+            <a:pPr>
+              <a:lnSpc>
+                <a:spcPts val="2073"/>
+              </a:lnSpc>
+              <a:spcBef>
+                <a:spcPts val="0"/>
+              </a:spcBef>
+              <a:spcAft>
+                <a:spcPts val="0"/>
+              </a:spcAft>
+              <a:defRPr sz="1620" b="0">
                 <a:solidFill>
                   <a:srgbClr val="687768"/>
                 </a:solidFill>
@@ -5522,134 +5643,21 @@
               </a:defRPr>
             </a:pPr>
             <a:r>
-              <a:t>Пешеходный граф: входы, переходы, барьеры.</a:t>
-            </a:r>
-          </a:p>
-        </p:txBody>
-      </p:sp>
-      <p:sp>
-        <p:nvSpPr>
-          <p:cNvPr id="16" name="Rounded Rectangle 15"/>
-          <p:cNvSpPr/>
-          <p:nvPr/>
-        </p:nvSpPr>
-        <p:spPr>
-          <a:xfrm>
-            <a:off x="533400" y="3954779"/>
-            <a:ext cx="11125200" cy="708660"/>
-          </a:xfrm>
-          <a:prstGeom prst="roundRect">
-            <a:avLst>
-              <a:gd name="adj" fmla="val 4000"/>
-            </a:avLst>
-          </a:prstGeom>
-          <a:solidFill>
-            <a:srgbClr val="FFFEFA"/>
-          </a:solidFill>
-          <a:ln>
-            <a:noFill/>
-          </a:ln>
-        </p:spPr>
-        <p:style>
-          <a:lnRef idx="1">
-            <a:schemeClr val="accent1"/>
-          </a:lnRef>
-          <a:fillRef idx="3">
-            <a:schemeClr val="accent1"/>
-          </a:fillRef>
-          <a:effectRef idx="0">
-            <a:schemeClr val="accent1"/>
-          </a:effectRef>
-          <a:fontRef idx="minor">
-            <a:schemeClr val="lt1"/>
-          </a:fontRef>
-        </p:style>
-        <p:txBody>
-          <a:bodyPr rtlCol="0" anchor="ctr"/>
-          <a:lstStyle/>
-          <a:p>
-            <a:pPr algn="ctr"/>
-          </a:p>
-        </p:txBody>
-      </p:sp>
-      <p:sp>
-        <p:nvSpPr>
-          <p:cNvPr id="17" name="TextBox 16"/>
-          <p:cNvSpPr txBox="1"/>
-          <p:nvPr/>
-        </p:nvSpPr>
-        <p:spPr>
-          <a:xfrm>
-            <a:off x="762000" y="4130040"/>
-            <a:ext cx="4495800" cy="374294"/>
-          </a:xfrm>
-          <a:prstGeom prst="rect">
-            <a:avLst/>
-          </a:prstGeom>
-          <a:noFill/>
-        </p:spPr>
-        <p:txBody>
-          <a:bodyPr wrap="none" lIns="0" rIns="0" tIns="0" bIns="0">
-            <a:spAutoFit/>
-          </a:bodyPr>
-          <a:lstStyle/>
-          <a:p>
-            <a:pPr>
-              <a:lnSpc>
-                <a:spcPts val="2227"/>
-              </a:lnSpc>
-              <a:spcBef>
-                <a:spcPts val="0"/>
-              </a:spcBef>
-              <a:spcAft>
-                <a:spcPts val="0"/>
-              </a:spcAft>
-              <a:defRPr sz="1739" b="0">
-                <a:solidFill>
-                  <a:srgbClr val="203E36"/>
-                </a:solidFill>
-                <a:latin typeface="Noto Serif"/>
-              </a:defRPr>
-            </a:pPr>
-            <a:r>
-              <a:t>Генерация ограничена</a:t>
-            </a:r>
-          </a:p>
-        </p:txBody>
-      </p:sp>
-      <p:sp>
-        <p:nvSpPr>
-          <p:cNvPr id="18" name="TextBox 17"/>
-          <p:cNvSpPr txBox="1"/>
-          <p:nvPr/>
-        </p:nvSpPr>
-        <p:spPr>
-          <a:xfrm>
-            <a:off x="5394960" y="4107179"/>
-            <a:ext cx="533400" cy="423062"/>
-          </a:xfrm>
-          <a:prstGeom prst="rect">
-            <a:avLst/>
-          </a:prstGeom>
-          <a:noFill/>
-        </p:spPr>
-        <p:txBody>
-          <a:bodyPr wrap="none" lIns="0" rIns="0" tIns="0" bIns="0">
-            <a:spAutoFit/>
-          </a:bodyPr>
-          <a:lstStyle/>
-          <a:p>
-            <a:pPr>
-              <a:lnSpc>
-                <a:spcPts val="2611"/>
-              </a:lnSpc>
-              <a:spcBef>
-                <a:spcPts val="0"/>
-              </a:spcBef>
-              <a:spcAft>
-                <a:spcPts val="0"/>
-              </a:spcAft>
-              <a:defRPr sz="2039" b="0">
+              <a:t>Гипотеза: платный виджет и интеграция.</a:t>
+            </a:r>
+          </a:p>
+          <a:p>
+            <a:pPr>
+              <a:lnSpc>
+                <a:spcPts val="2073"/>
+              </a:lnSpc>
+              <a:spcBef>
+                <a:spcPts val="0"/>
+              </a:spcBef>
+              <a:spcAft>
+                <a:spcPts val="0"/>
+              </a:spcAft>
+              <a:defRPr sz="1620" b="0">
                 <a:solidFill>
                   <a:srgbClr val="687768"/>
                 </a:solidFill>
@@ -5657,44 +5665,21 @@
               </a:defRPr>
             </a:pPr>
             <a:r>
-              <a:t>→</a:t>
-            </a:r>
-          </a:p>
-        </p:txBody>
-      </p:sp>
-      <p:sp>
-        <p:nvSpPr>
-          <p:cNvPr id="19" name="TextBox 18"/>
-          <p:cNvSpPr txBox="1"/>
-          <p:nvPr/>
-        </p:nvSpPr>
-        <p:spPr>
-          <a:xfrm>
-            <a:off x="6057900" y="4152900"/>
-            <a:ext cx="5334000" cy="345033"/>
-          </a:xfrm>
-          <a:prstGeom prst="rect">
-            <a:avLst/>
-          </a:prstGeom>
-          <a:noFill/>
-        </p:spPr>
-        <p:txBody>
-          <a:bodyPr wrap="none" lIns="0" rIns="0" tIns="0" bIns="0">
-            <a:spAutoFit/>
-          </a:bodyPr>
-          <a:lstStyle/>
-          <a:p>
-            <a:pPr>
-              <a:lnSpc>
-                <a:spcPts val="1996"/>
-              </a:lnSpc>
-              <a:spcBef>
-                <a:spcPts val="0"/>
-              </a:spcBef>
-              <a:spcAft>
-                <a:spcPts val="0"/>
-              </a:spcAft>
-              <a:defRPr sz="1560" b="0">
+              <a:t>Реклама маркируется и не отменяет</a:t>
+            </a:r>
+          </a:p>
+          <a:p>
+            <a:pPr>
+              <a:lnSpc>
+                <a:spcPts val="2073"/>
+              </a:lnSpc>
+              <a:spcBef>
+                <a:spcPts val="0"/>
+              </a:spcBef>
+              <a:spcAft>
+                <a:spcPts val="0"/>
+              </a:spcAft>
+              <a:defRPr sz="1620" b="0">
                 <a:solidFill>
                   <a:srgbClr val="687768"/>
                 </a:solidFill>
@@ -5702,134 +5687,44 @@
               </a:defRPr>
             </a:pPr>
             <a:r>
-              <a:t>Оценка полезности и устойчивости на сценариях.</a:t>
-            </a:r>
-          </a:p>
-        </p:txBody>
-      </p:sp>
-      <p:sp>
-        <p:nvSpPr>
-          <p:cNvPr id="20" name="Rounded Rectangle 19"/>
-          <p:cNvSpPr/>
-          <p:nvPr/>
-        </p:nvSpPr>
-        <p:spPr>
-          <a:xfrm>
-            <a:off x="533400" y="4846320"/>
-            <a:ext cx="11125200" cy="708660"/>
-          </a:xfrm>
-          <a:prstGeom prst="roundRect">
-            <a:avLst>
-              <a:gd name="adj" fmla="val 4000"/>
-            </a:avLst>
-          </a:prstGeom>
-          <a:solidFill>
-            <a:srgbClr val="FFFEFA"/>
-          </a:solidFill>
-          <a:ln>
-            <a:noFill/>
-          </a:ln>
-        </p:spPr>
-        <p:style>
-          <a:lnRef idx="1">
-            <a:schemeClr val="accent1"/>
-          </a:lnRef>
-          <a:fillRef idx="3">
-            <a:schemeClr val="accent1"/>
-          </a:fillRef>
-          <a:effectRef idx="0">
-            <a:schemeClr val="accent1"/>
-          </a:effectRef>
-          <a:fontRef idx="minor">
-            <a:schemeClr val="lt1"/>
-          </a:fontRef>
-        </p:style>
-        <p:txBody>
-          <a:bodyPr rtlCol="0" anchor="ctr"/>
-          <a:lstStyle/>
-          <a:p>
-            <a:pPr algn="ctr"/>
-          </a:p>
-        </p:txBody>
-      </p:sp>
-      <p:sp>
-        <p:nvSpPr>
-          <p:cNvPr id="21" name="TextBox 20"/>
-          <p:cNvSpPr txBox="1"/>
-          <p:nvPr/>
-        </p:nvSpPr>
-        <p:spPr>
-          <a:xfrm>
-            <a:off x="762000" y="5021580"/>
-            <a:ext cx="4495800" cy="374294"/>
-          </a:xfrm>
-          <a:prstGeom prst="rect">
-            <a:avLst/>
-          </a:prstGeom>
-          <a:noFill/>
-        </p:spPr>
-        <p:txBody>
-          <a:bodyPr wrap="none" lIns="0" rIns="0" tIns="0" bIns="0">
-            <a:spAutoFit/>
-          </a:bodyPr>
-          <a:lstStyle/>
-          <a:p>
-            <a:pPr>
-              <a:lnSpc>
-                <a:spcPts val="2227"/>
-              </a:lnSpc>
-              <a:spcBef>
-                <a:spcPts val="0"/>
-              </a:spcBef>
-              <a:spcAft>
-                <a:spcPts val="0"/>
-              </a:spcAft>
-              <a:defRPr sz="1739" b="0">
-                <a:solidFill>
-                  <a:srgbClr val="203E36"/>
-                </a:solidFill>
-                <a:latin typeface="Noto Serif"/>
-              </a:defRPr>
-            </a:pPr>
-            <a:r>
-              <a:t>Пока нет пользовательского пилота</a:t>
-            </a:r>
-          </a:p>
-        </p:txBody>
-      </p:sp>
-      <p:sp>
-        <p:nvSpPr>
-          <p:cNvPr id="22" name="TextBox 21"/>
-          <p:cNvSpPr txBox="1"/>
-          <p:nvPr/>
-        </p:nvSpPr>
-        <p:spPr>
-          <a:xfrm>
-            <a:off x="5394960" y="4998720"/>
-            <a:ext cx="533400" cy="423062"/>
-          </a:xfrm>
-          <a:prstGeom prst="rect">
-            <a:avLst/>
-          </a:prstGeom>
-          <a:noFill/>
-        </p:spPr>
-        <p:txBody>
-          <a:bodyPr wrap="none" lIns="0" rIns="0" tIns="0" bIns="0">
-            <a:spAutoFit/>
-          </a:bodyPr>
-          <a:lstStyle/>
-          <a:p>
-            <a:pPr>
-              <a:lnSpc>
-                <a:spcPts val="2611"/>
-              </a:lnSpc>
-              <a:spcBef>
-                <a:spcPts val="0"/>
-              </a:spcBef>
-              <a:spcAft>
-                <a:spcPts val="0"/>
-              </a:spcAft>
-              <a:defRPr sz="2039" b="0">
+              <a:t>ограничения.</a:t>
+            </a:r>
+          </a:p>
+        </p:txBody>
+      </p:sp>
+      <p:sp>
+        <p:nvSpPr>
+          <p:cNvPr id="16" name="TextBox 15"/>
+          <p:cNvSpPr txBox="1"/>
+          <p:nvPr/>
+        </p:nvSpPr>
+        <p:spPr>
+          <a:xfrm>
+            <a:off x="579120" y="5935980"/>
+            <a:ext cx="10972800" cy="315772"/>
+          </a:xfrm>
+          <a:prstGeom prst="rect">
+            <a:avLst/>
+          </a:prstGeom>
+          <a:noFill/>
+        </p:spPr>
+        <p:txBody>
+          <a:bodyPr wrap="none" lIns="0" rIns="0" tIns="0" bIns="0">
+            <a:spAutoFit/>
+          </a:bodyPr>
+          <a:lstStyle/>
+          <a:p>
+            <a:pPr>
+              <a:lnSpc>
+                <a:spcPts val="1766"/>
+              </a:lnSpc>
+              <a:spcBef>
+                <a:spcPts val="0"/>
+              </a:spcBef>
+              <a:spcAft>
+                <a:spcPts val="0"/>
+              </a:spcAft>
+              <a:defRPr sz="1380" b="0">
                 <a:solidFill>
                   <a:srgbClr val="687768"/>
                 </a:solidFill>
@@ -5837,97 +5732,7 @@
               </a:defRPr>
             </a:pPr>
             <a:r>
-              <a:t>→</a:t>
-            </a:r>
-          </a:p>
-        </p:txBody>
-      </p:sp>
-      <p:sp>
-        <p:nvSpPr>
-          <p:cNvPr id="23" name="TextBox 22"/>
-          <p:cNvSpPr txBox="1"/>
-          <p:nvPr/>
-        </p:nvSpPr>
-        <p:spPr>
-          <a:xfrm>
-            <a:off x="6057900" y="5044440"/>
-            <a:ext cx="5334000" cy="345033"/>
-          </a:xfrm>
-          <a:prstGeom prst="rect">
-            <a:avLst/>
-          </a:prstGeom>
-          <a:noFill/>
-        </p:spPr>
-        <p:txBody>
-          <a:bodyPr wrap="none" lIns="0" rIns="0" tIns="0" bIns="0">
-            <a:spAutoFit/>
-          </a:bodyPr>
-          <a:lstStyle/>
-          <a:p>
-            <a:pPr>
-              <a:lnSpc>
-                <a:spcPts val="1996"/>
-              </a:lnSpc>
-              <a:spcBef>
-                <a:spcPts val="0"/>
-              </a:spcBef>
-              <a:spcAft>
-                <a:spcPts val="0"/>
-              </a:spcAft>
-              <a:defRPr sz="1560" b="0">
-                <a:solidFill>
-                  <a:srgbClr val="687768"/>
-                </a:solidFill>
-                <a:latin typeface="Noto Sans"/>
-              </a:defRPr>
-            </a:pPr>
-            <a:r>
-              <a:t>Наблюдения, обратная связь и проверка спроса.</a:t>
-            </a:r>
-          </a:p>
-        </p:txBody>
-      </p:sp>
-      <p:sp>
-        <p:nvSpPr>
-          <p:cNvPr id="24" name="TextBox 23"/>
-          <p:cNvSpPr txBox="1"/>
-          <p:nvPr/>
-        </p:nvSpPr>
-        <p:spPr>
-          <a:xfrm>
-            <a:off x="579120" y="5996940"/>
-            <a:ext cx="10896600" cy="325526"/>
-          </a:xfrm>
-          <a:prstGeom prst="rect">
-            <a:avLst/>
-          </a:prstGeom>
-          <a:noFill/>
-        </p:spPr>
-        <p:txBody>
-          <a:bodyPr wrap="none" lIns="0" rIns="0" tIns="0" bIns="0">
-            <a:spAutoFit/>
-          </a:bodyPr>
-          <a:lstStyle/>
-          <a:p>
-            <a:pPr>
-              <a:lnSpc>
-                <a:spcPts val="1843"/>
-              </a:lnSpc>
-              <a:spcBef>
-                <a:spcPts val="0"/>
-              </a:spcBef>
-              <a:spcAft>
-                <a:spcPts val="0"/>
-              </a:spcAft>
-              <a:defRPr sz="1439" b="0">
-                <a:solidFill>
-                  <a:srgbClr val="687768"/>
-                </a:solidFill>
-                <a:latin typeface="Noto Sans"/>
-              </a:defRPr>
-            </a:pPr>
-            <a:r>
-              <a:t>Дальше: события, групповое планирование, независимая проверка доступности.</a:t>
+              <a:t>План пилота: 20 пользователей · 3 сценария · 2 недели. Это цель, не уже достигнутый результат.</a:t>
             </a:r>
           </a:p>
         </p:txBody>
@@ -5965,7 +5770,7 @@
             <a:avLst/>
           </a:prstGeom>
           <a:solidFill>
-            <a:srgbClr val="203E36"/>
+            <a:srgbClr val="F6F5EF"/>
           </a:solidFill>
           <a:ln>
             <a:noFill/>
@@ -6027,7 +5832,7 @@
               </a:spcAft>
               <a:defRPr sz="1080" b="1">
                 <a:solidFill>
-                  <a:srgbClr val="D6ED92"/>
+                  <a:srgbClr val="687768"/>
                 </a:solidFill>
                 <a:latin typeface="Noto Sans"/>
               </a:defRPr>
@@ -6072,13 +5877,1108 @@
               </a:spcAft>
               <a:defRPr sz="1019" b="0">
                 <a:solidFill>
+                  <a:srgbClr val="687768"/>
+                </a:solidFill>
+                <a:latin typeface="Noto Sans"/>
+              </a:defRPr>
+            </a:pPr>
+            <a:r>
+              <a:t>11 / СЛЕДУЮЩИЙ ШАГ</a:t>
+            </a:r>
+          </a:p>
+        </p:txBody>
+      </p:sp>
+      <p:sp>
+        <p:nvSpPr>
+          <p:cNvPr id="5" name="TextBox 4"/>
+          <p:cNvSpPr txBox="1"/>
+          <p:nvPr/>
+        </p:nvSpPr>
+        <p:spPr>
+          <a:xfrm>
+            <a:off x="533400" y="876300"/>
+            <a:ext cx="11049000" cy="1055370"/>
+          </a:xfrm>
+          <a:prstGeom prst="rect">
+            <a:avLst/>
+          </a:prstGeom>
+          <a:noFill/>
+        </p:spPr>
+        <p:txBody>
+          <a:bodyPr wrap="none" lIns="0" rIns="0" tIns="0" bIns="0">
+            <a:spAutoFit/>
+          </a:bodyPr>
+          <a:lstStyle/>
+          <a:p>
+            <a:pPr>
+              <a:lnSpc>
+                <a:spcPts val="3794"/>
+              </a:lnSpc>
+              <a:spcBef>
+                <a:spcPts val="0"/>
+              </a:spcBef>
+              <a:spcAft>
+                <a:spcPts val="0"/>
+              </a:spcAft>
+              <a:defRPr sz="3300" b="0">
+                <a:solidFill>
+                  <a:srgbClr val="203E36"/>
+                </a:solidFill>
+                <a:latin typeface="Noto Serif"/>
+              </a:defRPr>
+            </a:pPr>
+            <a:r>
+              <a:t>Честные ограничения превращаем в план</a:t>
+            </a:r>
+          </a:p>
+          <a:p>
+            <a:pPr>
+              <a:lnSpc>
+                <a:spcPts val="3794"/>
+              </a:lnSpc>
+              <a:spcBef>
+                <a:spcPts val="0"/>
+              </a:spcBef>
+              <a:spcAft>
+                <a:spcPts val="0"/>
+              </a:spcAft>
+              <a:defRPr sz="3300" b="0">
+                <a:solidFill>
+                  <a:srgbClr val="203E36"/>
+                </a:solidFill>
+                <a:latin typeface="Noto Serif"/>
+              </a:defRPr>
+            </a:pPr>
+            <a:r>
+              <a:t>развития.</a:t>
+            </a:r>
+          </a:p>
+        </p:txBody>
+      </p:sp>
+      <p:sp>
+        <p:nvSpPr>
+          <p:cNvPr id="6" name="TextBox 5"/>
+          <p:cNvSpPr txBox="1"/>
+          <p:nvPr/>
+        </p:nvSpPr>
+        <p:spPr>
+          <a:xfrm>
+            <a:off x="533400" y="6446520"/>
+            <a:ext cx="8382000" cy="247497"/>
+          </a:xfrm>
+          <a:prstGeom prst="rect">
+            <a:avLst/>
+          </a:prstGeom>
+          <a:noFill/>
+        </p:spPr>
+        <p:txBody>
+          <a:bodyPr wrap="none" lIns="0" rIns="0" tIns="0" bIns="0">
+            <a:spAutoFit/>
+          </a:bodyPr>
+          <a:lstStyle/>
+          <a:p>
+            <a:pPr>
+              <a:lnSpc>
+                <a:spcPts val="1228"/>
+              </a:lnSpc>
+              <a:spcBef>
+                <a:spcPts val="0"/>
+              </a:spcBef>
+              <a:spcAft>
+                <a:spcPts val="0"/>
+              </a:spcAft>
+              <a:defRPr sz="960" b="0">
+                <a:solidFill>
+                  <a:srgbClr val="687768"/>
+                </a:solidFill>
+                <a:latin typeface="Noto Sans"/>
+              </a:defRPr>
+            </a:pPr>
+            <a:r>
+              <a:t>BUILD WITH AI · SMART CITY · TRACK 1</a:t>
+            </a:r>
+          </a:p>
+        </p:txBody>
+      </p:sp>
+      <p:sp>
+        <p:nvSpPr>
+          <p:cNvPr id="7" name="TextBox 6"/>
+          <p:cNvSpPr txBox="1"/>
+          <p:nvPr/>
+        </p:nvSpPr>
+        <p:spPr>
+          <a:xfrm>
+            <a:off x="11125200" y="6416040"/>
+            <a:ext cx="495300" cy="296265"/>
+          </a:xfrm>
+          <a:prstGeom prst="rect">
+            <a:avLst/>
+          </a:prstGeom>
+          <a:noFill/>
+        </p:spPr>
+        <p:txBody>
+          <a:bodyPr wrap="none" lIns="0" rIns="0" tIns="0" bIns="0">
+            <a:spAutoFit/>
+          </a:bodyPr>
+          <a:lstStyle/>
+          <a:p>
+            <a:pPr>
+              <a:lnSpc>
+                <a:spcPts val="1612"/>
+              </a:lnSpc>
+              <a:spcBef>
+                <a:spcPts val="0"/>
+              </a:spcBef>
+              <a:spcAft>
+                <a:spcPts val="0"/>
+              </a:spcAft>
+              <a:defRPr sz="1260" b="1">
+                <a:solidFill>
+                  <a:srgbClr val="687768"/>
+                </a:solidFill>
+                <a:latin typeface="Noto Sans"/>
+              </a:defRPr>
+            </a:pPr>
+            <a:r>
+              <a:t>11</a:t>
+            </a:r>
+          </a:p>
+        </p:txBody>
+      </p:sp>
+      <p:sp>
+        <p:nvSpPr>
+          <p:cNvPr id="8" name="Rounded Rectangle 7"/>
+          <p:cNvSpPr/>
+          <p:nvPr/>
+        </p:nvSpPr>
+        <p:spPr>
+          <a:xfrm>
+            <a:off x="533400" y="2171700"/>
+            <a:ext cx="11125200" cy="708660"/>
+          </a:xfrm>
+          <a:prstGeom prst="roundRect">
+            <a:avLst>
+              <a:gd name="adj" fmla="val 4000"/>
+            </a:avLst>
+          </a:prstGeom>
+          <a:solidFill>
+            <a:srgbClr val="FFFEFA"/>
+          </a:solidFill>
+          <a:ln>
+            <a:noFill/>
+          </a:ln>
+        </p:spPr>
+        <p:style>
+          <a:lnRef idx="1">
+            <a:schemeClr val="accent1"/>
+          </a:lnRef>
+          <a:fillRef idx="3">
+            <a:schemeClr val="accent1"/>
+          </a:fillRef>
+          <a:effectRef idx="0">
+            <a:schemeClr val="accent1"/>
+          </a:effectRef>
+          <a:fontRef idx="minor">
+            <a:schemeClr val="lt1"/>
+          </a:fontRef>
+        </p:style>
+        <p:txBody>
+          <a:bodyPr rtlCol="0" anchor="ctr"/>
+          <a:lstStyle/>
+          <a:p>
+            <a:pPr algn="ctr"/>
+          </a:p>
+        </p:txBody>
+      </p:sp>
+      <p:sp>
+        <p:nvSpPr>
+          <p:cNvPr id="9" name="TextBox 8"/>
+          <p:cNvSpPr txBox="1"/>
+          <p:nvPr/>
+        </p:nvSpPr>
+        <p:spPr>
+          <a:xfrm>
+            <a:off x="762000" y="2346960"/>
+            <a:ext cx="4495800" cy="374294"/>
+          </a:xfrm>
+          <a:prstGeom prst="rect">
+            <a:avLst/>
+          </a:prstGeom>
+          <a:noFill/>
+        </p:spPr>
+        <p:txBody>
+          <a:bodyPr wrap="none" lIns="0" rIns="0" tIns="0" bIns="0">
+            <a:spAutoFit/>
+          </a:bodyPr>
+          <a:lstStyle/>
+          <a:p>
+            <a:pPr>
+              <a:lnSpc>
+                <a:spcPts val="2227"/>
+              </a:lnSpc>
+              <a:spcBef>
+                <a:spcPts val="0"/>
+              </a:spcBef>
+              <a:spcAft>
+                <a:spcPts val="0"/>
+              </a:spcAft>
+              <a:defRPr sz="1739" b="0">
+                <a:solidFill>
+                  <a:srgbClr val="203E36"/>
+                </a:solidFill>
+                <a:latin typeface="Noto Serif"/>
+              </a:defRPr>
+            </a:pPr>
+            <a:r>
+              <a:t>Данные неполные</a:t>
+            </a:r>
+          </a:p>
+        </p:txBody>
+      </p:sp>
+      <p:sp>
+        <p:nvSpPr>
+          <p:cNvPr id="10" name="TextBox 9"/>
+          <p:cNvSpPr txBox="1"/>
+          <p:nvPr/>
+        </p:nvSpPr>
+        <p:spPr>
+          <a:xfrm>
+            <a:off x="5394960" y="2324100"/>
+            <a:ext cx="533400" cy="423062"/>
+          </a:xfrm>
+          <a:prstGeom prst="rect">
+            <a:avLst/>
+          </a:prstGeom>
+          <a:noFill/>
+        </p:spPr>
+        <p:txBody>
+          <a:bodyPr wrap="none" lIns="0" rIns="0" tIns="0" bIns="0">
+            <a:spAutoFit/>
+          </a:bodyPr>
+          <a:lstStyle/>
+          <a:p>
+            <a:pPr>
+              <a:lnSpc>
+                <a:spcPts val="2611"/>
+              </a:lnSpc>
+              <a:spcBef>
+                <a:spcPts val="0"/>
+              </a:spcBef>
+              <a:spcAft>
+                <a:spcPts val="0"/>
+              </a:spcAft>
+              <a:defRPr sz="2039" b="0">
+                <a:solidFill>
+                  <a:srgbClr val="687768"/>
+                </a:solidFill>
+                <a:latin typeface="Noto Sans"/>
+              </a:defRPr>
+            </a:pPr>
+            <a:r>
+              <a:t>→</a:t>
+            </a:r>
+          </a:p>
+        </p:txBody>
+      </p:sp>
+      <p:sp>
+        <p:nvSpPr>
+          <p:cNvPr id="11" name="TextBox 10"/>
+          <p:cNvSpPr txBox="1"/>
+          <p:nvPr/>
+        </p:nvSpPr>
+        <p:spPr>
+          <a:xfrm>
+            <a:off x="6057900" y="2369820"/>
+            <a:ext cx="5334000" cy="345033"/>
+          </a:xfrm>
+          <a:prstGeom prst="rect">
+            <a:avLst/>
+          </a:prstGeom>
+          <a:noFill/>
+        </p:spPr>
+        <p:txBody>
+          <a:bodyPr wrap="none" lIns="0" rIns="0" tIns="0" bIns="0">
+            <a:spAutoFit/>
+          </a:bodyPr>
+          <a:lstStyle/>
+          <a:p>
+            <a:pPr>
+              <a:lnSpc>
+                <a:spcPts val="1996"/>
+              </a:lnSpc>
+              <a:spcBef>
+                <a:spcPts val="0"/>
+              </a:spcBef>
+              <a:spcAft>
+                <a:spcPts val="0"/>
+              </a:spcAft>
+              <a:defRPr sz="1560" b="0">
+                <a:solidFill>
+                  <a:srgbClr val="687768"/>
+                </a:solidFill>
+                <a:latin typeface="Noto Sans"/>
+              </a:defRPr>
+            </a:pPr>
+            <a:r>
+              <a:t>Проверенные описания и расписания от партнёров.</a:t>
+            </a:r>
+          </a:p>
+        </p:txBody>
+      </p:sp>
+      <p:sp>
+        <p:nvSpPr>
+          <p:cNvPr id="12" name="Rounded Rectangle 11"/>
+          <p:cNvSpPr/>
+          <p:nvPr/>
+        </p:nvSpPr>
+        <p:spPr>
+          <a:xfrm>
+            <a:off x="533400" y="3063240"/>
+            <a:ext cx="11125200" cy="708660"/>
+          </a:xfrm>
+          <a:prstGeom prst="roundRect">
+            <a:avLst>
+              <a:gd name="adj" fmla="val 4000"/>
+            </a:avLst>
+          </a:prstGeom>
+          <a:solidFill>
+            <a:srgbClr val="FFFEFA"/>
+          </a:solidFill>
+          <a:ln>
+            <a:noFill/>
+          </a:ln>
+        </p:spPr>
+        <p:style>
+          <a:lnRef idx="1">
+            <a:schemeClr val="accent1"/>
+          </a:lnRef>
+          <a:fillRef idx="3">
+            <a:schemeClr val="accent1"/>
+          </a:fillRef>
+          <a:effectRef idx="0">
+            <a:schemeClr val="accent1"/>
+          </a:effectRef>
+          <a:fontRef idx="minor">
+            <a:schemeClr val="lt1"/>
+          </a:fontRef>
+        </p:style>
+        <p:txBody>
+          <a:bodyPr rtlCol="0" anchor="ctr"/>
+          <a:lstStyle/>
+          <a:p>
+            <a:pPr algn="ctr"/>
+          </a:p>
+        </p:txBody>
+      </p:sp>
+      <p:sp>
+        <p:nvSpPr>
+          <p:cNvPr id="13" name="TextBox 12"/>
+          <p:cNvSpPr txBox="1"/>
+          <p:nvPr/>
+        </p:nvSpPr>
+        <p:spPr>
+          <a:xfrm>
+            <a:off x="762000" y="3238500"/>
+            <a:ext cx="4495800" cy="374294"/>
+          </a:xfrm>
+          <a:prstGeom prst="rect">
+            <a:avLst/>
+          </a:prstGeom>
+          <a:noFill/>
+        </p:spPr>
+        <p:txBody>
+          <a:bodyPr wrap="none" lIns="0" rIns="0" tIns="0" bIns="0">
+            <a:spAutoFit/>
+          </a:bodyPr>
+          <a:lstStyle/>
+          <a:p>
+            <a:pPr>
+              <a:lnSpc>
+                <a:spcPts val="2227"/>
+              </a:lnSpc>
+              <a:spcBef>
+                <a:spcPts val="0"/>
+              </a:spcBef>
+              <a:spcAft>
+                <a:spcPts val="0"/>
+              </a:spcAft>
+              <a:defRPr sz="1739" b="0">
+                <a:solidFill>
+                  <a:srgbClr val="203E36"/>
+                </a:solidFill>
+                <a:latin typeface="Noto Serif"/>
+              </a:defRPr>
+            </a:pPr>
+            <a:r>
+              <a:t>Дорога приблизительная</a:t>
+            </a:r>
+          </a:p>
+        </p:txBody>
+      </p:sp>
+      <p:sp>
+        <p:nvSpPr>
+          <p:cNvPr id="14" name="TextBox 13"/>
+          <p:cNvSpPr txBox="1"/>
+          <p:nvPr/>
+        </p:nvSpPr>
+        <p:spPr>
+          <a:xfrm>
+            <a:off x="5394960" y="3215640"/>
+            <a:ext cx="533400" cy="423062"/>
+          </a:xfrm>
+          <a:prstGeom prst="rect">
+            <a:avLst/>
+          </a:prstGeom>
+          <a:noFill/>
+        </p:spPr>
+        <p:txBody>
+          <a:bodyPr wrap="none" lIns="0" rIns="0" tIns="0" bIns="0">
+            <a:spAutoFit/>
+          </a:bodyPr>
+          <a:lstStyle/>
+          <a:p>
+            <a:pPr>
+              <a:lnSpc>
+                <a:spcPts val="2611"/>
+              </a:lnSpc>
+              <a:spcBef>
+                <a:spcPts val="0"/>
+              </a:spcBef>
+              <a:spcAft>
+                <a:spcPts val="0"/>
+              </a:spcAft>
+              <a:defRPr sz="2039" b="0">
+                <a:solidFill>
+                  <a:srgbClr val="687768"/>
+                </a:solidFill>
+                <a:latin typeface="Noto Sans"/>
+              </a:defRPr>
+            </a:pPr>
+            <a:r>
+              <a:t>→</a:t>
+            </a:r>
+          </a:p>
+        </p:txBody>
+      </p:sp>
+      <p:sp>
+        <p:nvSpPr>
+          <p:cNvPr id="15" name="TextBox 14"/>
+          <p:cNvSpPr txBox="1"/>
+          <p:nvPr/>
+        </p:nvSpPr>
+        <p:spPr>
+          <a:xfrm>
+            <a:off x="6057900" y="3261360"/>
+            <a:ext cx="5334000" cy="345033"/>
+          </a:xfrm>
+          <a:prstGeom prst="rect">
+            <a:avLst/>
+          </a:prstGeom>
+          <a:noFill/>
+        </p:spPr>
+        <p:txBody>
+          <a:bodyPr wrap="none" lIns="0" rIns="0" tIns="0" bIns="0">
+            <a:spAutoFit/>
+          </a:bodyPr>
+          <a:lstStyle/>
+          <a:p>
+            <a:pPr>
+              <a:lnSpc>
+                <a:spcPts val="1996"/>
+              </a:lnSpc>
+              <a:spcBef>
+                <a:spcPts val="0"/>
+              </a:spcBef>
+              <a:spcAft>
+                <a:spcPts val="0"/>
+              </a:spcAft>
+              <a:defRPr sz="1560" b="0">
+                <a:solidFill>
+                  <a:srgbClr val="687768"/>
+                </a:solidFill>
+                <a:latin typeface="Noto Sans"/>
+              </a:defRPr>
+            </a:pPr>
+            <a:r>
+              <a:t>Пешеходный граф: входы, переходы, барьеры.</a:t>
+            </a:r>
+          </a:p>
+        </p:txBody>
+      </p:sp>
+      <p:sp>
+        <p:nvSpPr>
+          <p:cNvPr id="16" name="Rounded Rectangle 15"/>
+          <p:cNvSpPr/>
+          <p:nvPr/>
+        </p:nvSpPr>
+        <p:spPr>
+          <a:xfrm>
+            <a:off x="533400" y="3954779"/>
+            <a:ext cx="11125200" cy="708660"/>
+          </a:xfrm>
+          <a:prstGeom prst="roundRect">
+            <a:avLst>
+              <a:gd name="adj" fmla="val 4000"/>
+            </a:avLst>
+          </a:prstGeom>
+          <a:solidFill>
+            <a:srgbClr val="FFFEFA"/>
+          </a:solidFill>
+          <a:ln>
+            <a:noFill/>
+          </a:ln>
+        </p:spPr>
+        <p:style>
+          <a:lnRef idx="1">
+            <a:schemeClr val="accent1"/>
+          </a:lnRef>
+          <a:fillRef idx="3">
+            <a:schemeClr val="accent1"/>
+          </a:fillRef>
+          <a:effectRef idx="0">
+            <a:schemeClr val="accent1"/>
+          </a:effectRef>
+          <a:fontRef idx="minor">
+            <a:schemeClr val="lt1"/>
+          </a:fontRef>
+        </p:style>
+        <p:txBody>
+          <a:bodyPr rtlCol="0" anchor="ctr"/>
+          <a:lstStyle/>
+          <a:p>
+            <a:pPr algn="ctr"/>
+          </a:p>
+        </p:txBody>
+      </p:sp>
+      <p:sp>
+        <p:nvSpPr>
+          <p:cNvPr id="17" name="TextBox 16"/>
+          <p:cNvSpPr txBox="1"/>
+          <p:nvPr/>
+        </p:nvSpPr>
+        <p:spPr>
+          <a:xfrm>
+            <a:off x="762000" y="4130040"/>
+            <a:ext cx="4495800" cy="374294"/>
+          </a:xfrm>
+          <a:prstGeom prst="rect">
+            <a:avLst/>
+          </a:prstGeom>
+          <a:noFill/>
+        </p:spPr>
+        <p:txBody>
+          <a:bodyPr wrap="none" lIns="0" rIns="0" tIns="0" bIns="0">
+            <a:spAutoFit/>
+          </a:bodyPr>
+          <a:lstStyle/>
+          <a:p>
+            <a:pPr>
+              <a:lnSpc>
+                <a:spcPts val="2227"/>
+              </a:lnSpc>
+              <a:spcBef>
+                <a:spcPts val="0"/>
+              </a:spcBef>
+              <a:spcAft>
+                <a:spcPts val="0"/>
+              </a:spcAft>
+              <a:defRPr sz="1739" b="0">
+                <a:solidFill>
+                  <a:srgbClr val="203E36"/>
+                </a:solidFill>
+                <a:latin typeface="Noto Serif"/>
+              </a:defRPr>
+            </a:pPr>
+            <a:r>
+              <a:t>В тексте возможны ошибки</a:t>
+            </a:r>
+          </a:p>
+        </p:txBody>
+      </p:sp>
+      <p:sp>
+        <p:nvSpPr>
+          <p:cNvPr id="18" name="TextBox 17"/>
+          <p:cNvSpPr txBox="1"/>
+          <p:nvPr/>
+        </p:nvSpPr>
+        <p:spPr>
+          <a:xfrm>
+            <a:off x="5394960" y="4107179"/>
+            <a:ext cx="533400" cy="423062"/>
+          </a:xfrm>
+          <a:prstGeom prst="rect">
+            <a:avLst/>
+          </a:prstGeom>
+          <a:noFill/>
+        </p:spPr>
+        <p:txBody>
+          <a:bodyPr wrap="none" lIns="0" rIns="0" tIns="0" bIns="0">
+            <a:spAutoFit/>
+          </a:bodyPr>
+          <a:lstStyle/>
+          <a:p>
+            <a:pPr>
+              <a:lnSpc>
+                <a:spcPts val="2611"/>
+              </a:lnSpc>
+              <a:spcBef>
+                <a:spcPts val="0"/>
+              </a:spcBef>
+              <a:spcAft>
+                <a:spcPts val="0"/>
+              </a:spcAft>
+              <a:defRPr sz="2039" b="0">
+                <a:solidFill>
+                  <a:srgbClr val="687768"/>
+                </a:solidFill>
+                <a:latin typeface="Noto Sans"/>
+              </a:defRPr>
+            </a:pPr>
+            <a:r>
+              <a:t>→</a:t>
+            </a:r>
+          </a:p>
+        </p:txBody>
+      </p:sp>
+      <p:sp>
+        <p:nvSpPr>
+          <p:cNvPr id="19" name="TextBox 18"/>
+          <p:cNvSpPr txBox="1"/>
+          <p:nvPr/>
+        </p:nvSpPr>
+        <p:spPr>
+          <a:xfrm>
+            <a:off x="6057900" y="4152900"/>
+            <a:ext cx="5334000" cy="598627"/>
+          </a:xfrm>
+          <a:prstGeom prst="rect">
+            <a:avLst/>
+          </a:prstGeom>
+          <a:noFill/>
+        </p:spPr>
+        <p:txBody>
+          <a:bodyPr wrap="none" lIns="0" rIns="0" tIns="0" bIns="0">
+            <a:spAutoFit/>
+          </a:bodyPr>
+          <a:lstStyle/>
+          <a:p>
+            <a:pPr>
+              <a:lnSpc>
+                <a:spcPts val="1996"/>
+              </a:lnSpc>
+              <a:spcBef>
+                <a:spcPts val="0"/>
+              </a:spcBef>
+              <a:spcAft>
+                <a:spcPts val="0"/>
+              </a:spcAft>
+              <a:defRPr sz="1560" b="0">
+                <a:solidFill>
+                  <a:srgbClr val="687768"/>
+                </a:solidFill>
+                <a:latin typeface="Noto Sans"/>
+              </a:defRPr>
+            </a:pPr>
+            <a:r>
+              <a:t>Оценка смысла ответов и полезности с</a:t>
+            </a:r>
+          </a:p>
+          <a:p>
+            <a:pPr>
+              <a:lnSpc>
+                <a:spcPts val="1996"/>
+              </a:lnSpc>
+              <a:spcBef>
+                <a:spcPts val="0"/>
+              </a:spcBef>
+              <a:spcAft>
+                <a:spcPts val="0"/>
+              </a:spcAft>
+              <a:defRPr sz="1560" b="0">
+                <a:solidFill>
+                  <a:srgbClr val="687768"/>
+                </a:solidFill>
+                <a:latin typeface="Noto Sans"/>
+              </a:defRPr>
+            </a:pPr>
+            <a:r>
+              <a:t>пользователями.</a:t>
+            </a:r>
+          </a:p>
+        </p:txBody>
+      </p:sp>
+      <p:sp>
+        <p:nvSpPr>
+          <p:cNvPr id="20" name="Rounded Rectangle 19"/>
+          <p:cNvSpPr/>
+          <p:nvPr/>
+        </p:nvSpPr>
+        <p:spPr>
+          <a:xfrm>
+            <a:off x="533400" y="4846320"/>
+            <a:ext cx="11125200" cy="708660"/>
+          </a:xfrm>
+          <a:prstGeom prst="roundRect">
+            <a:avLst>
+              <a:gd name="adj" fmla="val 4000"/>
+            </a:avLst>
+          </a:prstGeom>
+          <a:solidFill>
+            <a:srgbClr val="FFFEFA"/>
+          </a:solidFill>
+          <a:ln>
+            <a:noFill/>
+          </a:ln>
+        </p:spPr>
+        <p:style>
+          <a:lnRef idx="1">
+            <a:schemeClr val="accent1"/>
+          </a:lnRef>
+          <a:fillRef idx="3">
+            <a:schemeClr val="accent1"/>
+          </a:fillRef>
+          <a:effectRef idx="0">
+            <a:schemeClr val="accent1"/>
+          </a:effectRef>
+          <a:fontRef idx="minor">
+            <a:schemeClr val="lt1"/>
+          </a:fontRef>
+        </p:style>
+        <p:txBody>
+          <a:bodyPr rtlCol="0" anchor="ctr"/>
+          <a:lstStyle/>
+          <a:p>
+            <a:pPr algn="ctr"/>
+          </a:p>
+        </p:txBody>
+      </p:sp>
+      <p:sp>
+        <p:nvSpPr>
+          <p:cNvPr id="21" name="TextBox 20"/>
+          <p:cNvSpPr txBox="1"/>
+          <p:nvPr/>
+        </p:nvSpPr>
+        <p:spPr>
+          <a:xfrm>
+            <a:off x="762000" y="5021580"/>
+            <a:ext cx="4495800" cy="374294"/>
+          </a:xfrm>
+          <a:prstGeom prst="rect">
+            <a:avLst/>
+          </a:prstGeom>
+          <a:noFill/>
+        </p:spPr>
+        <p:txBody>
+          <a:bodyPr wrap="none" lIns="0" rIns="0" tIns="0" bIns="0">
+            <a:spAutoFit/>
+          </a:bodyPr>
+          <a:lstStyle/>
+          <a:p>
+            <a:pPr>
+              <a:lnSpc>
+                <a:spcPts val="2227"/>
+              </a:lnSpc>
+              <a:spcBef>
+                <a:spcPts val="0"/>
+              </a:spcBef>
+              <a:spcAft>
+                <a:spcPts val="0"/>
+              </a:spcAft>
+              <a:defRPr sz="1739" b="0">
+                <a:solidFill>
+                  <a:srgbClr val="203E36"/>
+                </a:solidFill>
+                <a:latin typeface="Noto Serif"/>
+              </a:defRPr>
+            </a:pPr>
+            <a:r>
+              <a:t>Пока нет пользовательского пилота</a:t>
+            </a:r>
+          </a:p>
+        </p:txBody>
+      </p:sp>
+      <p:sp>
+        <p:nvSpPr>
+          <p:cNvPr id="22" name="TextBox 21"/>
+          <p:cNvSpPr txBox="1"/>
+          <p:nvPr/>
+        </p:nvSpPr>
+        <p:spPr>
+          <a:xfrm>
+            <a:off x="5394960" y="4998720"/>
+            <a:ext cx="533400" cy="423062"/>
+          </a:xfrm>
+          <a:prstGeom prst="rect">
+            <a:avLst/>
+          </a:prstGeom>
+          <a:noFill/>
+        </p:spPr>
+        <p:txBody>
+          <a:bodyPr wrap="none" lIns="0" rIns="0" tIns="0" bIns="0">
+            <a:spAutoFit/>
+          </a:bodyPr>
+          <a:lstStyle/>
+          <a:p>
+            <a:pPr>
+              <a:lnSpc>
+                <a:spcPts val="2611"/>
+              </a:lnSpc>
+              <a:spcBef>
+                <a:spcPts val="0"/>
+              </a:spcBef>
+              <a:spcAft>
+                <a:spcPts val="0"/>
+              </a:spcAft>
+              <a:defRPr sz="2039" b="0">
+                <a:solidFill>
+                  <a:srgbClr val="687768"/>
+                </a:solidFill>
+                <a:latin typeface="Noto Sans"/>
+              </a:defRPr>
+            </a:pPr>
+            <a:r>
+              <a:t>→</a:t>
+            </a:r>
+          </a:p>
+        </p:txBody>
+      </p:sp>
+      <p:sp>
+        <p:nvSpPr>
+          <p:cNvPr id="23" name="TextBox 22"/>
+          <p:cNvSpPr txBox="1"/>
+          <p:nvPr/>
+        </p:nvSpPr>
+        <p:spPr>
+          <a:xfrm>
+            <a:off x="6057900" y="5044440"/>
+            <a:ext cx="5334000" cy="345033"/>
+          </a:xfrm>
+          <a:prstGeom prst="rect">
+            <a:avLst/>
+          </a:prstGeom>
+          <a:noFill/>
+        </p:spPr>
+        <p:txBody>
+          <a:bodyPr wrap="none" lIns="0" rIns="0" tIns="0" bIns="0">
+            <a:spAutoFit/>
+          </a:bodyPr>
+          <a:lstStyle/>
+          <a:p>
+            <a:pPr>
+              <a:lnSpc>
+                <a:spcPts val="1996"/>
+              </a:lnSpc>
+              <a:spcBef>
+                <a:spcPts val="0"/>
+              </a:spcBef>
+              <a:spcAft>
+                <a:spcPts val="0"/>
+              </a:spcAft>
+              <a:defRPr sz="1560" b="0">
+                <a:solidFill>
+                  <a:srgbClr val="687768"/>
+                </a:solidFill>
+                <a:latin typeface="Noto Sans"/>
+              </a:defRPr>
+            </a:pPr>
+            <a:r>
+              <a:t>Наблюдения, обратная связь и проверка спроса.</a:t>
+            </a:r>
+          </a:p>
+        </p:txBody>
+      </p:sp>
+      <p:sp>
+        <p:nvSpPr>
+          <p:cNvPr id="24" name="TextBox 23"/>
+          <p:cNvSpPr txBox="1"/>
+          <p:nvPr/>
+        </p:nvSpPr>
+        <p:spPr>
+          <a:xfrm>
+            <a:off x="579120" y="5996940"/>
+            <a:ext cx="10896600" cy="325526"/>
+          </a:xfrm>
+          <a:prstGeom prst="rect">
+            <a:avLst/>
+          </a:prstGeom>
+          <a:noFill/>
+        </p:spPr>
+        <p:txBody>
+          <a:bodyPr wrap="none" lIns="0" rIns="0" tIns="0" bIns="0">
+            <a:spAutoFit/>
+          </a:bodyPr>
+          <a:lstStyle/>
+          <a:p>
+            <a:pPr>
+              <a:lnSpc>
+                <a:spcPts val="1843"/>
+              </a:lnSpc>
+              <a:spcBef>
+                <a:spcPts val="0"/>
+              </a:spcBef>
+              <a:spcAft>
+                <a:spcPts val="0"/>
+              </a:spcAft>
+              <a:defRPr sz="1439" b="0">
+                <a:solidFill>
+                  <a:srgbClr val="687768"/>
+                </a:solidFill>
+                <a:latin typeface="Noto Sans"/>
+              </a:defRPr>
+            </a:pPr>
+            <a:r>
+              <a:t>Дальше: события, пешеходный граф, независимая проверка доступности.</a:t>
+            </a:r>
+          </a:p>
+        </p:txBody>
+      </p:sp>
+    </p:spTree>
+  </p:cSld>
+  <p:clrMapOvr>
+    <a:masterClrMapping/>
+  </p:clrMapOvr>
+</p:sld>
+</file>
+
+<file path=ppt/slides/slide12.xml><?xml version="1.0" encoding="utf-8"?>
+<p:sld xmlns:a="http://schemas.openxmlformats.org/drawingml/2006/main" xmlns:p="http://schemas.openxmlformats.org/presentationml/2006/main" xmlns:r="http://schemas.openxmlformats.org/officeDocument/2006/relationships">
+  <p:cSld>
+    <p:spTree>
+      <p:nvGrpSpPr>
+        <p:cNvPr id="1" name=""/>
+        <p:cNvGrpSpPr/>
+        <p:nvPr/>
+      </p:nvGrpSpPr>
+      <p:grpSpPr/>
+      <p:sp>
+        <p:nvSpPr>
+          <p:cNvPr id="2" name="Rectangle 1"/>
+          <p:cNvSpPr/>
+          <p:nvPr/>
+        </p:nvSpPr>
+        <p:spPr>
+          <a:xfrm>
+            <a:off x="0" y="0"/>
+            <a:ext cx="12192000" cy="6858000"/>
+          </a:xfrm>
+          <a:prstGeom prst="rect">
+            <a:avLst/>
+          </a:prstGeom>
+          <a:solidFill>
+            <a:srgbClr val="203E36"/>
+          </a:solidFill>
+          <a:ln>
+            <a:noFill/>
+          </a:ln>
+        </p:spPr>
+        <p:style>
+          <a:lnRef idx="1">
+            <a:schemeClr val="accent1"/>
+          </a:lnRef>
+          <a:fillRef idx="3">
+            <a:schemeClr val="accent1"/>
+          </a:fillRef>
+          <a:effectRef idx="0">
+            <a:schemeClr val="accent1"/>
+          </a:effectRef>
+          <a:fontRef idx="minor">
+            <a:schemeClr val="lt1"/>
+          </a:fontRef>
+        </p:style>
+        <p:txBody>
+          <a:bodyPr rtlCol="0" anchor="ctr"/>
+          <a:lstStyle/>
+          <a:p>
+            <a:pPr algn="ctr"/>
+          </a:p>
+        </p:txBody>
+      </p:sp>
+      <p:sp>
+        <p:nvSpPr>
+          <p:cNvPr id="3" name="TextBox 2"/>
+          <p:cNvSpPr txBox="1"/>
+          <p:nvPr/>
+        </p:nvSpPr>
+        <p:spPr>
+          <a:xfrm>
+            <a:off x="533400" y="320040"/>
+            <a:ext cx="4572000" cy="267004"/>
+          </a:xfrm>
+          <a:prstGeom prst="rect">
+            <a:avLst/>
+          </a:prstGeom>
+          <a:noFill/>
+        </p:spPr>
+        <p:txBody>
+          <a:bodyPr wrap="none" lIns="0" rIns="0" tIns="0" bIns="0">
+            <a:spAutoFit/>
+          </a:bodyPr>
+          <a:lstStyle/>
+          <a:p>
+            <a:pPr>
+              <a:lnSpc>
+                <a:spcPts val="1382"/>
+              </a:lnSpc>
+              <a:spcBef>
+                <a:spcPts val="0"/>
+              </a:spcBef>
+              <a:spcAft>
+                <a:spcPts val="0"/>
+              </a:spcAft>
+              <a:defRPr sz="1080" b="1">
+                <a:solidFill>
                   <a:srgbClr val="D6ED92"/>
                 </a:solidFill>
                 <a:latin typeface="Noto Sans"/>
               </a:defRPr>
             </a:pPr>
             <a:r>
-              <a:t>11 / ФИНАЛ</a:t>
+              <a:t>QADAM / ARCSOLO</a:t>
+            </a:r>
+          </a:p>
+        </p:txBody>
+      </p:sp>
+      <p:sp>
+        <p:nvSpPr>
+          <p:cNvPr id="4" name="TextBox 3"/>
+          <p:cNvSpPr txBox="1"/>
+          <p:nvPr/>
+        </p:nvSpPr>
+        <p:spPr>
+          <a:xfrm>
+            <a:off x="7924800" y="320040"/>
+            <a:ext cx="3733800" cy="257251"/>
+          </a:xfrm>
+          <a:prstGeom prst="rect">
+            <a:avLst/>
+          </a:prstGeom>
+          <a:noFill/>
+        </p:spPr>
+        <p:txBody>
+          <a:bodyPr wrap="none" lIns="0" rIns="0" tIns="0" bIns="0">
+            <a:spAutoFit/>
+          </a:bodyPr>
+          <a:lstStyle/>
+          <a:p>
+            <a:pPr>
+              <a:lnSpc>
+                <a:spcPts val="1305"/>
+              </a:lnSpc>
+              <a:spcBef>
+                <a:spcPts val="0"/>
+              </a:spcBef>
+              <a:spcAft>
+                <a:spcPts val="0"/>
+              </a:spcAft>
+              <a:defRPr sz="1019" b="0">
+                <a:solidFill>
+                  <a:srgbClr val="D6ED92"/>
+                </a:solidFill>
+                <a:latin typeface="Noto Sans"/>
+              </a:defRPr>
+            </a:pPr>
+            <a:r>
+              <a:t>12 / ФИНАЛ</a:t>
             </a:r>
           </a:p>
         </p:txBody>
@@ -6213,7 +7113,7 @@
               </a:defRPr>
             </a:pPr>
             <a:r>
-              <a:t>11</a:t>
+              <a:t>12</a:t>
             </a:r>
           </a:p>
         </p:txBody>
@@ -6325,7 +7225,7 @@
               </a:defRPr>
             </a:pPr>
             <a:r>
-              <a:t>Готовы показать демо и начать пилот</a:t>
+              <a:t>Личные идеи. Общий маршрут. План Б.</a:t>
             </a:r>
           </a:p>
           <a:p>
@@ -6347,7 +7247,7 @@
               </a:defRPr>
             </a:pPr>
             <a:r>
-              <a:t>с локальными данными и реальными пользователями.</a:t>
+              <a:t>Следующий шаг — пилот с реальными пользователями.</a:t>
             </a:r>
           </a:p>
         </p:txBody>
@@ -7748,7 +8648,7 @@
         <p:spPr>
           <a:xfrm>
             <a:off x="533400" y="2057400"/>
-            <a:ext cx="7162799" cy="2540500"/>
+            <a:ext cx="7162800" cy="2541394"/>
           </a:xfrm>
           <a:prstGeom prst="rect">
             <a:avLst/>
@@ -7772,7 +8672,7 @@
         <p:spPr>
           <a:xfrm>
             <a:off x="533400" y="4991100"/>
-            <a:ext cx="6541928" cy="1104900"/>
+            <a:ext cx="6539626" cy="1104900"/>
           </a:xfrm>
           <a:prstGeom prst="rect">
             <a:avLst/>
@@ -7864,7 +8764,7 @@
               </a:defRPr>
             </a:pPr>
             <a:r>
-              <a:t>Старт, время, интересы, погода и</a:t>
+              <a:t>Старт, время, настроение,</a:t>
             </a:r>
           </a:p>
           <a:p>
@@ -7886,7 +8786,7 @@
               </a:defRPr>
             </a:pPr>
             <a:r>
-              <a:t>доступность.</a:t>
+              <a:t>компания и ограничения.</a:t>
             </a:r>
           </a:p>
         </p:txBody>
@@ -7976,7 +8876,7 @@
               </a:defRPr>
             </a:pPr>
             <a:r>
-              <a:t>Почему подходит, сколько идти и</a:t>
+              <a:t>Факты, личная идея и маленькая</a:t>
             </a:r>
           </a:p>
           <a:p>
@@ -7998,7 +8898,7 @@
               </a:defRPr>
             </a:pPr>
             <a:r>
-              <a:t>что сделать.</a:t>
+              <a:t>миссия открытия.</a:t>
             </a:r>
           </a:p>
         </p:txBody>
@@ -8088,7 +8988,7 @@
               </a:defRPr>
             </a:pPr>
             <a:r>
-              <a:t>Короткий маршрут и ссылка на</a:t>
+              <a:t>Групповой маршрут, план Б и</a:t>
             </a:r>
           </a:p>
           <a:p>
@@ -8110,7 +9010,7 @@
               </a:defRPr>
             </a:pPr>
             <a:r>
-              <a:t>запись каждого POI.</a:t>
+              <a:t>проверяемые источники.</a:t>
             </a:r>
           </a:p>
         </p:txBody>
@@ -8486,7 +9386,7 @@
               </a:defRPr>
             </a:pPr>
             <a:r>
-              <a:t>60 минут = 25 минут пешком + 35 минут на месте</a:t>
+              <a:t>51 минута = 31 минута пешком + 20 минут на месте</a:t>
             </a:r>
           </a:p>
         </p:txBody>
@@ -8508,7 +9408,7 @@
         <p:spPr>
           <a:xfrm>
             <a:off x="533400" y="3314700"/>
-            <a:ext cx="6477000" cy="2297261"/>
+            <a:ext cx="6477000" cy="2298069"/>
           </a:xfrm>
           <a:prstGeom prst="rect">
             <a:avLst/>
@@ -8555,7 +9455,7 @@
               </a:defRPr>
             </a:pPr>
             <a:r>
-              <a:t>Лепим и варим → Japanese</a:t>
+              <a:t>Короткая пауза → Аллея</a:t>
             </a:r>
           </a:p>
           <a:p>
@@ -8577,7 +9477,7 @@
               </a:defRPr>
             </a:pPr>
             <a:r>
-              <a:t>garden → старт</a:t>
+              <a:t>мира и согласия → старт</a:t>
             </a:r>
           </a:p>
         </p:txBody>
@@ -8591,7 +9491,7 @@
         <p:spPr>
           <a:xfrm>
             <a:off x="7429500" y="4381500"/>
-            <a:ext cx="4000500" cy="881481"/>
+            <a:ext cx="4000500" cy="1144828"/>
           </a:xfrm>
           <a:prstGeom prst="rect">
             <a:avLst/>
@@ -8622,7 +9522,7 @@
               </a:defRPr>
             </a:pPr>
             <a:r>
-              <a:t>Реальные записи OSM.</a:t>
+              <a:t>Возвращение уже включено.</a:t>
             </a:r>
           </a:p>
           <a:p>
@@ -8644,7 +9544,7 @@
               </a:defRPr>
             </a:pPr>
             <a:r>
-              <a:t>Возвращение уже включено.</a:t>
+              <a:t>Остановки сокращены до 10 минут.</a:t>
             </a:r>
           </a:p>
           <a:p>
@@ -8666,7 +9566,29 @@
               </a:defRPr>
             </a:pPr>
             <a:r>
-              <a:t>Часы сада неизвестны — это видно.</a:t>
+              <a:t>Сады кампуса исключены: нужен</a:t>
+            </a:r>
+          </a:p>
+          <a:p>
+            <a:pPr>
+              <a:lnSpc>
+                <a:spcPts val="2073"/>
+              </a:lnSpc>
+              <a:spcBef>
+                <a:spcPts val="0"/>
+              </a:spcBef>
+              <a:spcAft>
+                <a:spcPts val="0"/>
+              </a:spcAft>
+              <a:defRPr sz="1620" b="0">
+                <a:solidFill>
+                  <a:srgbClr val="687768"/>
+                </a:solidFill>
+                <a:latin typeface="Noto Sans"/>
+              </a:defRPr>
+            </a:pPr>
+            <a:r>
+              <a:t>доступ.</a:t>
             </a:r>
           </a:p>
         </p:txBody>
@@ -9109,7 +10031,7 @@
               </a:defRPr>
             </a:pPr>
             <a:r>
-              <a:t>298</a:t>
+              <a:t>300</a:t>
             </a:r>
           </a:p>
         </p:txBody>
@@ -9244,7 +10166,7 @@
               </a:defRPr>
             </a:pPr>
             <a:r>
-              <a:t>5</a:t>
+              <a:t>21</a:t>
             </a:r>
           </a:p>
         </p:txBody>
@@ -9289,7 +10211,7 @@
               </a:defRPr>
             </a:pPr>
             <a:r>
-              <a:t>районов Астаны</a:t>
+              <a:t>дополнительный факт</a:t>
             </a:r>
           </a:p>
         </p:txBody>
@@ -9379,7 +10301,7 @@
               </a:defRPr>
             </a:pPr>
             <a:r>
-              <a:t>102</a:t>
+              <a:t>11</a:t>
             </a:r>
           </a:p>
         </p:txBody>
@@ -9424,7 +10346,7 @@
               </a:defRPr>
             </a:pPr>
             <a:r>
-              <a:t>записи с часами работы</a:t>
+              <a:t>мест с обогащением</a:t>
             </a:r>
           </a:p>
         </p:txBody>
@@ -9469,7 +10391,7 @@
               </a:defRPr>
             </a:pPr>
             <a:r>
-              <a:t>OpenStreetMap → сбор → фильтрация → дедупликация → снимок</a:t>
+              <a:t>OSM автоматически + отдельные факты официальных источников</a:t>
             </a:r>
           </a:p>
         </p:txBody>
@@ -9514,7 +10436,7 @@
               </a:defRPr>
             </a:pPr>
             <a:r>
-              <a:t>26 записей с тегом доступности. Описания — прозрачные краткие сводки тегов.</a:t>
+              <a:t>5 районов · 102 записи с часами · 26 тегов доступности.</a:t>
             </a:r>
           </a:p>
           <a:p>
@@ -9536,7 +10458,7 @@
               </a:defRPr>
             </a:pPr>
             <a:r>
-              <a:t>Сохранены идентификаторы, источники, дата сбора и контрольная сумма.</a:t>
+              <a:t>Источники уточнили расписания и исключили места с ограниченным доступом.</a:t>
             </a:r>
           </a:p>
         </p:txBody>
@@ -10675,7 +11597,7 @@
               </a:defRPr>
             </a:pPr>
             <a:r>
-              <a:t>Выбор идеи</a:t>
+              <a:t>Объяснение, идея</a:t>
             </a:r>
           </a:p>
           <a:p>
@@ -10697,7 +11619,7 @@
               </a:defRPr>
             </a:pPr>
             <a:r>
-              <a:t>по найденным POI</a:t>
+              <a:t>и маленькая миссия</a:t>
             </a:r>
           </a:p>
         </p:txBody>
@@ -10877,7 +11799,7 @@
               </a:defRPr>
             </a:pPr>
             <a:r>
-              <a:t>Только</a:t>
+              <a:t>ID мест и цитат,</a:t>
             </a:r>
           </a:p>
           <a:p>
@@ -10899,7 +11821,7 @@
               </a:defRPr>
             </a:pPr>
             <a:r>
-              <a:t>разрешённые</a:t>
+              <a:t>формат и</a:t>
             </a:r>
           </a:p>
           <a:p>
@@ -10921,7 +11843,7 @@
               </a:defRPr>
             </a:pPr>
             <a:r>
-              <a:t>ID и действия</a:t>
+              <a:t>ограничения</a:t>
             </a:r>
           </a:p>
         </p:txBody>
@@ -11011,7 +11933,7 @@
               </a:defRPr>
             </a:pPr>
             <a:r>
-              <a:t>Gemini генерирует структурированный выбор действий, а не свободные факты о местах.</a:t>
+              <a:t>Факты, маршруты и часы храним отдельно от сгенерированных советов.</a:t>
             </a:r>
           </a:p>
           <a:p>
@@ -11033,7 +11955,7 @@
               </a:defRPr>
             </a:pPr>
             <a:r>
-              <a:t>Ответ проходит проверку. При ошибке — явно обозначенные шаблонные идеи.</a:t>
+              <a:t>Проверка ссылок не доказывает истинность каждой фразы. При ошибке — шаблоны.</a:t>
             </a:r>
           </a:p>
         </p:txBody>
@@ -11184,7 +12106,7 @@
               </a:defRPr>
             </a:pPr>
             <a:r>
-              <a:t>07 / ЭТИКА И ПРИВАТНОСТЬ</a:t>
+              <a:t>07 / УНИКАЛЬНЫЕ СЦЕНАРИИ</a:t>
             </a:r>
           </a:p>
         </p:txBody>
@@ -11229,7 +12151,7 @@
               </a:defRPr>
             </a:pPr>
             <a:r>
-              <a:t>Доверие — это видимое «не знаем».</a:t>
+              <a:t>Разные интересы. Один общий маршрут.</a:t>
             </a:r>
           </a:p>
         </p:txBody>
@@ -11326,7 +12248,7 @@
       </p:sp>
       <p:pic>
         <p:nvPicPr>
-          <p:cNvPr id="8" name="Picture 7" descr="coffee.png"/>
+          <p:cNvPr id="8" name="Picture 7" descr="group.png"/>
           <p:cNvPicPr>
             <a:picLocks noChangeAspect="1"/>
           </p:cNvPicPr>
@@ -11341,46 +12263,70 @@
         <p:spPr>
           <a:xfrm>
             <a:off x="533400" y="2133600"/>
-            <a:ext cx="6400800" cy="1846817"/>
+            <a:ext cx="6477000" cy="1231108"/>
           </a:xfrm>
           <a:prstGeom prst="rect">
             <a:avLst/>
           </a:prstGeom>
         </p:spPr>
       </p:pic>
-      <p:sp>
-        <p:nvSpPr>
-          <p:cNvPr id="9" name="TextBox 8"/>
-          <p:cNvSpPr txBox="1"/>
-          <p:nvPr/>
-        </p:nvSpPr>
-        <p:spPr>
-          <a:xfrm>
-            <a:off x="7429500" y="2171700"/>
-            <a:ext cx="3962400" cy="462076"/>
-          </a:xfrm>
-          <a:prstGeom prst="rect">
-            <a:avLst/>
-          </a:prstGeom>
-          <a:noFill/>
-        </p:spPr>
-        <p:txBody>
-          <a:bodyPr wrap="none" lIns="0" rIns="0" tIns="0" bIns="0">
-            <a:spAutoFit/>
-          </a:bodyPr>
-          <a:lstStyle/>
-          <a:p>
-            <a:pPr>
-              <a:lnSpc>
-                <a:spcPts val="2918"/>
-              </a:lnSpc>
-              <a:spcBef>
-                <a:spcPts val="0"/>
-              </a:spcBef>
-              <a:spcAft>
-                <a:spcPts val="0"/>
-              </a:spcAft>
-              <a:defRPr sz="2280" b="0">
+      <p:pic>
+        <p:nvPicPr>
+          <p:cNvPr id="9" name="Picture 8" descr="backup.png"/>
+          <p:cNvPicPr>
+            <a:picLocks noChangeAspect="1"/>
+          </p:cNvPicPr>
+          <p:nvPr/>
+        </p:nvPicPr>
+        <p:blipFill>
+          <a:blip r:embed="rId3"/>
+          <a:stretch>
+            <a:fillRect/>
+          </a:stretch>
+        </p:blipFill>
+        <p:spPr>
+          <a:xfrm>
+            <a:off x="533400" y="3848100"/>
+            <a:ext cx="6477000" cy="2147600"/>
+          </a:xfrm>
+          <a:prstGeom prst="rect">
+            <a:avLst/>
+          </a:prstGeom>
+        </p:spPr>
+      </p:pic>
+      <p:sp>
+        <p:nvSpPr>
+          <p:cNvPr id="10" name="TextBox 9"/>
+          <p:cNvSpPr txBox="1"/>
+          <p:nvPr/>
+        </p:nvSpPr>
+        <p:spPr>
+          <a:xfrm>
+            <a:off x="7429500" y="2209800"/>
+            <a:ext cx="4114800" cy="423062"/>
+          </a:xfrm>
+          <a:prstGeom prst="rect">
+            <a:avLst/>
+          </a:prstGeom>
+          <a:noFill/>
+        </p:spPr>
+        <p:txBody>
+          <a:bodyPr wrap="none" lIns="0" rIns="0" tIns="0" bIns="0">
+            <a:spAutoFit/>
+          </a:bodyPr>
+          <a:lstStyle/>
+          <a:p>
+            <a:pPr>
+              <a:lnSpc>
+                <a:spcPts val="2611"/>
+              </a:lnSpc>
+              <a:spcBef>
+                <a:spcPts val="0"/>
+              </a:spcBef>
+              <a:spcAft>
+                <a:spcPts val="0"/>
+              </a:spcAft>
+              <a:defRPr sz="2039" b="0">
                 <a:solidFill>
                   <a:srgbClr val="203E36"/>
                 </a:solidFill>
@@ -11388,21 +12334,21 @@
               </a:defRPr>
             </a:pPr>
             <a:r>
-              <a:t>Факты и идеи</a:t>
-            </a:r>
-          </a:p>
-        </p:txBody>
-      </p:sp>
-      <p:sp>
-        <p:nvSpPr>
-          <p:cNvPr id="10" name="TextBox 9"/>
-          <p:cNvSpPr txBox="1"/>
-          <p:nvPr/>
-        </p:nvSpPr>
-        <p:spPr>
-          <a:xfrm>
-            <a:off x="7429500" y="2651760"/>
-            <a:ext cx="3886200" cy="618134"/>
+              <a:t>Для компании из 2–5 человек</a:t>
+            </a:r>
+          </a:p>
+        </p:txBody>
+      </p:sp>
+      <p:sp>
+        <p:nvSpPr>
+          <p:cNvPr id="11" name="TextBox 10"/>
+          <p:cNvSpPr txBox="1"/>
+          <p:nvPr/>
+        </p:nvSpPr>
+        <p:spPr>
+          <a:xfrm>
+            <a:off x="7429500" y="2667000"/>
+            <a:ext cx="3962400" cy="618134"/>
           </a:xfrm>
           <a:prstGeom prst="rect">
             <a:avLst/>
@@ -11433,7 +12379,7 @@
               </a:defRPr>
             </a:pPr>
             <a:r>
-              <a:t>Источник POI отделён от</a:t>
+              <a:t>Показываем, чьи интересы вошли в</a:t>
             </a:r>
           </a:p>
           <a:p>
@@ -11455,44 +12401,44 @@
               </a:defRPr>
             </a:pPr>
             <a:r>
-              <a:t>предложения, что сделать.</a:t>
-            </a:r>
-          </a:p>
-        </p:txBody>
-      </p:sp>
-      <p:sp>
-        <p:nvSpPr>
-          <p:cNvPr id="11" name="TextBox 10"/>
-          <p:cNvSpPr txBox="1"/>
-          <p:nvPr/>
-        </p:nvSpPr>
-        <p:spPr>
-          <a:xfrm>
-            <a:off x="7429500" y="3543300"/>
-            <a:ext cx="3962400" cy="462076"/>
-          </a:xfrm>
-          <a:prstGeom prst="rect">
-            <a:avLst/>
-          </a:prstGeom>
-          <a:noFill/>
-        </p:spPr>
-        <p:txBody>
-          <a:bodyPr wrap="none" lIns="0" rIns="0" tIns="0" bIns="0">
-            <a:spAutoFit/>
-          </a:bodyPr>
-          <a:lstStyle/>
-          <a:p>
-            <a:pPr>
-              <a:lnSpc>
-                <a:spcPts val="2918"/>
-              </a:lnSpc>
-              <a:spcBef>
-                <a:spcPts val="0"/>
-              </a:spcBef>
-              <a:spcAft>
-                <a:spcPts val="0"/>
-              </a:spcAft>
-              <a:defRPr sz="2280" b="0">
+              <a:t>маршрут и где остался компромисс.</a:t>
+            </a:r>
+          </a:p>
+        </p:txBody>
+      </p:sp>
+      <p:sp>
+        <p:nvSpPr>
+          <p:cNvPr id="12" name="TextBox 11"/>
+          <p:cNvSpPr txBox="1"/>
+          <p:nvPr/>
+        </p:nvSpPr>
+        <p:spPr>
+          <a:xfrm>
+            <a:off x="7429500" y="3695700"/>
+            <a:ext cx="4114800" cy="423062"/>
+          </a:xfrm>
+          <a:prstGeom prst="rect">
+            <a:avLst/>
+          </a:prstGeom>
+          <a:noFill/>
+        </p:spPr>
+        <p:txBody>
+          <a:bodyPr wrap="none" lIns="0" rIns="0" tIns="0" bIns="0">
+            <a:spAutoFit/>
+          </a:bodyPr>
+          <a:lstStyle/>
+          <a:p>
+            <a:pPr>
+              <a:lnSpc>
+                <a:spcPts val="2611"/>
+              </a:lnSpc>
+              <a:spcBef>
+                <a:spcPts val="0"/>
+              </a:spcBef>
+              <a:spcAft>
+                <a:spcPts val="0"/>
+              </a:spcAft>
+              <a:defRPr sz="2039" b="0">
                 <a:solidFill>
                   <a:srgbClr val="203E36"/>
                 </a:solidFill>
@@ -11500,21 +12446,21 @@
               </a:defRPr>
             </a:pPr>
             <a:r>
-              <a:t>Локация без истории</a:t>
-            </a:r>
-          </a:p>
-        </p:txBody>
-      </p:sp>
-      <p:sp>
-        <p:nvSpPr>
-          <p:cNvPr id="12" name="TextBox 11"/>
-          <p:cNvSpPr txBox="1"/>
-          <p:nvPr/>
-        </p:nvSpPr>
-        <p:spPr>
-          <a:xfrm>
-            <a:off x="7429500" y="4038600"/>
-            <a:ext cx="3886200" cy="881481"/>
+              <a:t>План Б — без потери условий</a:t>
+            </a:r>
+          </a:p>
+        </p:txBody>
+      </p:sp>
+      <p:sp>
+        <p:nvSpPr>
+          <p:cNvPr id="13" name="TextBox 12"/>
+          <p:cNvSpPr txBox="1"/>
+          <p:nvPr/>
+        </p:nvSpPr>
+        <p:spPr>
+          <a:xfrm>
+            <a:off x="7429500" y="4152900"/>
+            <a:ext cx="3962400" cy="881481"/>
           </a:xfrm>
           <a:prstGeom prst="rect">
             <a:avLst/>
@@ -11545,7 +12491,7 @@
               </a:defRPr>
             </a:pPr>
             <a:r>
-              <a:t>Расчёт в браузере. Точные</a:t>
+              <a:t>Дождь или меньше времени:</a:t>
             </a:r>
           </a:p>
           <a:p>
@@ -11567,7 +12513,7 @@
               </a:defRPr>
             </a:pPr>
             <a:r>
-              <a:t>координаты и исходный запрос не</a:t>
+              <a:t>сравнить, применить и вернуть</a:t>
             </a:r>
           </a:p>
           <a:p>
@@ -11589,52 +12535,97 @@
               </a:defRPr>
             </a:pPr>
             <a:r>
-              <a:t>отправляются в Gemini.</a:t>
-            </a:r>
-          </a:p>
-        </p:txBody>
-      </p:sp>
-      <p:sp>
-        <p:nvSpPr>
-          <p:cNvPr id="13" name="TextBox 12"/>
-          <p:cNvSpPr txBox="1"/>
-          <p:nvPr/>
-        </p:nvSpPr>
-        <p:spPr>
-          <a:xfrm>
-            <a:off x="571500" y="5806440"/>
-            <a:ext cx="10972800" cy="345033"/>
-          </a:xfrm>
-          <a:prstGeom prst="rect">
-            <a:avLst/>
-          </a:prstGeom>
-          <a:noFill/>
-        </p:spPr>
-        <p:txBody>
-          <a:bodyPr wrap="none" lIns="0" rIns="0" tIns="0" bIns="0">
-            <a:spAutoFit/>
-          </a:bodyPr>
-          <a:lstStyle/>
-          <a:p>
-            <a:pPr>
-              <a:lnSpc>
-                <a:spcPts val="1996"/>
-              </a:lnSpc>
-              <a:spcBef>
-                <a:spcPts val="0"/>
-              </a:spcBef>
-              <a:spcAft>
-                <a:spcPts val="0"/>
-              </a:spcAft>
-              <a:defRPr sz="1560" b="0">
-                <a:solidFill>
-                  <a:srgbClr val="91652D"/>
+              <a:t>исходный план.</a:t>
+            </a:r>
+          </a:p>
+        </p:txBody>
+      </p:sp>
+      <p:sp>
+        <p:nvSpPr>
+          <p:cNvPr id="14" name="TextBox 13"/>
+          <p:cNvSpPr txBox="1"/>
+          <p:nvPr/>
+        </p:nvSpPr>
+        <p:spPr>
+          <a:xfrm>
+            <a:off x="7429500" y="5067300"/>
+            <a:ext cx="4114800" cy="374294"/>
+          </a:xfrm>
+          <a:prstGeom prst="rect">
+            <a:avLst/>
+          </a:prstGeom>
+          <a:noFill/>
+        </p:spPr>
+        <p:txBody>
+          <a:bodyPr wrap="none" lIns="0" rIns="0" tIns="0" bIns="0">
+            <a:spAutoFit/>
+          </a:bodyPr>
+          <a:lstStyle/>
+          <a:p>
+            <a:pPr>
+              <a:lnSpc>
+                <a:spcPts val="2227"/>
+              </a:lnSpc>
+              <a:spcBef>
+                <a:spcPts val="0"/>
+              </a:spcBef>
+              <a:spcAft>
+                <a:spcPts val="0"/>
+              </a:spcAft>
+              <a:defRPr sz="1739" b="0">
+                <a:solidFill>
+                  <a:srgbClr val="203E36"/>
+                </a:solidFill>
+                <a:latin typeface="Noto Serif"/>
+              </a:defRPr>
+            </a:pPr>
+            <a:r>
+              <a:t>Маленькая миссия открытия</a:t>
+            </a:r>
+          </a:p>
+        </p:txBody>
+      </p:sp>
+      <p:sp>
+        <p:nvSpPr>
+          <p:cNvPr id="15" name="TextBox 14"/>
+          <p:cNvSpPr txBox="1"/>
+          <p:nvPr/>
+        </p:nvSpPr>
+        <p:spPr>
+          <a:xfrm>
+            <a:off x="7429500" y="5448300"/>
+            <a:ext cx="3962400" cy="315772"/>
+          </a:xfrm>
+          <a:prstGeom prst="rect">
+            <a:avLst/>
+          </a:prstGeom>
+          <a:noFill/>
+        </p:spPr>
+        <p:txBody>
+          <a:bodyPr wrap="none" lIns="0" rIns="0" tIns="0" bIns="0">
+            <a:spAutoFit/>
+          </a:bodyPr>
+          <a:lstStyle/>
+          <a:p>
+            <a:pPr>
+              <a:lnSpc>
+                <a:spcPts val="1766"/>
+              </a:lnSpc>
+              <a:spcBef>
+                <a:spcPts val="0"/>
+              </a:spcBef>
+              <a:spcAft>
+                <a:spcPts val="0"/>
+              </a:spcAft>
+              <a:defRPr sz="1380" b="0">
+                <a:solidFill>
+                  <a:srgbClr val="687768"/>
                 </a:solidFill>
                 <a:latin typeface="Noto Sans"/>
               </a:defRPr>
             </a:pPr>
             <a:r>
-              <a:t>Никаких обещаний о тишине, розетках, ночной безопасности или маршруте без ступеней без данных.</a:t>
+              <a:t>Наблюдение или вопрос о конкретном месте.</a:t>
             </a:r>
           </a:p>
         </p:txBody>
@@ -11785,7 +12776,7 @@
               </a:defRPr>
             </a:pPr>
             <a:r>
-              <a:t>08 / ПРОВЕРКА</a:t>
+              <a:t>07 / ЭТИКА И ПРИВАТНОСТЬ</a:t>
             </a:r>
           </a:p>
         </p:txBody>
@@ -11830,7 +12821,7 @@
               </a:defRPr>
             </a:pPr>
             <a:r>
-              <a:t>Проверили поведение, а не только красивый экран.</a:t>
+              <a:t>Доверие — это видимое «не знаем».</a:t>
             </a:r>
           </a:p>
         </p:txBody>
@@ -11925,51 +12916,30 @@
           </a:p>
         </p:txBody>
       </p:sp>
-      <p:sp>
-        <p:nvSpPr>
-          <p:cNvPr id="8" name="Rounded Rectangle 7"/>
-          <p:cNvSpPr/>
-          <p:nvPr/>
-        </p:nvSpPr>
-        <p:spPr>
-          <a:xfrm>
-            <a:off x="533400" y="2095500"/>
-            <a:ext cx="5448300" cy="1638300"/>
-          </a:xfrm>
-          <a:prstGeom prst="roundRect">
-            <a:avLst>
-              <a:gd name="adj" fmla="val 4000"/>
-            </a:avLst>
-          </a:prstGeom>
-          <a:solidFill>
-            <a:srgbClr val="FFFEFA"/>
-          </a:solidFill>
-          <a:ln>
-            <a:noFill/>
-          </a:ln>
-        </p:spPr>
-        <p:style>
-          <a:lnRef idx="1">
-            <a:schemeClr val="accent1"/>
-          </a:lnRef>
-          <a:fillRef idx="3">
-            <a:schemeClr val="accent1"/>
-          </a:fillRef>
-          <a:effectRef idx="0">
-            <a:schemeClr val="accent1"/>
-          </a:effectRef>
-          <a:fontRef idx="minor">
-            <a:schemeClr val="lt1"/>
-          </a:fontRef>
-        </p:style>
-        <p:txBody>
-          <a:bodyPr rtlCol="0" anchor="ctr"/>
-          <a:lstStyle/>
-          <a:p>
-            <a:pPr algn="ctr"/>
-          </a:p>
-        </p:txBody>
-      </p:sp>
+      <p:pic>
+        <p:nvPicPr>
+          <p:cNvPr id="8" name="Picture 7" descr="coffee.png"/>
+          <p:cNvPicPr>
+            <a:picLocks noChangeAspect="1"/>
+          </p:cNvPicPr>
+          <p:nvPr/>
+        </p:nvPicPr>
+        <p:blipFill>
+          <a:blip r:embed="rId2"/>
+          <a:stretch>
+            <a:fillRect/>
+          </a:stretch>
+        </p:blipFill>
+        <p:spPr>
+          <a:xfrm>
+            <a:off x="533400" y="2133600"/>
+            <a:ext cx="6400800" cy="2926659"/>
+          </a:xfrm>
+          <a:prstGeom prst="rect">
+            <a:avLst/>
+          </a:prstGeom>
+        </p:spPr>
+      </p:pic>
       <p:sp>
         <p:nvSpPr>
           <p:cNvPr id="9" name="TextBox 8"/>
@@ -11978,31 +12948,31 @@
         </p:nvSpPr>
         <p:spPr>
           <a:xfrm>
-            <a:off x="762000" y="2247900"/>
-            <a:ext cx="4876800" cy="861974"/>
-          </a:xfrm>
-          <a:prstGeom prst="rect">
-            <a:avLst/>
-          </a:prstGeom>
-          <a:noFill/>
-        </p:spPr>
-        <p:txBody>
-          <a:bodyPr wrap="none" lIns="0" rIns="0" tIns="0" bIns="0">
-            <a:spAutoFit/>
-          </a:bodyPr>
-          <a:lstStyle/>
-          <a:p>
-            <a:pPr>
-              <a:lnSpc>
-                <a:spcPts val="6067"/>
-              </a:lnSpc>
-              <a:spcBef>
-                <a:spcPts val="0"/>
-              </a:spcBef>
-              <a:spcAft>
-                <a:spcPts val="0"/>
-              </a:spcAft>
-              <a:defRPr sz="4740" b="0">
+            <a:off x="7429500" y="2171700"/>
+            <a:ext cx="3962400" cy="462076"/>
+          </a:xfrm>
+          <a:prstGeom prst="rect">
+            <a:avLst/>
+          </a:prstGeom>
+          <a:noFill/>
+        </p:spPr>
+        <p:txBody>
+          <a:bodyPr wrap="none" lIns="0" rIns="0" tIns="0" bIns="0">
+            <a:spAutoFit/>
+          </a:bodyPr>
+          <a:lstStyle/>
+          <a:p>
+            <a:pPr>
+              <a:lnSpc>
+                <a:spcPts val="2918"/>
+              </a:lnSpc>
+              <a:spcBef>
+                <a:spcPts val="0"/>
+              </a:spcBef>
+              <a:spcAft>
+                <a:spcPts val="0"/>
+              </a:spcAft>
+              <a:defRPr sz="2280" b="0">
                 <a:solidFill>
                   <a:srgbClr val="203E36"/>
                 </a:solidFill>
@@ -12010,7 +12980,7 @@
               </a:defRPr>
             </a:pPr>
             <a:r>
-              <a:t>32</a:t>
+              <a:t>Факты и идеи</a:t>
             </a:r>
           </a:p>
         </p:txBody>
@@ -12023,8 +12993,8 @@
         </p:nvSpPr>
         <p:spPr>
           <a:xfrm>
-            <a:off x="792480" y="3177540"/>
-            <a:ext cx="4876800" cy="354787"/>
+            <a:off x="7429500" y="2651760"/>
+            <a:ext cx="3886200" cy="618134"/>
           </a:xfrm>
           <a:prstGeom prst="rect">
             <a:avLst/>
@@ -12055,53 +13025,75 @@
               </a:defRPr>
             </a:pPr>
             <a:r>
-              <a:t>теста движка, API и Worker</a:t>
-            </a:r>
-          </a:p>
-        </p:txBody>
-      </p:sp>
-      <p:sp>
-        <p:nvSpPr>
-          <p:cNvPr id="11" name="Rounded Rectangle 10"/>
-          <p:cNvSpPr/>
-          <p:nvPr/>
-        </p:nvSpPr>
-        <p:spPr>
-          <a:xfrm>
-            <a:off x="6210300" y="2095500"/>
-            <a:ext cx="5448300" cy="1638300"/>
-          </a:xfrm>
-          <a:prstGeom prst="roundRect">
-            <a:avLst>
-              <a:gd name="adj" fmla="val 4000"/>
-            </a:avLst>
-          </a:prstGeom>
-          <a:solidFill>
-            <a:srgbClr val="FFFEFA"/>
-          </a:solidFill>
-          <a:ln>
-            <a:noFill/>
-          </a:ln>
-        </p:spPr>
-        <p:style>
-          <a:lnRef idx="1">
-            <a:schemeClr val="accent1"/>
-          </a:lnRef>
-          <a:fillRef idx="3">
-            <a:schemeClr val="accent1"/>
-          </a:fillRef>
-          <a:effectRef idx="0">
-            <a:schemeClr val="accent1"/>
-          </a:effectRef>
-          <a:fontRef idx="minor">
-            <a:schemeClr val="lt1"/>
-          </a:fontRef>
-        </p:style>
-        <p:txBody>
-          <a:bodyPr rtlCol="0" anchor="ctr"/>
-          <a:lstStyle/>
-          <a:p>
-            <a:pPr algn="ctr"/>
+              <a:t>Источник POI отделён от</a:t>
+            </a:r>
+          </a:p>
+          <a:p>
+            <a:pPr>
+              <a:lnSpc>
+                <a:spcPts val="2073"/>
+              </a:lnSpc>
+              <a:spcBef>
+                <a:spcPts val="0"/>
+              </a:spcBef>
+              <a:spcAft>
+                <a:spcPts val="0"/>
+              </a:spcAft>
+              <a:defRPr sz="1620" b="0">
+                <a:solidFill>
+                  <a:srgbClr val="687768"/>
+                </a:solidFill>
+                <a:latin typeface="Noto Sans"/>
+              </a:defRPr>
+            </a:pPr>
+            <a:r>
+              <a:t>предложения, что сделать.</a:t>
+            </a:r>
+          </a:p>
+        </p:txBody>
+      </p:sp>
+      <p:sp>
+        <p:nvSpPr>
+          <p:cNvPr id="11" name="TextBox 10"/>
+          <p:cNvSpPr txBox="1"/>
+          <p:nvPr/>
+        </p:nvSpPr>
+        <p:spPr>
+          <a:xfrm>
+            <a:off x="7429500" y="3543300"/>
+            <a:ext cx="3962400" cy="462076"/>
+          </a:xfrm>
+          <a:prstGeom prst="rect">
+            <a:avLst/>
+          </a:prstGeom>
+          <a:noFill/>
+        </p:spPr>
+        <p:txBody>
+          <a:bodyPr wrap="none" lIns="0" rIns="0" tIns="0" bIns="0">
+            <a:spAutoFit/>
+          </a:bodyPr>
+          <a:lstStyle/>
+          <a:p>
+            <a:pPr>
+              <a:lnSpc>
+                <a:spcPts val="2918"/>
+              </a:lnSpc>
+              <a:spcBef>
+                <a:spcPts val="0"/>
+              </a:spcBef>
+              <a:spcAft>
+                <a:spcPts val="0"/>
+              </a:spcAft>
+              <a:defRPr sz="2280" b="0">
+                <a:solidFill>
+                  <a:srgbClr val="203E36"/>
+                </a:solidFill>
+                <a:latin typeface="Noto Serif"/>
+              </a:defRPr>
+            </a:pPr>
+            <a:r>
+              <a:t>Локация без истории</a:t>
+            </a:r>
           </a:p>
         </p:txBody>
       </p:sp>
@@ -12113,39 +13105,83 @@
         </p:nvSpPr>
         <p:spPr>
           <a:xfrm>
-            <a:off x="6438900" y="2247900"/>
-            <a:ext cx="4876800" cy="861974"/>
-          </a:xfrm>
-          <a:prstGeom prst="rect">
-            <a:avLst/>
-          </a:prstGeom>
-          <a:noFill/>
-        </p:spPr>
-        <p:txBody>
-          <a:bodyPr wrap="none" lIns="0" rIns="0" tIns="0" bIns="0">
-            <a:spAutoFit/>
-          </a:bodyPr>
-          <a:lstStyle/>
-          <a:p>
-            <a:pPr>
-              <a:lnSpc>
-                <a:spcPts val="6067"/>
-              </a:lnSpc>
-              <a:spcBef>
-                <a:spcPts val="0"/>
-              </a:spcBef>
-              <a:spcAft>
-                <a:spcPts val="0"/>
-              </a:spcAft>
-              <a:defRPr sz="4740" b="0">
-                <a:solidFill>
-                  <a:srgbClr val="203E36"/>
-                </a:solidFill>
-                <a:latin typeface="Noto Serif"/>
-              </a:defRPr>
-            </a:pPr>
-            <a:r>
-              <a:t>160</a:t>
+            <a:off x="7429500" y="4038600"/>
+            <a:ext cx="3886200" cy="881481"/>
+          </a:xfrm>
+          <a:prstGeom prst="rect">
+            <a:avLst/>
+          </a:prstGeom>
+          <a:noFill/>
+        </p:spPr>
+        <p:txBody>
+          <a:bodyPr wrap="none" lIns="0" rIns="0" tIns="0" bIns="0">
+            <a:spAutoFit/>
+          </a:bodyPr>
+          <a:lstStyle/>
+          <a:p>
+            <a:pPr>
+              <a:lnSpc>
+                <a:spcPts val="2073"/>
+              </a:lnSpc>
+              <a:spcBef>
+                <a:spcPts val="0"/>
+              </a:spcBef>
+              <a:spcAft>
+                <a:spcPts val="0"/>
+              </a:spcAft>
+              <a:defRPr sz="1620" b="0">
+                <a:solidFill>
+                  <a:srgbClr val="687768"/>
+                </a:solidFill>
+                <a:latin typeface="Noto Sans"/>
+              </a:defRPr>
+            </a:pPr>
+            <a:r>
+              <a:t>Расчёт в браузере. Точные</a:t>
+            </a:r>
+          </a:p>
+          <a:p>
+            <a:pPr>
+              <a:lnSpc>
+                <a:spcPts val="2073"/>
+              </a:lnSpc>
+              <a:spcBef>
+                <a:spcPts val="0"/>
+              </a:spcBef>
+              <a:spcAft>
+                <a:spcPts val="0"/>
+              </a:spcAft>
+              <a:defRPr sz="1620" b="0">
+                <a:solidFill>
+                  <a:srgbClr val="687768"/>
+                </a:solidFill>
+                <a:latin typeface="Noto Sans"/>
+              </a:defRPr>
+            </a:pPr>
+            <a:r>
+              <a:t>координаты и исходный запрос не</a:t>
+            </a:r>
+          </a:p>
+          <a:p>
+            <a:pPr>
+              <a:lnSpc>
+                <a:spcPts val="2073"/>
+              </a:lnSpc>
+              <a:spcBef>
+                <a:spcPts val="0"/>
+              </a:spcBef>
+              <a:spcAft>
+                <a:spcPts val="0"/>
+              </a:spcAft>
+              <a:defRPr sz="1620" b="0">
+                <a:solidFill>
+                  <a:srgbClr val="687768"/>
+                </a:solidFill>
+                <a:latin typeface="Noto Sans"/>
+              </a:defRPr>
+            </a:pPr>
+            <a:r>
+              <a:t>отправляются в Gemini.</a:t>
             </a:r>
           </a:p>
         </p:txBody>
@@ -12158,354 +13194,39 @@
         </p:nvSpPr>
         <p:spPr>
           <a:xfrm>
-            <a:off x="6469380" y="3177540"/>
-            <a:ext cx="4876800" cy="354787"/>
-          </a:xfrm>
-          <a:prstGeom prst="rect">
-            <a:avLst/>
-          </a:prstGeom>
-          <a:noFill/>
-        </p:spPr>
-        <p:txBody>
-          <a:bodyPr wrap="none" lIns="0" rIns="0" tIns="0" bIns="0">
-            <a:spAutoFit/>
-          </a:bodyPr>
-          <a:lstStyle/>
-          <a:p>
-            <a:pPr>
-              <a:lnSpc>
-                <a:spcPts val="2073"/>
-              </a:lnSpc>
-              <a:spcBef>
-                <a:spcPts val="0"/>
-              </a:spcBef>
-              <a:spcAft>
-                <a:spcPts val="0"/>
-              </a:spcAft>
-              <a:defRPr sz="1620" b="0">
-                <a:solidFill>
-                  <a:srgbClr val="687768"/>
+            <a:off x="571500" y="5806440"/>
+            <a:ext cx="10972800" cy="345033"/>
+          </a:xfrm>
+          <a:prstGeom prst="rect">
+            <a:avLst/>
+          </a:prstGeom>
+          <a:noFill/>
+        </p:spPr>
+        <p:txBody>
+          <a:bodyPr wrap="none" lIns="0" rIns="0" tIns="0" bIns="0">
+            <a:spAutoFit/>
+          </a:bodyPr>
+          <a:lstStyle/>
+          <a:p>
+            <a:pPr>
+              <a:lnSpc>
+                <a:spcPts val="1996"/>
+              </a:lnSpc>
+              <a:spcBef>
+                <a:spcPts val="0"/>
+              </a:spcBef>
+              <a:spcAft>
+                <a:spcPts val="0"/>
+              </a:spcAft>
+              <a:defRPr sz="1560" b="0">
+                <a:solidFill>
+                  <a:srgbClr val="91652D"/>
                 </a:solidFill>
                 <a:latin typeface="Noto Sans"/>
               </a:defRPr>
             </a:pPr>
             <a:r>
-              <a:t>комбинаций ограничений</a:t>
-            </a:r>
-          </a:p>
-        </p:txBody>
-      </p:sp>
-      <p:sp>
-        <p:nvSpPr>
-          <p:cNvPr id="14" name="Rounded Rectangle 13"/>
-          <p:cNvSpPr/>
-          <p:nvPr/>
-        </p:nvSpPr>
-        <p:spPr>
-          <a:xfrm>
-            <a:off x="533400" y="3962400"/>
-            <a:ext cx="5448300" cy="1638300"/>
-          </a:xfrm>
-          <a:prstGeom prst="roundRect">
-            <a:avLst>
-              <a:gd name="adj" fmla="val 4000"/>
-            </a:avLst>
-          </a:prstGeom>
-          <a:solidFill>
-            <a:srgbClr val="FFFEFA"/>
-          </a:solidFill>
-          <a:ln>
-            <a:noFill/>
-          </a:ln>
-        </p:spPr>
-        <p:style>
-          <a:lnRef idx="1">
-            <a:schemeClr val="accent1"/>
-          </a:lnRef>
-          <a:fillRef idx="3">
-            <a:schemeClr val="accent1"/>
-          </a:fillRef>
-          <a:effectRef idx="0">
-            <a:schemeClr val="accent1"/>
-          </a:effectRef>
-          <a:fontRef idx="minor">
-            <a:schemeClr val="lt1"/>
-          </a:fontRef>
-        </p:style>
-        <p:txBody>
-          <a:bodyPr rtlCol="0" anchor="ctr"/>
-          <a:lstStyle/>
-          <a:p>
-            <a:pPr algn="ctr"/>
-          </a:p>
-        </p:txBody>
-      </p:sp>
-      <p:sp>
-        <p:nvSpPr>
-          <p:cNvPr id="15" name="TextBox 14"/>
-          <p:cNvSpPr txBox="1"/>
-          <p:nvPr/>
-        </p:nvSpPr>
-        <p:spPr>
-          <a:xfrm>
-            <a:off x="762000" y="4114800"/>
-            <a:ext cx="4876800" cy="861974"/>
-          </a:xfrm>
-          <a:prstGeom prst="rect">
-            <a:avLst/>
-          </a:prstGeom>
-          <a:noFill/>
-        </p:spPr>
-        <p:txBody>
-          <a:bodyPr wrap="none" lIns="0" rIns="0" tIns="0" bIns="0">
-            <a:spAutoFit/>
-          </a:bodyPr>
-          <a:lstStyle/>
-          <a:p>
-            <a:pPr>
-              <a:lnSpc>
-                <a:spcPts val="6067"/>
-              </a:lnSpc>
-              <a:spcBef>
-                <a:spcPts val="0"/>
-              </a:spcBef>
-              <a:spcAft>
-                <a:spcPts val="0"/>
-              </a:spcAft>
-              <a:defRPr sz="4740" b="0">
-                <a:solidFill>
-                  <a:srgbClr val="203E36"/>
-                </a:solidFill>
-                <a:latin typeface="Noto Serif"/>
-              </a:defRPr>
-            </a:pPr>
-            <a:r>
-              <a:t>8 / 8</a:t>
-            </a:r>
-          </a:p>
-        </p:txBody>
-      </p:sp>
-      <p:sp>
-        <p:nvSpPr>
-          <p:cNvPr id="16" name="TextBox 15"/>
-          <p:cNvSpPr txBox="1"/>
-          <p:nvPr/>
-        </p:nvSpPr>
-        <p:spPr>
-          <a:xfrm>
-            <a:off x="792480" y="5044440"/>
-            <a:ext cx="4876800" cy="354787"/>
-          </a:xfrm>
-          <a:prstGeom prst="rect">
-            <a:avLst/>
-          </a:prstGeom>
-          <a:noFill/>
-        </p:spPr>
-        <p:txBody>
-          <a:bodyPr wrap="none" lIns="0" rIns="0" tIns="0" bIns="0">
-            <a:spAutoFit/>
-          </a:bodyPr>
-          <a:lstStyle/>
-          <a:p>
-            <a:pPr>
-              <a:lnSpc>
-                <a:spcPts val="2073"/>
-              </a:lnSpc>
-              <a:spcBef>
-                <a:spcPts val="0"/>
-              </a:spcBef>
-              <a:spcAft>
-                <a:spcPts val="0"/>
-              </a:spcAft>
-              <a:defRPr sz="1620" b="0">
-                <a:solidFill>
-                  <a:srgbClr val="687768"/>
-                </a:solidFill>
-                <a:latin typeface="Noto Sans"/>
-              </a:defRPr>
-            </a:pPr>
-            <a:r>
-              <a:t>приёмочных сценариев</a:t>
-            </a:r>
-          </a:p>
-        </p:txBody>
-      </p:sp>
-      <p:sp>
-        <p:nvSpPr>
-          <p:cNvPr id="17" name="Rounded Rectangle 16"/>
-          <p:cNvSpPr/>
-          <p:nvPr/>
-        </p:nvSpPr>
-        <p:spPr>
-          <a:xfrm>
-            <a:off x="6210300" y="3962400"/>
-            <a:ext cx="5448300" cy="1638300"/>
-          </a:xfrm>
-          <a:prstGeom prst="roundRect">
-            <a:avLst>
-              <a:gd name="adj" fmla="val 4000"/>
-            </a:avLst>
-          </a:prstGeom>
-          <a:solidFill>
-            <a:srgbClr val="FFFEFA"/>
-          </a:solidFill>
-          <a:ln>
-            <a:noFill/>
-          </a:ln>
-        </p:spPr>
-        <p:style>
-          <a:lnRef idx="1">
-            <a:schemeClr val="accent1"/>
-          </a:lnRef>
-          <a:fillRef idx="3">
-            <a:schemeClr val="accent1"/>
-          </a:fillRef>
-          <a:effectRef idx="0">
-            <a:schemeClr val="accent1"/>
-          </a:effectRef>
-          <a:fontRef idx="minor">
-            <a:schemeClr val="lt1"/>
-          </a:fontRef>
-        </p:style>
-        <p:txBody>
-          <a:bodyPr rtlCol="0" anchor="ctr"/>
-          <a:lstStyle/>
-          <a:p>
-            <a:pPr algn="ctr"/>
-          </a:p>
-        </p:txBody>
-      </p:sp>
-      <p:sp>
-        <p:nvSpPr>
-          <p:cNvPr id="18" name="TextBox 17"/>
-          <p:cNvSpPr txBox="1"/>
-          <p:nvPr/>
-        </p:nvSpPr>
-        <p:spPr>
-          <a:xfrm>
-            <a:off x="6438900" y="4114800"/>
-            <a:ext cx="4876800" cy="861974"/>
-          </a:xfrm>
-          <a:prstGeom prst="rect">
-            <a:avLst/>
-          </a:prstGeom>
-          <a:noFill/>
-        </p:spPr>
-        <p:txBody>
-          <a:bodyPr wrap="none" lIns="0" rIns="0" tIns="0" bIns="0">
-            <a:spAutoFit/>
-          </a:bodyPr>
-          <a:lstStyle/>
-          <a:p>
-            <a:pPr>
-              <a:lnSpc>
-                <a:spcPts val="6067"/>
-              </a:lnSpc>
-              <a:spcBef>
-                <a:spcPts val="0"/>
-              </a:spcBef>
-              <a:spcAft>
-                <a:spcPts val="0"/>
-              </a:spcAft>
-              <a:defRPr sz="4740" b="0">
-                <a:solidFill>
-                  <a:srgbClr val="203E36"/>
-                </a:solidFill>
-                <a:latin typeface="Noto Serif"/>
-              </a:defRPr>
-            </a:pPr>
-            <a:r>
-              <a:t>17 / 17</a:t>
-            </a:r>
-          </a:p>
-        </p:txBody>
-      </p:sp>
-      <p:sp>
-        <p:nvSpPr>
-          <p:cNvPr id="19" name="TextBox 18"/>
-          <p:cNvSpPr txBox="1"/>
-          <p:nvPr/>
-        </p:nvSpPr>
-        <p:spPr>
-          <a:xfrm>
-            <a:off x="6469380" y="5044440"/>
-            <a:ext cx="4876800" cy="354787"/>
-          </a:xfrm>
-          <a:prstGeom prst="rect">
-            <a:avLst/>
-          </a:prstGeom>
-          <a:noFill/>
-        </p:spPr>
-        <p:txBody>
-          <a:bodyPr wrap="none" lIns="0" rIns="0" tIns="0" bIns="0">
-            <a:spAutoFit/>
-          </a:bodyPr>
-          <a:lstStyle/>
-          <a:p>
-            <a:pPr>
-              <a:lnSpc>
-                <a:spcPts val="2073"/>
-              </a:lnSpc>
-              <a:spcBef>
-                <a:spcPts val="0"/>
-              </a:spcBef>
-              <a:spcAft>
-                <a:spcPts val="0"/>
-              </a:spcAft>
-              <a:defRPr sz="1620" b="0">
-                <a:solidFill>
-                  <a:srgbClr val="687768"/>
-                </a:solidFill>
-                <a:latin typeface="Noto Sans"/>
-              </a:defRPr>
-            </a:pPr>
-            <a:r>
-              <a:t>проверок в браузере</a:t>
-            </a:r>
-          </a:p>
-        </p:txBody>
-      </p:sp>
-      <p:sp>
-        <p:nvSpPr>
-          <p:cNvPr id="20" name="TextBox 19"/>
-          <p:cNvSpPr txBox="1"/>
-          <p:nvPr/>
-        </p:nvSpPr>
-        <p:spPr>
-          <a:xfrm>
-            <a:off x="579120" y="5928359"/>
-            <a:ext cx="10972800" cy="315772"/>
-          </a:xfrm>
-          <a:prstGeom prst="rect">
-            <a:avLst/>
-          </a:prstGeom>
-          <a:noFill/>
-        </p:spPr>
-        <p:txBody>
-          <a:bodyPr wrap="none" lIns="0" rIns="0" tIns="0" bIns="0">
-            <a:spAutoFit/>
-          </a:bodyPr>
-          <a:lstStyle/>
-          <a:p>
-            <a:pPr>
-              <a:lnSpc>
-                <a:spcPts val="1766"/>
-              </a:lnSpc>
-              <a:spcBef>
-                <a:spcPts val="0"/>
-              </a:spcBef>
-              <a:spcAft>
-                <a:spcPts val="0"/>
-              </a:spcAft>
-              <a:defRPr sz="1380" b="0">
-                <a:solidFill>
-                  <a:srgbClr val="687768"/>
-                </a:solidFill>
-                <a:latin typeface="Noto Sans"/>
-              </a:defRPr>
-            </a:pPr>
-            <a:r>
-              <a:t>Включая пустую выдачу, закрытие во время визита, приватность, мобильный экран и неверный ответ модели.</a:t>
+              <a:t>Никаких обещаний о тишине, розетках, ночной безопасности или маршруте без ступеней без данных.</a:t>
             </a:r>
           </a:p>
         </p:txBody>
@@ -12656,7 +13377,7 @@
               </a:defRPr>
             </a:pPr>
             <a:r>
-              <a:t>09 / БИЗНЕС-ГИПОТЕЗА</a:t>
+              <a:t>09 / ПРОВЕРКА</a:t>
             </a:r>
           </a:p>
         </p:txBody>
@@ -12701,7 +13422,7 @@
               </a:defRPr>
             </a:pPr>
             <a:r>
-              <a:t>Сначала польза человеку. Затем городской сервис.</a:t>
+              <a:t>Проверили поведение, а не только красивый экран.</a:t>
             </a:r>
           </a:p>
         </p:txBody>
@@ -12804,8 +13525,8 @@
         </p:nvSpPr>
         <p:spPr>
           <a:xfrm>
-            <a:off x="533400" y="2133600"/>
-            <a:ext cx="5410200" cy="3429000"/>
+            <a:off x="533400" y="2095500"/>
+            <a:ext cx="5448300" cy="1638300"/>
           </a:xfrm>
           <a:prstGeom prst="roundRect">
             <a:avLst>
@@ -12813,7 +13534,7 @@
             </a:avLst>
           </a:prstGeom>
           <a:solidFill>
-            <a:srgbClr val="203E36"/>
+            <a:srgbClr val="FFFEFA"/>
           </a:solidFill>
           <a:ln>
             <a:noFill/>
@@ -12849,39 +13570,39 @@
         </p:nvSpPr>
         <p:spPr>
           <a:xfrm>
-            <a:off x="800100" y="2438400"/>
-            <a:ext cx="4838700" cy="510844"/>
-          </a:xfrm>
-          <a:prstGeom prst="rect">
-            <a:avLst/>
-          </a:prstGeom>
-          <a:noFill/>
-        </p:spPr>
-        <p:txBody>
-          <a:bodyPr wrap="none" lIns="0" rIns="0" tIns="0" bIns="0">
-            <a:spAutoFit/>
-          </a:bodyPr>
-          <a:lstStyle/>
-          <a:p>
-            <a:pPr>
-              <a:lnSpc>
-                <a:spcPts val="3302"/>
-              </a:lnSpc>
-              <a:spcBef>
-                <a:spcPts val="0"/>
-              </a:spcBef>
-              <a:spcAft>
-                <a:spcPts val="0"/>
-              </a:spcAft>
-              <a:defRPr sz="2580" b="0">
-                <a:solidFill>
-                  <a:srgbClr val="D6ED92"/>
+            <a:off x="762000" y="2247900"/>
+            <a:ext cx="4876800" cy="861974"/>
+          </a:xfrm>
+          <a:prstGeom prst="rect">
+            <a:avLst/>
+          </a:prstGeom>
+          <a:noFill/>
+        </p:spPr>
+        <p:txBody>
+          <a:bodyPr wrap="none" lIns="0" rIns="0" tIns="0" bIns="0">
+            <a:spAutoFit/>
+          </a:bodyPr>
+          <a:lstStyle/>
+          <a:p>
+            <a:pPr>
+              <a:lnSpc>
+                <a:spcPts val="6067"/>
+              </a:lnSpc>
+              <a:spcBef>
+                <a:spcPts val="0"/>
+              </a:spcBef>
+              <a:spcAft>
+                <a:spcPts val="0"/>
+              </a:spcAft>
+              <a:defRPr sz="4740" b="0">
+                <a:solidFill>
+                  <a:srgbClr val="203E36"/>
                 </a:solidFill>
                 <a:latin typeface="Noto Serif"/>
               </a:defRPr>
             </a:pPr>
             <a:r>
-              <a:t>Бесплатно для прогулки</a:t>
+              <a:t>47</a:t>
             </a:r>
           </a:p>
         </p:txBody>
@@ -12894,142 +13615,53 @@
         </p:nvSpPr>
         <p:spPr>
           <a:xfrm>
-            <a:off x="800100" y="3223260"/>
-            <a:ext cx="4762500" cy="696163"/>
-          </a:xfrm>
-          <a:prstGeom prst="rect">
-            <a:avLst/>
-          </a:prstGeom>
-          <a:noFill/>
-        </p:spPr>
-        <p:txBody>
-          <a:bodyPr wrap="none" lIns="0" rIns="0" tIns="0" bIns="0">
-            <a:spAutoFit/>
-          </a:bodyPr>
-          <a:lstStyle/>
-          <a:p>
-            <a:pPr>
-              <a:lnSpc>
-                <a:spcPts val="2380"/>
-              </a:lnSpc>
-              <a:spcBef>
-                <a:spcPts val="0"/>
-              </a:spcBef>
-              <a:spcAft>
-                <a:spcPts val="0"/>
-              </a:spcAft>
-              <a:defRPr sz="1859" b="0">
-                <a:solidFill>
-                  <a:srgbClr val="FFFEFA"/>
+            <a:off x="792480" y="3177540"/>
+            <a:ext cx="4876800" cy="354787"/>
+          </a:xfrm>
+          <a:prstGeom prst="rect">
+            <a:avLst/>
+          </a:prstGeom>
+          <a:noFill/>
+        </p:spPr>
+        <p:txBody>
+          <a:bodyPr wrap="none" lIns="0" rIns="0" tIns="0" bIns="0">
+            <a:spAutoFit/>
+          </a:bodyPr>
+          <a:lstStyle/>
+          <a:p>
+            <a:pPr>
+              <a:lnSpc>
+                <a:spcPts val="2073"/>
+              </a:lnSpc>
+              <a:spcBef>
+                <a:spcPts val="0"/>
+              </a:spcBef>
+              <a:spcAft>
+                <a:spcPts val="0"/>
+              </a:spcAft>
+              <a:defRPr sz="1620" b="0">
+                <a:solidFill>
+                  <a:srgbClr val="687768"/>
                 </a:solidFill>
                 <a:latin typeface="Noto Sans"/>
               </a:defRPr>
             </a:pPr>
             <a:r>
-              <a:t>Жители, родители, туристы.</a:t>
-            </a:r>
-          </a:p>
-          <a:p>
-            <a:pPr>
-              <a:lnSpc>
-                <a:spcPts val="2380"/>
-              </a:lnSpc>
-              <a:spcBef>
-                <a:spcPts val="0"/>
-              </a:spcBef>
-              <a:spcAft>
-                <a:spcPts val="0"/>
-              </a:spcAft>
-              <a:defRPr sz="1859" b="0">
-                <a:solidFill>
-                  <a:srgbClr val="FFFEFA"/>
-                </a:solidFill>
-                <a:latin typeface="Noto Sans"/>
-              </a:defRPr>
-            </a:pPr>
-            <a:r>
-              <a:t>Короткий план без регистрации.</a:t>
-            </a:r>
-          </a:p>
-        </p:txBody>
-      </p:sp>
-      <p:sp>
-        <p:nvSpPr>
-          <p:cNvPr id="11" name="TextBox 10"/>
-          <p:cNvSpPr txBox="1"/>
-          <p:nvPr/>
-        </p:nvSpPr>
-        <p:spPr>
-          <a:xfrm>
-            <a:off x="800100" y="4343400"/>
-            <a:ext cx="4762500" cy="618134"/>
-          </a:xfrm>
-          <a:prstGeom prst="rect">
-            <a:avLst/>
-          </a:prstGeom>
-          <a:noFill/>
-        </p:spPr>
-        <p:txBody>
-          <a:bodyPr wrap="none" lIns="0" rIns="0" tIns="0" bIns="0">
-            <a:spAutoFit/>
-          </a:bodyPr>
-          <a:lstStyle/>
-          <a:p>
-            <a:pPr>
-              <a:lnSpc>
-                <a:spcPts val="2073"/>
-              </a:lnSpc>
-              <a:spcBef>
-                <a:spcPts val="0"/>
-              </a:spcBef>
-              <a:spcAft>
-                <a:spcPts val="0"/>
-              </a:spcAft>
-              <a:defRPr sz="1620" b="0">
-                <a:solidFill>
-                  <a:srgbClr val="C1CEBC"/>
-                </a:solidFill>
-                <a:latin typeface="Noto Sans"/>
-              </a:defRPr>
-            </a:pPr>
-            <a:r>
-              <a:t>Ценность: меньше времени на выбор,</a:t>
-            </a:r>
-          </a:p>
-          <a:p>
-            <a:pPr>
-              <a:lnSpc>
-                <a:spcPts val="2073"/>
-              </a:lnSpc>
-              <a:spcBef>
-                <a:spcPts val="0"/>
-              </a:spcBef>
-              <a:spcAft>
-                <a:spcPts val="0"/>
-              </a:spcAft>
-              <a:defRPr sz="1620" b="0">
-                <a:solidFill>
-                  <a:srgbClr val="C1CEBC"/>
-                </a:solidFill>
-                <a:latin typeface="Noto Sans"/>
-              </a:defRPr>
-            </a:pPr>
-            <a:r>
-              <a:t>больше понятных действий рядом.</a:t>
-            </a:r>
-          </a:p>
-        </p:txBody>
-      </p:sp>
-      <p:sp>
-        <p:nvSpPr>
-          <p:cNvPr id="12" name="Rounded Rectangle 11"/>
+              <a:t>тестов движка, API и Worker</a:t>
+            </a:r>
+          </a:p>
+        </p:txBody>
+      </p:sp>
+      <p:sp>
+        <p:nvSpPr>
+          <p:cNvPr id="11" name="Rounded Rectangle 10"/>
           <p:cNvSpPr/>
           <p:nvPr/>
         </p:nvSpPr>
         <p:spPr>
           <a:xfrm>
-            <a:off x="6210300" y="2133600"/>
-            <a:ext cx="5448300" cy="3429000"/>
+            <a:off x="6210300" y="2095500"/>
+            <a:ext cx="5448300" cy="1638300"/>
           </a:xfrm>
           <a:prstGeom prst="roundRect">
             <a:avLst>
@@ -13067,37 +13699,172 @@
       </p:sp>
       <p:sp>
         <p:nvSpPr>
+          <p:cNvPr id="12" name="TextBox 11"/>
+          <p:cNvSpPr txBox="1"/>
+          <p:nvPr/>
+        </p:nvSpPr>
+        <p:spPr>
+          <a:xfrm>
+            <a:off x="6438900" y="2247900"/>
+            <a:ext cx="4876800" cy="861974"/>
+          </a:xfrm>
+          <a:prstGeom prst="rect">
+            <a:avLst/>
+          </a:prstGeom>
+          <a:noFill/>
+        </p:spPr>
+        <p:txBody>
+          <a:bodyPr wrap="none" lIns="0" rIns="0" tIns="0" bIns="0">
+            <a:spAutoFit/>
+          </a:bodyPr>
+          <a:lstStyle/>
+          <a:p>
+            <a:pPr>
+              <a:lnSpc>
+                <a:spcPts val="6067"/>
+              </a:lnSpc>
+              <a:spcBef>
+                <a:spcPts val="0"/>
+              </a:spcBef>
+              <a:spcAft>
+                <a:spcPts val="0"/>
+              </a:spcAft>
+              <a:defRPr sz="4740" b="0">
+                <a:solidFill>
+                  <a:srgbClr val="203E36"/>
+                </a:solidFill>
+                <a:latin typeface="Noto Serif"/>
+              </a:defRPr>
+            </a:pPr>
+            <a:r>
+              <a:t>160</a:t>
+            </a:r>
+          </a:p>
+        </p:txBody>
+      </p:sp>
+      <p:sp>
+        <p:nvSpPr>
           <p:cNvPr id="13" name="TextBox 12"/>
           <p:cNvSpPr txBox="1"/>
           <p:nvPr/>
         </p:nvSpPr>
         <p:spPr>
           <a:xfrm>
-            <a:off x="6477000" y="2438400"/>
-            <a:ext cx="4876800" cy="510844"/>
-          </a:xfrm>
-          <a:prstGeom prst="rect">
-            <a:avLst/>
-          </a:prstGeom>
-          <a:noFill/>
-        </p:spPr>
-        <p:txBody>
-          <a:bodyPr wrap="none" lIns="0" rIns="0" tIns="0" bIns="0">
-            <a:spAutoFit/>
-          </a:bodyPr>
-          <a:lstStyle/>
-          <a:p>
-            <a:pPr>
-              <a:lnSpc>
-                <a:spcPts val="3302"/>
-              </a:lnSpc>
-              <a:spcBef>
-                <a:spcPts val="0"/>
-              </a:spcBef>
-              <a:spcAft>
-                <a:spcPts val="0"/>
-              </a:spcAft>
-              <a:defRPr sz="2580" b="0">
+            <a:off x="6469380" y="3177540"/>
+            <a:ext cx="4876800" cy="354787"/>
+          </a:xfrm>
+          <a:prstGeom prst="rect">
+            <a:avLst/>
+          </a:prstGeom>
+          <a:noFill/>
+        </p:spPr>
+        <p:txBody>
+          <a:bodyPr wrap="none" lIns="0" rIns="0" tIns="0" bIns="0">
+            <a:spAutoFit/>
+          </a:bodyPr>
+          <a:lstStyle/>
+          <a:p>
+            <a:pPr>
+              <a:lnSpc>
+                <a:spcPts val="2073"/>
+              </a:lnSpc>
+              <a:spcBef>
+                <a:spcPts val="0"/>
+              </a:spcBef>
+              <a:spcAft>
+                <a:spcPts val="0"/>
+              </a:spcAft>
+              <a:defRPr sz="1620" b="0">
+                <a:solidFill>
+                  <a:srgbClr val="687768"/>
+                </a:solidFill>
+                <a:latin typeface="Noto Sans"/>
+              </a:defRPr>
+            </a:pPr>
+            <a:r>
+              <a:t>комбинаций ограничений</a:t>
+            </a:r>
+          </a:p>
+        </p:txBody>
+      </p:sp>
+      <p:sp>
+        <p:nvSpPr>
+          <p:cNvPr id="14" name="Rounded Rectangle 13"/>
+          <p:cNvSpPr/>
+          <p:nvPr/>
+        </p:nvSpPr>
+        <p:spPr>
+          <a:xfrm>
+            <a:off x="533400" y="3962400"/>
+            <a:ext cx="5448300" cy="1638300"/>
+          </a:xfrm>
+          <a:prstGeom prst="roundRect">
+            <a:avLst>
+              <a:gd name="adj" fmla="val 4000"/>
+            </a:avLst>
+          </a:prstGeom>
+          <a:solidFill>
+            <a:srgbClr val="FFFEFA"/>
+          </a:solidFill>
+          <a:ln>
+            <a:noFill/>
+          </a:ln>
+        </p:spPr>
+        <p:style>
+          <a:lnRef idx="1">
+            <a:schemeClr val="accent1"/>
+          </a:lnRef>
+          <a:fillRef idx="3">
+            <a:schemeClr val="accent1"/>
+          </a:fillRef>
+          <a:effectRef idx="0">
+            <a:schemeClr val="accent1"/>
+          </a:effectRef>
+          <a:fontRef idx="minor">
+            <a:schemeClr val="lt1"/>
+          </a:fontRef>
+        </p:style>
+        <p:txBody>
+          <a:bodyPr rtlCol="0" anchor="ctr"/>
+          <a:lstStyle/>
+          <a:p>
+            <a:pPr algn="ctr"/>
+          </a:p>
+        </p:txBody>
+      </p:sp>
+      <p:sp>
+        <p:nvSpPr>
+          <p:cNvPr id="15" name="TextBox 14"/>
+          <p:cNvSpPr txBox="1"/>
+          <p:nvPr/>
+        </p:nvSpPr>
+        <p:spPr>
+          <a:xfrm>
+            <a:off x="762000" y="4114800"/>
+            <a:ext cx="4876800" cy="861974"/>
+          </a:xfrm>
+          <a:prstGeom prst="rect">
+            <a:avLst/>
+          </a:prstGeom>
+          <a:noFill/>
+        </p:spPr>
+        <p:txBody>
+          <a:bodyPr wrap="none" lIns="0" rIns="0" tIns="0" bIns="0">
+            <a:spAutoFit/>
+          </a:bodyPr>
+          <a:lstStyle/>
+          <a:p>
+            <a:pPr>
+              <a:lnSpc>
+                <a:spcPts val="6067"/>
+              </a:lnSpc>
+              <a:spcBef>
+                <a:spcPts val="0"/>
+              </a:spcBef>
+              <a:spcAft>
+                <a:spcPts val="0"/>
+              </a:spcAft>
+              <a:defRPr sz="4740" b="0">
                 <a:solidFill>
                   <a:srgbClr val="203E36"/>
                 </a:solidFill>
@@ -13105,44 +13872,44 @@
               </a:defRPr>
             </a:pPr>
             <a:r>
-              <a:t>B2B после пилота</a:t>
-            </a:r>
-          </a:p>
-        </p:txBody>
-      </p:sp>
-      <p:sp>
-        <p:nvSpPr>
-          <p:cNvPr id="14" name="TextBox 13"/>
-          <p:cNvSpPr txBox="1"/>
-          <p:nvPr/>
-        </p:nvSpPr>
-        <p:spPr>
-          <a:xfrm>
-            <a:off x="6477000" y="3223260"/>
-            <a:ext cx="4762500" cy="696163"/>
-          </a:xfrm>
-          <a:prstGeom prst="rect">
-            <a:avLst/>
-          </a:prstGeom>
-          <a:noFill/>
-        </p:spPr>
-        <p:txBody>
-          <a:bodyPr wrap="none" lIns="0" rIns="0" tIns="0" bIns="0">
-            <a:spAutoFit/>
-          </a:bodyPr>
-          <a:lstStyle/>
-          <a:p>
-            <a:pPr>
-              <a:lnSpc>
-                <a:spcPts val="2380"/>
-              </a:lnSpc>
-              <a:spcBef>
-                <a:spcPts val="0"/>
-              </a:spcBef>
-              <a:spcAft>
-                <a:spcPts val="0"/>
-              </a:spcAft>
-              <a:defRPr sz="1859" b="0">
+              <a:t>12 / 12</a:t>
+            </a:r>
+          </a:p>
+        </p:txBody>
+      </p:sp>
+      <p:sp>
+        <p:nvSpPr>
+          <p:cNvPr id="16" name="TextBox 15"/>
+          <p:cNvSpPr txBox="1"/>
+          <p:nvPr/>
+        </p:nvSpPr>
+        <p:spPr>
+          <a:xfrm>
+            <a:off x="792480" y="5044440"/>
+            <a:ext cx="4876800" cy="354787"/>
+          </a:xfrm>
+          <a:prstGeom prst="rect">
+            <a:avLst/>
+          </a:prstGeom>
+          <a:noFill/>
+        </p:spPr>
+        <p:txBody>
+          <a:bodyPr wrap="none" lIns="0" rIns="0" tIns="0" bIns="0">
+            <a:spAutoFit/>
+          </a:bodyPr>
+          <a:lstStyle/>
+          <a:p>
+            <a:pPr>
+              <a:lnSpc>
+                <a:spcPts val="2073"/>
+              </a:lnSpc>
+              <a:spcBef>
+                <a:spcPts val="0"/>
+              </a:spcBef>
+              <a:spcAft>
+                <a:spcPts val="0"/>
+              </a:spcAft>
+              <a:defRPr sz="1620" b="0">
                 <a:solidFill>
                   <a:srgbClr val="687768"/>
                 </a:solidFill>
@@ -13150,21 +13917,134 @@
               </a:defRPr>
             </a:pPr>
             <a:r>
-              <a:t>Отели, городские порталы,</a:t>
-            </a:r>
-          </a:p>
-          <a:p>
-            <a:pPr>
-              <a:lnSpc>
-                <a:spcPts val="2380"/>
-              </a:lnSpc>
-              <a:spcBef>
-                <a:spcPts val="0"/>
-              </a:spcBef>
-              <a:spcAft>
-                <a:spcPts val="0"/>
-              </a:spcAft>
-              <a:defRPr sz="1859" b="0">
+              <a:t>приёмочных сценариев</a:t>
+            </a:r>
+          </a:p>
+        </p:txBody>
+      </p:sp>
+      <p:sp>
+        <p:nvSpPr>
+          <p:cNvPr id="17" name="Rounded Rectangle 16"/>
+          <p:cNvSpPr/>
+          <p:nvPr/>
+        </p:nvSpPr>
+        <p:spPr>
+          <a:xfrm>
+            <a:off x="6210300" y="3962400"/>
+            <a:ext cx="5448300" cy="1638300"/>
+          </a:xfrm>
+          <a:prstGeom prst="roundRect">
+            <a:avLst>
+              <a:gd name="adj" fmla="val 4000"/>
+            </a:avLst>
+          </a:prstGeom>
+          <a:solidFill>
+            <a:srgbClr val="FFFEFA"/>
+          </a:solidFill>
+          <a:ln>
+            <a:noFill/>
+          </a:ln>
+        </p:spPr>
+        <p:style>
+          <a:lnRef idx="1">
+            <a:schemeClr val="accent1"/>
+          </a:lnRef>
+          <a:fillRef idx="3">
+            <a:schemeClr val="accent1"/>
+          </a:fillRef>
+          <a:effectRef idx="0">
+            <a:schemeClr val="accent1"/>
+          </a:effectRef>
+          <a:fontRef idx="minor">
+            <a:schemeClr val="lt1"/>
+          </a:fontRef>
+        </p:style>
+        <p:txBody>
+          <a:bodyPr rtlCol="0" anchor="ctr"/>
+          <a:lstStyle/>
+          <a:p>
+            <a:pPr algn="ctr"/>
+          </a:p>
+        </p:txBody>
+      </p:sp>
+      <p:sp>
+        <p:nvSpPr>
+          <p:cNvPr id="18" name="TextBox 17"/>
+          <p:cNvSpPr txBox="1"/>
+          <p:nvPr/>
+        </p:nvSpPr>
+        <p:spPr>
+          <a:xfrm>
+            <a:off x="6438900" y="4114800"/>
+            <a:ext cx="4876800" cy="861974"/>
+          </a:xfrm>
+          <a:prstGeom prst="rect">
+            <a:avLst/>
+          </a:prstGeom>
+          <a:noFill/>
+        </p:spPr>
+        <p:txBody>
+          <a:bodyPr wrap="none" lIns="0" rIns="0" tIns="0" bIns="0">
+            <a:spAutoFit/>
+          </a:bodyPr>
+          <a:lstStyle/>
+          <a:p>
+            <a:pPr>
+              <a:lnSpc>
+                <a:spcPts val="6067"/>
+              </a:lnSpc>
+              <a:spcBef>
+                <a:spcPts val="0"/>
+              </a:spcBef>
+              <a:spcAft>
+                <a:spcPts val="0"/>
+              </a:spcAft>
+              <a:defRPr sz="4740" b="0">
+                <a:solidFill>
+                  <a:srgbClr val="203E36"/>
+                </a:solidFill>
+                <a:latin typeface="Noto Serif"/>
+              </a:defRPr>
+            </a:pPr>
+            <a:r>
+              <a:t>27 / 27</a:t>
+            </a:r>
+          </a:p>
+        </p:txBody>
+      </p:sp>
+      <p:sp>
+        <p:nvSpPr>
+          <p:cNvPr id="19" name="TextBox 18"/>
+          <p:cNvSpPr txBox="1"/>
+          <p:nvPr/>
+        </p:nvSpPr>
+        <p:spPr>
+          <a:xfrm>
+            <a:off x="6469380" y="5044440"/>
+            <a:ext cx="4876800" cy="354787"/>
+          </a:xfrm>
+          <a:prstGeom prst="rect">
+            <a:avLst/>
+          </a:prstGeom>
+          <a:noFill/>
+        </p:spPr>
+        <p:txBody>
+          <a:bodyPr wrap="none" lIns="0" rIns="0" tIns="0" bIns="0">
+            <a:spAutoFit/>
+          </a:bodyPr>
+          <a:lstStyle/>
+          <a:p>
+            <a:pPr>
+              <a:lnSpc>
+                <a:spcPts val="2073"/>
+              </a:lnSpc>
+              <a:spcBef>
+                <a:spcPts val="0"/>
+              </a:spcBef>
+              <a:spcAft>
+                <a:spcPts val="0"/>
+              </a:spcAft>
+              <a:defRPr sz="1620" b="0">
                 <a:solidFill>
                   <a:srgbClr val="687768"/>
                 </a:solidFill>
@@ -13172,44 +14052,44 @@
               </a:defRPr>
             </a:pPr>
             <a:r>
-              <a:t>организаторы мероприятий.</a:t>
-            </a:r>
-          </a:p>
-        </p:txBody>
-      </p:sp>
-      <p:sp>
-        <p:nvSpPr>
-          <p:cNvPr id="15" name="TextBox 14"/>
-          <p:cNvSpPr txBox="1"/>
-          <p:nvPr/>
-        </p:nvSpPr>
-        <p:spPr>
-          <a:xfrm>
-            <a:off x="6477000" y="4305300"/>
-            <a:ext cx="4762500" cy="881481"/>
-          </a:xfrm>
-          <a:prstGeom prst="rect">
-            <a:avLst/>
-          </a:prstGeom>
-          <a:noFill/>
-        </p:spPr>
-        <p:txBody>
-          <a:bodyPr wrap="none" lIns="0" rIns="0" tIns="0" bIns="0">
-            <a:spAutoFit/>
-          </a:bodyPr>
-          <a:lstStyle/>
-          <a:p>
-            <a:pPr>
-              <a:lnSpc>
-                <a:spcPts val="2073"/>
-              </a:lnSpc>
-              <a:spcBef>
-                <a:spcPts val="0"/>
-              </a:spcBef>
-              <a:spcAft>
-                <a:spcPts val="0"/>
-              </a:spcAft>
-              <a:defRPr sz="1620" b="0">
+              <a:t>проверок в браузере</a:t>
+            </a:r>
+          </a:p>
+        </p:txBody>
+      </p:sp>
+      <p:sp>
+        <p:nvSpPr>
+          <p:cNvPr id="20" name="TextBox 19"/>
+          <p:cNvSpPr txBox="1"/>
+          <p:nvPr/>
+        </p:nvSpPr>
+        <p:spPr>
+          <a:xfrm>
+            <a:off x="579120" y="5928359"/>
+            <a:ext cx="10972800" cy="315772"/>
+          </a:xfrm>
+          <a:prstGeom prst="rect">
+            <a:avLst/>
+          </a:prstGeom>
+          <a:noFill/>
+        </p:spPr>
+        <p:txBody>
+          <a:bodyPr wrap="none" lIns="0" rIns="0" tIns="0" bIns="0">
+            <a:spAutoFit/>
+          </a:bodyPr>
+          <a:lstStyle/>
+          <a:p>
+            <a:pPr>
+              <a:lnSpc>
+                <a:spcPts val="1766"/>
+              </a:lnSpc>
+              <a:spcBef>
+                <a:spcPts val="0"/>
+              </a:spcBef>
+              <a:spcAft>
+                <a:spcPts val="0"/>
+              </a:spcAft>
+              <a:defRPr sz="1380" b="0">
                 <a:solidFill>
                   <a:srgbClr val="687768"/>
                 </a:solidFill>
@@ -13217,96 +14097,7 @@
               </a:defRPr>
             </a:pPr>
             <a:r>
-              <a:t>Гипотеза: платный виджет и интеграция.</a:t>
-            </a:r>
-          </a:p>
-          <a:p>
-            <a:pPr>
-              <a:lnSpc>
-                <a:spcPts val="2073"/>
-              </a:lnSpc>
-              <a:spcBef>
-                <a:spcPts val="0"/>
-              </a:spcBef>
-              <a:spcAft>
-                <a:spcPts val="0"/>
-              </a:spcAft>
-              <a:defRPr sz="1620" b="0">
-                <a:solidFill>
-                  <a:srgbClr val="687768"/>
-                </a:solidFill>
-                <a:latin typeface="Noto Sans"/>
-              </a:defRPr>
-            </a:pPr>
-            <a:r>
-              <a:t>Реклама маркируется и не отменяет</a:t>
-            </a:r>
-          </a:p>
-          <a:p>
-            <a:pPr>
-              <a:lnSpc>
-                <a:spcPts val="2073"/>
-              </a:lnSpc>
-              <a:spcBef>
-                <a:spcPts val="0"/>
-              </a:spcBef>
-              <a:spcAft>
-                <a:spcPts val="0"/>
-              </a:spcAft>
-              <a:defRPr sz="1620" b="0">
-                <a:solidFill>
-                  <a:srgbClr val="687768"/>
-                </a:solidFill>
-                <a:latin typeface="Noto Sans"/>
-              </a:defRPr>
-            </a:pPr>
-            <a:r>
-              <a:t>ограничения.</a:t>
-            </a:r>
-          </a:p>
-        </p:txBody>
-      </p:sp>
-      <p:sp>
-        <p:nvSpPr>
-          <p:cNvPr id="16" name="TextBox 15"/>
-          <p:cNvSpPr txBox="1"/>
-          <p:nvPr/>
-        </p:nvSpPr>
-        <p:spPr>
-          <a:xfrm>
-            <a:off x="579120" y="5935980"/>
-            <a:ext cx="10972800" cy="315772"/>
-          </a:xfrm>
-          <a:prstGeom prst="rect">
-            <a:avLst/>
-          </a:prstGeom>
-          <a:noFill/>
-        </p:spPr>
-        <p:txBody>
-          <a:bodyPr wrap="none" lIns="0" rIns="0" tIns="0" bIns="0">
-            <a:spAutoFit/>
-          </a:bodyPr>
-          <a:lstStyle/>
-          <a:p>
-            <a:pPr>
-              <a:lnSpc>
-                <a:spcPts val="1766"/>
-              </a:lnSpc>
-              <a:spcBef>
-                <a:spcPts val="0"/>
-              </a:spcBef>
-              <a:spcAft>
-                <a:spcPts val="0"/>
-              </a:spcAft>
-              <a:defRPr sz="1380" b="0">
-                <a:solidFill>
-                  <a:srgbClr val="687768"/>
-                </a:solidFill>
-                <a:latin typeface="Noto Sans"/>
-              </a:defRPr>
-            </a:pPr>
-            <a:r>
-              <a:t>План пилота: 20 пользователей · 3 сценария · 2 недели. Это цель, не уже достигнутый результат.</a:t>
+              <a:t>Включая пустую выдачу, закрытие во время визита, приватность, мобильный экран и неверный ответ модели.</a:t>
             </a:r>
           </a:p>
         </p:txBody>

--- a/presentation/Qadam_ArcSolo_pitch_RU.pptx
+++ b/presentation/Qadam_ArcSolo_pitch_RU.pptx
@@ -519,7 +519,7 @@
           <a:p/>
           <a:p>
             <a:r>
-              <a:t>Здравствуйте! Мы — ArcSolo, и это Qadam: помощник по коротким прогулкам в Астане. Представьте, что вы стоите возле MEGA Silk Way и у вас свободен один час. Хочется успеть что-то приятное, а не потратить половину времени на поиск. Qadam предлагает конкретные места, объясняет выбор и считает прогулку вместе с возвращением. Наш принцип: полезная рекомендация начинается с реальных данных и честных ограничений.</a:t>
+              <a:t>Здравствуйте! Мы — ArcSolo, и это Qadam: помощник по коротким прогулкам в Астане. Представьте, что вы возле MEGA Silk Way и у вас свободен час. Хочется успеть что-то приятное, а не потратить время на поиск. Qadam предлагает конкретные места и считает прогулку вместе с возвращением. Его основа — реальные данные и понятные ограничения.</a:t>
             </a:r>
           </a:p>
         </p:txBody>
@@ -589,13 +589,13 @@
           <a:lstStyle/>
           <a:p>
             <a:r>
-              <a:t>35 секунд</a:t>
+              <a:t>30 секунд</a:t>
             </a:r>
           </a:p>
           <a:p/>
           <a:p>
             <a:r>
-              <a:t>Мы видим бесплатный пользовательский сценарий и потенциальную B2B-модель: виджет для отелей, городских порталов и организаторов мероприятий. Но это гипотеза, а не заявка на уже существующую выручку. Следующий шаг — двухнедельный пилот с двадцатью пользователями на трёх сценариях. Будем измерять полезность рекомендации, время до выбора и ошибки ограничений. Если появятся партнёрские размещения, они будут маркироваться и не смогут обойти фильтры времени или доступности.</a:t>
+              <a:t>Пользовательская прогулка остаётся бесплатной. B2B-гипотеза — виджет для отелей, городских порталов и организаторов мероприятий. Выручку мы пока не заявляем. Для пилота предлагаем двадцать пользователей, три сценария и две недели. Измеряем время до выбора, полезность и ошибки ограничений. Партнёрские размещения должны быть обозначены и не смогут отменять ограничения маршрута.</a:t>
             </a:r>
           </a:p>
         </p:txBody>
@@ -665,13 +665,13 @@
           <a:lstStyle/>
           <a:p>
             <a:r>
-              <a:t>35 секунд</a:t>
+              <a:t>30 секунд</a:t>
             </a:r>
           </a:p>
           <a:p/>
           <a:p>
             <a:r>
-              <a:t>Мы не пытаемся скрыть границы прототипа. Сейчас данные покрывают пять районов, а пешее время оценивается по расстоянию с коэффициентом обхода. Следующий технический шаг — пешеходный граф с реальными входами и переходами. Следующий шаг по данным — проверенные описания и расписания от партнёров. Живую модель проверили на трёх сценариях; впереди оценка полезности с настоящими пользователями. После этого имеет смысл добавлять события и улучшать маршруты, опираясь на реальные отзывы.</a:t>
+              <a:t>Сейчас есть пять районов и приблизительное время ходьбы. Следующий технический шаг — пешеходный граф с входами, переходами и барьерами. Следующий продуктовый шаг — наблюдать, как три–пять человек решают задачи в прототипе. Протокол уже готов; результаты ещё не получены. Затем проверим спрос и расширим местные факты. Новые функции будем выбирать по этим наблюдениям.</a:t>
             </a:r>
           </a:p>
         </p:txBody>
@@ -741,13 +741,13 @@
           <a:lstStyle/>
           <a:p>
             <a:r>
-              <a:t>25 секунд</a:t>
+              <a:t>20 секунд</a:t>
             </a:r>
           </a:p>
           <a:p/>
           <a:p>
             <a:r>
-              <a:t>Qadam превращает свободный час в понятный небольшой план. Его сила — в сочетании реальных мест, выполнимого бюджета времени и честного объяснения того, что известно, а что нет. У нас готов рабочий интерфейс, автоматизированный сбор, тесты и воспроизводимое демо. Мы хотим проверить эту пользу на одном районе вместе с реальными пользователями и локальными партнёрами. Спасибо! Готовы показать любой из сценариев и ответить на вопросы.</a:t>
+              <a:t>Qadam превращает свободный час в небольшой понятный план. Пользователь видит реальные места, ограничения и возможность изменить решение. Работают сбор данных, интерфейс, генерация и проверки. Следующий шаг — испытать эту пользу с людьми. Спасибо! Готовы показать любой сценарий.</a:t>
             </a:r>
           </a:p>
         </p:txBody>
@@ -817,13 +817,13 @@
           <a:lstStyle/>
           <a:p>
             <a:r>
-              <a:t>30 секунд</a:t>
+              <a:t>25 секунд</a:t>
             </a:r>
           </a:p>
           <a:p/>
           <a:p>
             <a:r>
-              <a:t>В этой задаче недостаточно назвать популярный парк или музей. Пользователь спрашивает: что подходит именно сейчас, рядом со мной и под мой запас времени? Родителю важен формат прогулки, туристу — расстояние, человеку с ноутбуком — розетка. Но данных о розетке может вообще не быть. Мы решили соединить поиск, проверку ограничений и короткое объяснение, а отсутствие данных сделать видимым.</a:t>
+              <a:t>Недостаточно назвать популярный парк. Пользователь спрашивает: что подходит рядом со мной и под мой запас времени? Родителю важен формат прогулки, туристу — расстояние, человеку с ноутбуком — розетка. Но данных о розетке может не быть. Мы соединяем поиск, проверку условий и короткое объяснение, а неизвестное оставляем видимым.</a:t>
             </a:r>
           </a:p>
         </p:txBody>
@@ -893,13 +893,13 @@
           <a:lstStyle/>
           <a:p>
             <a:r>
-              <a:t>35 секунд</a:t>
+              <a:t>30 секунд</a:t>
             </a:r>
           </a:p>
           <a:p/>
           <a:p>
             <a:r>
-              <a:t>Так выглядит рабочий прототип. Слева задаём старт, свободное время и интересы. Справа видим карту, до трёх рекомендаций и компактный маршрут. У каждого места есть причина выбора, оценка прогулки и посещения, отдельная идея действия и ссылка на источник. Есть английский, русский и казахский интерфейс. Геолокация необязательна: можно выбрать знакомый ориентир, ничего не разрешая браузеру.</a:t>
+              <a:t>Это рабочий прототип. Задаём старт, время и желание. Получаем один маршрут: карточки, карта и экспорт показывают те же остановки и длительность. На телефоне маршрут виден первым, подробные предпочтения раскрываются по необходимости. Демо использует явно обозначенное время; режим «Сейчас» берёт текущие часы. Интерфейс работает на английском, русском и казахском. Геолокация необязательна.</a:t>
             </a:r>
           </a:p>
         </p:txBody>
@@ -969,13 +969,13 @@
           <a:lstStyle/>
           <a:p>
             <a:r>
-              <a:t>55 секунд</a:t>
+              <a:t>60 секунд</a:t>
             </a:r>
           </a:p>
           <a:p/>
           <a:p>
             <a:r>
-              <a:t>Переключимся на демо и нажмём «Час рядом с EXPO». Система находит три разных варианта и предлагает маршрут с короткой паузой и общественной аллеей: примерно тридцать одну минуту на ходьбу и двадцать на короткие остановки. Вместе — пятьдесят одна минута, включая возвращение. Обратите внимание: сады кампуса NU исключены после проверки правил доступа. Место на карте ещё не означает свободный вход. Теперь выберем тихое кафе с розеткой. Мы увидим кафе, но также предупреждение: розетки и тишина не подтверждены. И наконец уменьшим время: если ничего не подходит, система честно покажет пустой результат. Вернёмся к слайдам.</a:t>
+              <a:t>Покажем «Час рядом с EXPO» в режиме демо. Получаем две остановки: короткую паузу и общественную аллею. Примерно тридцать одна минута на ходьбу и двадцать на посещения, вместе пятьдесят одна, включая возвращение. Закрепим аллею и заменим кафе: видно, что изменилось, и можно отменить. Теперь введём «не хочу кофе, только парк». В интерпретации появился отказ, кафе исчезло. Сады кампуса не предлагаются из-за ограничений доступа. Это приблизительный план прогулки, а не проверенная пешеходная навигация. Вернёмся к слайдам.</a:t>
             </a:r>
           </a:p>
         </p:txBody>
@@ -1045,13 +1045,13 @@
           <a:lstStyle/>
           <a:p>
             <a:r>
-              <a:t>35 секунд</a:t>
+              <a:t>30 секунд</a:t>
             </a:r>
           </a:p>
           <a:p/>
           <a:p>
             <a:r>
-              <a:t>Важное требование трека — собрать данные автоматически. Наш скрипт получает открытые данные OpenStreetMap, фильтрует категории и удаляет дубликаты. В снимке триста именованных мест в пяти районах. У ста двух есть часы работы, у двадцати шести — тег доступности. Краткие описания карты собраны из тегов. Отдельно добавлен двадцать один факт об одиннадцати местах из официальных источников. Так мы обнаружили закрытие музея по понедельникам и ограничения входа в кампус. Мы сохраняем происхождение каждой записи и можем воспроизвести обработку без интернета. Дата скачивания не выдаётся за дату проверки заведения.</a:t>
+              <a:t>Сбор данных автоматизирован. Скрипт получает OpenStreetMap, фильтрует категории и удаляет дубликаты. В снимке триста мест в пяти районах. У ста двух есть часы, у двадцати шести — тег доступности. Отдельный слой обогащает четырнадцать записей: двадцать пять фактов о тринадцати местах и ограничения доступа. Первичные источники уточнили понедельник в музее и вход в кампус. Дата исследования не означает проверку на месте.</a:t>
             </a:r>
           </a:p>
         </p:txBody>
@@ -1121,13 +1121,13 @@
           <a:lstStyle/>
           <a:p>
             <a:r>
-              <a:t>40 секунд</a:t>
+              <a:t>35 секунд</a:t>
             </a:r>
           </a:p>
           <a:p/>
           <a:p>
             <a:r>
-              <a:t>Наш RAG начинается с реальных документов POI. Поиск сочетает BM25 и небольшой многоязычный словарь намерений. Затем строгие проверки исключают слишком далёкие места, неподходящие категории и визиты, которые не укладываются в известное расписание. Затем Gemini пишет короткое объяснение, занятие и маленькую миссию по найденным фактам, настроению и интересам компании. Код проверяет места, принадлежность цитат и типичные неподтверждённые обещания. Для внешнего осмотра Байтерека недоступны факты о внутренних экспонатах. Но это не доказательство каждой фразы: исходные факты показаны отдельно. Живой вызов проверен локально и на размещённом демо. При ошибке провайдера остаётся честно обозначенный шаблонный режим.</a:t>
+              <a:t>Поиск сочетает BM25 и многоязычные понятия. Проверки учитывают расстояние, длительность, расписание и отказ от категорий. Gemini получает только выбранные места, факты и ограниченный контекст. Он пишет объяснение, занятие и небольшую миссию. Проверяем ID мест, цитаты и распространённые неподтверждённые обещания. Но это не доказательство каждого предложения. Факты и правила показаны отдельно, а при ошибке остаётся обозначенный шаблонный режим.</a:t>
             </a:r>
           </a:p>
         </p:txBody>
@@ -1197,13 +1197,13 @@
           <a:lstStyle/>
           <a:p>
             <a:r>
-              <a:t>30 секунд</a:t>
+              <a:t>35 секунд</a:t>
             </a:r>
           </a:p>
           <a:p/>
           <a:p>
             <a:r>
-              <a:t>Представьте троих друзей: одному нужен кофе, другому природа, третьему достопримечательность. Маршрут показывает, что учтены все три интереса. Если начинается дождь, план Б пересчитывает маршрут и честно показывает, чей интерес больше не помещается. Остальные ограничения сохраняются. Можно сравнить вариант на пятнадцать минут короче и вернуть исходный план. А маленькие миссии превращают остановки в наблюдения и разговоры.</a:t>
+              <a:t>Маршрут можно уточнить без повторного заполнения формы. Закрепляем аллею, заменяем кафе, видим новое время. Удаление оставляет свободное место, отмена возвращает предыдущий вариант. Закреплённая остановка не может обойти дождь или закрытие: система объяснит конфликт. Для компании показываем, чьи интересы учтены. Если условия меняются, можно сравнить план Б и вернуть исходный. Отказ от кофе тоже учитывается: запрос «не хочу кофе, только парк» исключает кафе.</a:t>
             </a:r>
           </a:p>
         </p:txBody>
@@ -1273,13 +1273,13 @@
           <a:lstStyle/>
           <a:p>
             <a:r>
-              <a:t>35 секунд</a:t>
+              <a:t>30 секунд</a:t>
             </a:r>
           </a:p>
           <a:p/>
           <a:p>
             <a:r>
-              <a:t>На этом экране видно нашу главную продуктовую особенность: отсутствие сведений не превращается в уверенное обещание. Мы разделяем факты из POI и предложенные действия. Тег доступности заведения не означает проверенный маршрут без ступеней. Точные координаты остаются в памяти браузера, история местоположения не сохраняется. Для карты не нужны сторонние тайлы. В опциональный запрос Gemini уходят только публичные места и несколько флагов предпочтений. При этом мы честно отмечаем, что инфраструктура провайдеров может обрабатывать сетевые метаданные.</a:t>
+              <a:t>Отсутствие данных не превращается в уверенное обещание. Розетки и тишина здесь неизвестны. Тег доступности заведения не означает проверенный путь без ступеней. Точные координаты, исходный запрос и история редактирования остаются в браузере. Карта не обращается к сторонним тайлам. В Gemini уходят публичные места и нормализованные предпочтения. Сетевые метаданные при этом могут обрабатываться инфраструктурой провайдера.</a:t>
             </a:r>
           </a:p>
         </p:txBody>
@@ -1349,13 +1349,13 @@
           <a:lstStyle/>
           <a:p>
             <a:r>
-              <a:t>30 секунд</a:t>
+              <a:t>25 секунд</a:t>
             </a:r>
           </a:p>
           <a:p/>
           <a:p>
             <a:r>
-              <a:t>Мы проверили не только удачный сценарий. Есть сорок семь тестов движка, API и собранного Worker, сто шестьдесят комбинаций контекста, двенадцать приёмочных сценариев и двадцать семь проверок браузера. Среди них — закрытие заведения во время визита, слишком короткий бюджет, отсутствие данных, неверные ответы модели, мобильная вёрстка и отсутствие отправки координат. Это инженерные проверки прототипа. Они не означают, что мы уже измерили удовлетворённость реальных пользователей или качество живой модели.</a:t>
+              <a:t>Проходят пятьдесят семь тестов кода, семнадцать приёмочных сценариев и сорок восемь браузерных проверок. Проверили сто шестьдесят сочетаний ограничений и ещё сто сочетаний согласованности карточек с маршрутом. Живой музейный запрос один раз перешёл на шаблон, а повторная проверка прошла: оба результата сохранены. Это инженерная проверка, не пользовательское исследование.</a:t>
             </a:r>
           </a:p>
         </p:txBody>
@@ -8648,7 +8648,7 @@
         <p:spPr>
           <a:xfrm>
             <a:off x="533400" y="2057400"/>
-            <a:ext cx="7162800" cy="2541394"/>
+            <a:ext cx="7162800" cy="2533831"/>
           </a:xfrm>
           <a:prstGeom prst="rect">
             <a:avLst/>
@@ -8672,7 +8672,7 @@
         <p:spPr>
           <a:xfrm>
             <a:off x="533400" y="4991100"/>
-            <a:ext cx="6539626" cy="1104900"/>
+            <a:ext cx="5154385" cy="1104900"/>
           </a:xfrm>
           <a:prstGeom prst="rect">
             <a:avLst/>
@@ -9408,7 +9408,7 @@
         <p:spPr>
           <a:xfrm>
             <a:off x="533400" y="3314700"/>
-            <a:ext cx="6477000" cy="2298069"/>
+            <a:ext cx="6477000" cy="2291230"/>
           </a:xfrm>
           <a:prstGeom prst="rect">
             <a:avLst/>
@@ -9566,7 +9566,7 @@
               </a:defRPr>
             </a:pPr>
             <a:r>
-              <a:t>Сады кампуса исключены: нужен</a:t>
+              <a:t>Закрепить · заменить · удалить ·</a:t>
             </a:r>
           </a:p>
           <a:p>
@@ -9588,7 +9588,7 @@
               </a:defRPr>
             </a:pPr>
             <a:r>
-              <a:t>доступ.</a:t>
+              <a:t>отменить.</a:t>
             </a:r>
           </a:p>
         </p:txBody>
@@ -10166,7 +10166,7 @@
               </a:defRPr>
             </a:pPr>
             <a:r>
-              <a:t>21</a:t>
+              <a:t>25</a:t>
             </a:r>
           </a:p>
         </p:txBody>
@@ -10211,7 +10211,7 @@
               </a:defRPr>
             </a:pPr>
             <a:r>
-              <a:t>дополнительный факт</a:t>
+              <a:t>фактов из источников</a:t>
             </a:r>
           </a:p>
         </p:txBody>
@@ -10301,7 +10301,7 @@
               </a:defRPr>
             </a:pPr>
             <a:r>
-              <a:t>11</a:t>
+              <a:t>14</a:t>
             </a:r>
           </a:p>
         </p:txBody>
@@ -10436,7 +10436,7 @@
               </a:defRPr>
             </a:pPr>
             <a:r>
-              <a:t>5 районов · 102 записи с часами · 26 тегов доступности.</a:t>
+              <a:t>5 районов · 102 записи с часами · 26 тегов доступности. 25 фактов о 13 местах.</a:t>
             </a:r>
           </a:p>
           <a:p>
@@ -12106,7 +12106,7 @@
               </a:defRPr>
             </a:pPr>
             <a:r>
-              <a:t>07 / УНИКАЛЬНЫЕ СЦЕНАРИИ</a:t>
+              <a:t>07 / КОНТРОЛЬ И КОНТЕКСТ</a:t>
             </a:r>
           </a:p>
         </p:txBody>
@@ -12151,7 +12151,7 @@
               </a:defRPr>
             </a:pPr>
             <a:r>
-              <a:t>Разные интересы. Один общий маршрут.</a:t>
+              <a:t>Маршрут, который можно изменить.</a:t>
             </a:r>
           </a:p>
         </p:txBody>
@@ -12248,7 +12248,7 @@
       </p:sp>
       <p:pic>
         <p:nvPicPr>
-          <p:cNvPr id="8" name="Picture 7" descr="group.png"/>
+          <p:cNvPr id="8" name="Picture 7" descr="editing.png"/>
           <p:cNvPicPr>
             <a:picLocks noChangeAspect="1"/>
           </p:cNvPicPr>
@@ -12263,7 +12263,7 @@
         <p:spPr>
           <a:xfrm>
             <a:off x="533400" y="2133600"/>
-            <a:ext cx="6477000" cy="1231108"/>
+            <a:ext cx="6553200" cy="1411671"/>
           </a:xfrm>
           <a:prstGeom prst="rect">
             <a:avLst/>
@@ -12272,7 +12272,7 @@
       </p:pic>
       <p:pic>
         <p:nvPicPr>
-          <p:cNvPr id="9" name="Picture 8" descr="backup.png"/>
+          <p:cNvPr id="9" name="Picture 8" descr="group.png"/>
           <p:cNvPicPr>
             <a:picLocks noChangeAspect="1"/>
           </p:cNvPicPr>
@@ -12286,8 +12286,8 @@
         </p:blipFill>
         <p:spPr>
           <a:xfrm>
-            <a:off x="533400" y="3848100"/>
-            <a:ext cx="6477000" cy="2147600"/>
+            <a:off x="533400" y="4648200"/>
+            <a:ext cx="6553200" cy="1238672"/>
           </a:xfrm>
           <a:prstGeom prst="rect">
             <a:avLst/>
@@ -12302,31 +12302,31 @@
         </p:nvSpPr>
         <p:spPr>
           <a:xfrm>
-            <a:off x="7429500" y="2209800"/>
-            <a:ext cx="4114800" cy="423062"/>
-          </a:xfrm>
-          <a:prstGeom prst="rect">
-            <a:avLst/>
-          </a:prstGeom>
-          <a:noFill/>
-        </p:spPr>
-        <p:txBody>
-          <a:bodyPr wrap="none" lIns="0" rIns="0" tIns="0" bIns="0">
-            <a:spAutoFit/>
-          </a:bodyPr>
-          <a:lstStyle/>
-          <a:p>
-            <a:pPr>
-              <a:lnSpc>
-                <a:spcPts val="2611"/>
-              </a:lnSpc>
-              <a:spcBef>
-                <a:spcPts val="0"/>
-              </a:spcBef>
-              <a:spcAft>
-                <a:spcPts val="0"/>
-              </a:spcAft>
-              <a:defRPr sz="2039" b="0">
+            <a:off x="7429500" y="2171700"/>
+            <a:ext cx="3962400" cy="432816"/>
+          </a:xfrm>
+          <a:prstGeom prst="rect">
+            <a:avLst/>
+          </a:prstGeom>
+          <a:noFill/>
+        </p:spPr>
+        <p:txBody>
+          <a:bodyPr wrap="none" lIns="0" rIns="0" tIns="0" bIns="0">
+            <a:spAutoFit/>
+          </a:bodyPr>
+          <a:lstStyle/>
+          <a:p>
+            <a:pPr>
+              <a:lnSpc>
+                <a:spcPts val="2688"/>
+              </a:lnSpc>
+              <a:spcBef>
+                <a:spcPts val="0"/>
+              </a:spcBef>
+              <a:spcAft>
+                <a:spcPts val="0"/>
+              </a:spcAft>
+              <a:defRPr sz="2100" b="0">
                 <a:solidFill>
                   <a:srgbClr val="203E36"/>
                 </a:solidFill>
@@ -12334,7 +12334,7 @@
               </a:defRPr>
             </a:pPr>
             <a:r>
-              <a:t>Для компании из 2–5 человек</a:t>
+              <a:t>Оставить важное</a:t>
             </a:r>
           </a:p>
         </p:txBody>
@@ -12347,8 +12347,8 @@
         </p:nvSpPr>
         <p:spPr>
           <a:xfrm>
-            <a:off x="7429500" y="2667000"/>
-            <a:ext cx="3962400" cy="618134"/>
+            <a:off x="7429500" y="2628900"/>
+            <a:ext cx="3962400" cy="881481"/>
           </a:xfrm>
           <a:prstGeom prst="rect">
             <a:avLst/>
@@ -12379,7 +12379,7 @@
               </a:defRPr>
             </a:pPr>
             <a:r>
-              <a:t>Показываем, чьи интересы вошли в</a:t>
+              <a:t>Закрепить остановку. Заменить</a:t>
             </a:r>
           </a:p>
           <a:p>
@@ -12401,7 +12401,29 @@
               </a:defRPr>
             </a:pPr>
             <a:r>
-              <a:t>маршрут и где остался компромисс.</a:t>
+              <a:t>соседнюю. Увидеть изменение</a:t>
+            </a:r>
+          </a:p>
+          <a:p>
+            <a:pPr>
+              <a:lnSpc>
+                <a:spcPts val="2073"/>
+              </a:lnSpc>
+              <a:spcBef>
+                <a:spcPts val="0"/>
+              </a:spcBef>
+              <a:spcAft>
+                <a:spcPts val="0"/>
+              </a:spcAft>
+              <a:defRPr sz="1620" b="0">
+                <a:solidFill>
+                  <a:srgbClr val="687768"/>
+                </a:solidFill>
+                <a:latin typeface="Noto Sans"/>
+              </a:defRPr>
+            </a:pPr>
+            <a:r>
+              <a:t>времени и отменить.</a:t>
             </a:r>
           </a:p>
         </p:txBody>
@@ -12415,30 +12437,30 @@
         <p:spPr>
           <a:xfrm>
             <a:off x="7429500" y="3695700"/>
-            <a:ext cx="4114800" cy="423062"/>
-          </a:xfrm>
-          <a:prstGeom prst="rect">
-            <a:avLst/>
-          </a:prstGeom>
-          <a:noFill/>
-        </p:spPr>
-        <p:txBody>
-          <a:bodyPr wrap="none" lIns="0" rIns="0" tIns="0" bIns="0">
-            <a:spAutoFit/>
-          </a:bodyPr>
-          <a:lstStyle/>
-          <a:p>
-            <a:pPr>
-              <a:lnSpc>
-                <a:spcPts val="2611"/>
-              </a:lnSpc>
-              <a:spcBef>
-                <a:spcPts val="0"/>
-              </a:spcBef>
-              <a:spcAft>
-                <a:spcPts val="0"/>
-              </a:spcAft>
-              <a:defRPr sz="2039" b="0">
+            <a:ext cx="3962400" cy="432816"/>
+          </a:xfrm>
+          <a:prstGeom prst="rect">
+            <a:avLst/>
+          </a:prstGeom>
+          <a:noFill/>
+        </p:spPr>
+        <p:txBody>
+          <a:bodyPr wrap="none" lIns="0" rIns="0" tIns="0" bIns="0">
+            <a:spAutoFit/>
+          </a:bodyPr>
+          <a:lstStyle/>
+          <a:p>
+            <a:pPr>
+              <a:lnSpc>
+                <a:spcPts val="2688"/>
+              </a:lnSpc>
+              <a:spcBef>
+                <a:spcPts val="0"/>
+              </a:spcBef>
+              <a:spcAft>
+                <a:spcPts val="0"/>
+              </a:spcAft>
+              <a:defRPr sz="2100" b="0">
                 <a:solidFill>
                   <a:srgbClr val="203E36"/>
                 </a:solidFill>
@@ -12446,7 +12468,7 @@
               </a:defRPr>
             </a:pPr>
             <a:r>
-              <a:t>План Б — без потери условий</a:t>
+              <a:t>Учесть компанию</a:t>
             </a:r>
           </a:p>
         </p:txBody>
@@ -12491,7 +12513,7 @@
               </a:defRPr>
             </a:pPr>
             <a:r>
-              <a:t>Дождь или меньше времени:</a:t>
+              <a:t>2–5 интересов, видимый компромисс</a:t>
             </a:r>
           </a:p>
           <a:p>
@@ -12513,7 +12535,7 @@
               </a:defRPr>
             </a:pPr>
             <a:r>
-              <a:t>сравнить, применить и вернуть</a:t>
+              <a:t>и план Б на дождь или меньше</a:t>
             </a:r>
           </a:p>
           <a:p>
@@ -12535,7 +12557,7 @@
               </a:defRPr>
             </a:pPr>
             <a:r>
-              <a:t>исходный план.</a:t>
+              <a:t>времени.</a:t>
             </a:r>
           </a:p>
         </p:txBody>
@@ -12548,31 +12570,31 @@
         </p:nvSpPr>
         <p:spPr>
           <a:xfrm>
-            <a:off x="7429500" y="5067300"/>
-            <a:ext cx="4114800" cy="374294"/>
-          </a:xfrm>
-          <a:prstGeom prst="rect">
-            <a:avLst/>
-          </a:prstGeom>
-          <a:noFill/>
-        </p:spPr>
-        <p:txBody>
-          <a:bodyPr wrap="none" lIns="0" rIns="0" tIns="0" bIns="0">
-            <a:spAutoFit/>
-          </a:bodyPr>
-          <a:lstStyle/>
-          <a:p>
-            <a:pPr>
-              <a:lnSpc>
-                <a:spcPts val="2227"/>
-              </a:lnSpc>
-              <a:spcBef>
-                <a:spcPts val="0"/>
-              </a:spcBef>
-              <a:spcAft>
-                <a:spcPts val="0"/>
-              </a:spcAft>
-              <a:defRPr sz="1739" b="0">
+            <a:off x="7429500" y="5219700"/>
+            <a:ext cx="3962400" cy="432816"/>
+          </a:xfrm>
+          <a:prstGeom prst="rect">
+            <a:avLst/>
+          </a:prstGeom>
+          <a:noFill/>
+        </p:spPr>
+        <p:txBody>
+          <a:bodyPr wrap="none" lIns="0" rIns="0" tIns="0" bIns="0">
+            <a:spAutoFit/>
+          </a:bodyPr>
+          <a:lstStyle/>
+          <a:p>
+            <a:pPr>
+              <a:lnSpc>
+                <a:spcPts val="2688"/>
+              </a:lnSpc>
+              <a:spcBef>
+                <a:spcPts val="0"/>
+              </a:spcBef>
+              <a:spcAft>
+                <a:spcPts val="0"/>
+              </a:spcAft>
+              <a:defRPr sz="2100" b="0">
                 <a:solidFill>
                   <a:srgbClr val="203E36"/>
                 </a:solidFill>
@@ -12580,7 +12602,7 @@
               </a:defRPr>
             </a:pPr>
             <a:r>
-              <a:t>Маленькая миссия открытия</a:t>
+              <a:t>Учитывать отказ</a:t>
             </a:r>
           </a:p>
         </p:txBody>
@@ -12593,31 +12615,31 @@
         </p:nvSpPr>
         <p:spPr>
           <a:xfrm>
-            <a:off x="7429500" y="5448300"/>
-            <a:ext cx="3962400" cy="315772"/>
-          </a:xfrm>
-          <a:prstGeom prst="rect">
-            <a:avLst/>
-          </a:prstGeom>
-          <a:noFill/>
-        </p:spPr>
-        <p:txBody>
-          <a:bodyPr wrap="none" lIns="0" rIns="0" tIns="0" bIns="0">
-            <a:spAutoFit/>
-          </a:bodyPr>
-          <a:lstStyle/>
-          <a:p>
-            <a:pPr>
-              <a:lnSpc>
-                <a:spcPts val="1766"/>
-              </a:lnSpc>
-              <a:spcBef>
-                <a:spcPts val="0"/>
-              </a:spcBef>
-              <a:spcAft>
-                <a:spcPts val="0"/>
-              </a:spcAft>
-              <a:defRPr sz="1380" b="0">
+            <a:off x="7429500" y="5638800"/>
+            <a:ext cx="3962400" cy="335280"/>
+          </a:xfrm>
+          <a:prstGeom prst="rect">
+            <a:avLst/>
+          </a:prstGeom>
+          <a:noFill/>
+        </p:spPr>
+        <p:txBody>
+          <a:bodyPr wrap="none" lIns="0" rIns="0" tIns="0" bIns="0">
+            <a:spAutoFit/>
+          </a:bodyPr>
+          <a:lstStyle/>
+          <a:p>
+            <a:pPr>
+              <a:lnSpc>
+                <a:spcPts val="1920"/>
+              </a:lnSpc>
+              <a:spcBef>
+                <a:spcPts val="0"/>
+              </a:spcBef>
+              <a:spcAft>
+                <a:spcPts val="0"/>
+              </a:spcAft>
+              <a:defRPr sz="1500" b="0">
                 <a:solidFill>
                   <a:srgbClr val="687768"/>
                 </a:solidFill>
@@ -12625,7 +12647,7 @@
               </a:defRPr>
             </a:pPr>
             <a:r>
-              <a:t>Наблюдение или вопрос о конкретном месте.</a:t>
+              <a:t>«Не хочу кофе, только парк» — без кафе.</a:t>
             </a:r>
           </a:p>
         </p:txBody>
@@ -12776,7 +12798,7 @@
               </a:defRPr>
             </a:pPr>
             <a:r>
-              <a:t>07 / ЭТИКА И ПРИВАТНОСТЬ</a:t>
+              <a:t>08 / ЭТИКА И ПРИВАТНОСТЬ</a:t>
             </a:r>
           </a:p>
         </p:txBody>
@@ -12933,7 +12955,7 @@
         <p:spPr>
           <a:xfrm>
             <a:off x="533400" y="2133600"/>
-            <a:ext cx="6400800" cy="2926659"/>
+            <a:ext cx="6400800" cy="2460286"/>
           </a:xfrm>
           <a:prstGeom prst="rect">
             <a:avLst/>
@@ -13602,7 +13624,7 @@
               </a:defRPr>
             </a:pPr>
             <a:r>
-              <a:t>47</a:t>
+              <a:t>57</a:t>
             </a:r>
           </a:p>
         </p:txBody>
@@ -13872,7 +13894,7 @@
               </a:defRPr>
             </a:pPr>
             <a:r>
-              <a:t>12 / 12</a:t>
+              <a:t>17 / 17</a:t>
             </a:r>
           </a:p>
         </p:txBody>
@@ -14007,7 +14029,7 @@
               </a:defRPr>
             </a:pPr>
             <a:r>
-              <a:t>27 / 27</a:t>
+              <a:t>48 / 48</a:t>
             </a:r>
           </a:p>
         </p:txBody>
@@ -14097,7 +14119,7 @@
               </a:defRPr>
             </a:pPr>
             <a:r>
-              <a:t>Включая пустую выдачу, закрытие во время визита, приватность, мобильный экран и неверный ответ модели.</a:t>
+              <a:t>Ещё 100 сочетаний: карточки, карта и время относятся к одному маршруту. Пользовательский пилот впереди.</a:t>
             </a:r>
           </a:p>
         </p:txBody>

--- a/presentation/Qadam_ArcSolo_pitch_RU.pptx
+++ b/presentation/Qadam_ArcSolo_pitch_RU.pptx
@@ -671,7 +671,7 @@
           <a:p/>
           <a:p>
             <a:r>
-              <a:t>Сейчас есть пять районов и приблизительное время ходьбы. Следующий технический шаг — пешеходный граф с входами, переходами и барьерами. Следующий продуктовый шаг — наблюдать, как три–пять человек решают задачи в прототипе. Протокол уже готов; результаты ещё не получены. Затем проверим спрос и расширим местные факты. Новые функции будем выбирать по этим наблюдениям.</a:t>
+              <a:t>Следующие задачи опираются на конкретные пробелы. Проверка сложных запросов обнаружила ошибки составной длительности и точного отказа от категории. Исправим их и расширим независимые примеры. Затем добавим пешеходные пути с входами и переходами и тематические истории по источникам. Пользовательские сессии пока отложены. Инженерные проверки позволяют двигаться дальше, но не доказывают спрос или удобство для людей.</a:t>
             </a:r>
           </a:p>
         </p:txBody>
@@ -747,7 +747,7 @@
           <a:p/>
           <a:p>
             <a:r>
-              <a:t>Qadam превращает свободный час в небольшой понятный план. Пользователь видит реальные места, ограничения и возможность изменить решение. Работают сбор данных, интерфейс, генерация и проверки. Следующий шаг — испытать эту пользу с людьми. Спасибо! Готовы показать любой сценарий.</a:t>
+              <a:t>Qadam превращает свободный час в небольшой понятный план. Пользователь видит реальные места, ограничения и возможность изменить решение. Работают сбор данных, интерфейс, генерация и проверки. Мы продолжаем улучшать понимание запросов и маршруты. Спасибо! Готовы показать любой сценарий.</a:t>
             </a:r>
           </a:p>
         </p:txBody>
@@ -6692,7 +6692,7 @@
               </a:defRPr>
             </a:pPr>
             <a:r>
-              <a:t>Пока нет пользовательского пилота</a:t>
+              <a:t>Языковые крайние случаи</a:t>
             </a:r>
           </a:p>
         </p:txBody>
@@ -6782,7 +6782,7 @@
               </a:defRPr>
             </a:pPr>
             <a:r>
-              <a:t>Наблюдения, обратная связь и проверка спроса.</a:t>
+              <a:t>Уточнить длительность, отказ и контекст.</a:t>
             </a:r>
           </a:p>
         </p:txBody>
@@ -6827,7 +6827,7 @@
               </a:defRPr>
             </a:pPr>
             <a:r>
-              <a:t>Дальше: события, пешеходный граф, независимая проверка доступности.</a:t>
+              <a:t>Дальше: точнее понимать запрос, строить пути и связывать места в истории.</a:t>
             </a:r>
           </a:p>
         </p:txBody>
@@ -7247,7 +7247,7 @@
               </a:defRPr>
             </a:pPr>
             <a:r>
-              <a:t>Следующий шаг — пилот с реальными пользователями.</a:t>
+              <a:t>Дальше — точные запросы, пешеходные пути и истории.</a:t>
             </a:r>
           </a:p>
         </p:txBody>
@@ -7337,7 +7337,7 @@
               </a:defRPr>
             </a:pPr>
             <a:r>
-              <a:t>Репозиторий и hosted-демо пока приватные: для жюри нужен доступ или архив.</a:t>
+              <a:t>Код открыт на GitHub. Размещённое демо приватное; доступны локальный запуск и видео.</a:t>
             </a:r>
           </a:p>
         </p:txBody>

--- a/presentation/Qadam_ArcSolo_pitch_RU.pptx
+++ b/presentation/Qadam_ArcSolo_pitch_RU.pptx
@@ -671,7 +671,7 @@
           <a:p/>
           <a:p>
             <a:r>
-              <a:t>Следующие задачи опираются на конкретные пробелы. Проверка сложных запросов обнаружила ошибки составной длительности и точного отказа от категории. Исправим их и расширим независимые примеры. Затем добавим пешеходные пути с входами и переходами и тематические истории по источникам. Пользовательские сессии пока отложены. Инженерные проверки позволяют двигаться дальше, но не доказывают спрос или удобство для людей.</a:t>
+              <a:t>Все пять запланированных улучшений работают: точнее понимаем время и отказ, строим пешеходные пути в EXPO, связываем места в истории, предлагаем проверенный выход из пустого результата и учитываем срок возвращения с запасом. Но сеть пока покрывает один район, входы не проверены на месте, а понимание языка остаётся эвристическим. Дальше нужны расширение графа, обновление источников и проверка казахского. Пользовательские сессии отложены; спрос и удобство пока не доказаны.</a:t>
             </a:r>
           </a:p>
         </p:txBody>
@@ -747,7 +747,7 @@
           <a:p/>
           <a:p>
             <a:r>
-              <a:t>Qadam превращает свободный час в небольшой понятный план. Пользователь видит реальные места, ограничения и возможность изменить решение. Работают сбор данных, интерфейс, генерация и проверки. Мы продолжаем улучшать понимание запросов и маршруты. Спасибо! Готовы показать любой сценарий.</a:t>
+              <a:t>Qadam превращает свободный час в небольшой понятный план. Пользователь видит реальные места, ограничения и возможность изменить решение. Работают сбор данных, интерфейс, генерация и проверки. Уже работают истории, пути в EXPO, восстановление плана и возврат с запасом. Спасибо! Готовы показать любой сценарий.</a:t>
             </a:r>
           </a:p>
         </p:txBody>
@@ -975,7 +975,7 @@
           <a:p/>
           <a:p>
             <a:r>
-              <a:t>Покажем «Час рядом с EXPO» в режиме демо. Получаем две остановки: короткую паузу и общественную аллею. Примерно тридцать одна минута на ходьбу и двадцать на посещения, вместе пятьдесят одна, включая возвращение. Закрепим аллею и заменим кафе: видно, что изменилось, и можно отменить. Теперь введём «не хочу кофе, только парк». В интерпретации появился отказ, кафе исчезло. Сады кампуса не предлагаются из-за ограничений доступа. Это приблизительный план прогулки, а не проверенная пешеходная навигация. Вернёмся к слайдам.</a:t>
+              <a:t>Покажем час возле EXPO. Две остановки занимают примерно пятьдесят три минуты, включая возвращение. Сплошная линия следует связным пешеходным путям OSM, пунктир — примерным соединениям. Добавим возвращение к пятнадцати часам и пять минут запаса: маршрут ещё помещается, это видно в расписании. Затем выберем историю EXPO с двумя часами и пределом перехода тридцать минут. Главы связаны источниками и вопросами для наблюдения. Уменьшим время: история станет неполной, а система предложит уже проверенное увеличение времени. Применяем его — обе главы снова в плане. Текущее состояние входов всё равно требует проверки.</a:t>
             </a:r>
           </a:p>
         </p:txBody>
@@ -1203,7 +1203,7 @@
           <a:p/>
           <a:p>
             <a:r>
-              <a:t>Маршрут можно уточнить без повторного заполнения формы. Закрепляем аллею, заменяем кафе, видим новое время. Удаление оставляет свободное место, отмена возвращает предыдущий вариант. Закреплённая остановка не может обойти дождь или закрытие: система объяснит конфликт. Для компании показываем, чьи интересы учтены. Если условия меняются, можно сравнить план Б и вернуть исходный. Отказ от кофе тоже учитывается: запрос «не хочу кофе, только парк» исключает кафе.</a:t>
+              <a:t>Мы добавили три короткие истории, а не просто ещё один список мест. У каждой главы есть вопрос, первоисточник и условия посещения. Когда одна остановка не вписывается, приложение честно показывает часть истории. Альтернатива предварительно рассчитана тем же планировщиком и не снимает ограничения доступа или ходьбы. Дедлайн включает возвращение, а запас вычитается до планирования. Можно закреплять и менять места, учитывать компанию и сравнивать план на дождь.</a:t>
             </a:r>
           </a:p>
         </p:txBody>
@@ -1355,7 +1355,7 @@
           <a:p/>
           <a:p>
             <a:r>
-              <a:t>Проходят пятьдесят семь тестов кода, семнадцать приёмочных сценариев и сорок восемь браузерных проверок. Проверили сто шестьдесят сочетаний ограничений и ещё сто сочетаний согласованности карточек с маршрутом. Живой музейный запрос один раз перешёл на шаблон, а повторная проверка прошла: оба результата сохранены. Это инженерная проверка, не пользовательское исследование.</a:t>
+              <a:t>Проходят семьдесят пять тестов кода, шесть проверок сборщика графа, двадцать пять приёмочных сценариев и шестьдесят две браузерные проверок. Целевой аудит сложных запросов улучшился с трёх до десяти из десяти; ещё двенадцать перефразировок прошли. Проверены обходы, односторонние пути, разрывы сети, дедлайны и неполные истории. Живой Gemini работает. Это инженерная проверка конкретных примеров, не общая точность и не пользовательское исследование.</a:t>
             </a:r>
           </a:p>
         </p:txBody>
@@ -6310,7 +6310,7 @@
               </a:defRPr>
             </a:pPr>
             <a:r>
-              <a:t>Дорога приблизительная</a:t>
+              <a:t>Граф только в EXPO</a:t>
             </a:r>
           </a:p>
         </p:txBody>
@@ -6400,7 +6400,7 @@
               </a:defRPr>
             </a:pPr>
             <a:r>
-              <a:t>Пешеходный граф: входы, переходы, барьеры.</a:t>
+              <a:t>Проверить входы и расширить на другие районы.</a:t>
             </a:r>
           </a:p>
         </p:txBody>
@@ -6692,7 +6692,7 @@
               </a:defRPr>
             </a:pPr>
             <a:r>
-              <a:t>Языковые крайние случаи</a:t>
+              <a:t>Язык остаётся эвристикой</a:t>
             </a:r>
           </a:p>
         </p:txBody>
@@ -6782,7 +6782,7 @@
               </a:defRPr>
             </a:pPr>
             <a:r>
-              <a:t>Уточнить длительность, отказ и контекст.</a:t>
+              <a:t>Больше примеров и проверка казахского языка.</a:t>
             </a:r>
           </a:p>
         </p:txBody>
@@ -6827,7 +6827,7 @@
               </a:defRPr>
             </a:pPr>
             <a:r>
-              <a:t>Дальше: точнее понимать запрос, строить пути и связывать места в истории.</a:t>
+              <a:t>Все пять улучшений внедрены. Следующий шаг — расширить покрытие и качество данных.</a:t>
             </a:r>
           </a:p>
         </p:txBody>
@@ -7225,7 +7225,7 @@
               </a:defRPr>
             </a:pPr>
             <a:r>
-              <a:t>Личные идеи. Общий маршрут. План Б.</a:t>
+              <a:t>Личные идеи. Истории города. Пешеходные пути.</a:t>
             </a:r>
           </a:p>
           <a:p>
@@ -7247,7 +7247,7 @@
               </a:defRPr>
             </a:pPr>
             <a:r>
-              <a:t>Дальше — точные запросы, пешеходные пути и истории.</a:t>
+              <a:t>План Б и возвращение с запасом.</a:t>
             </a:r>
           </a:p>
         </p:txBody>
@@ -8648,7 +8648,7 @@
         <p:spPr>
           <a:xfrm>
             <a:off x="533400" y="2057400"/>
-            <a:ext cx="7162800" cy="2533831"/>
+            <a:ext cx="7162800" cy="2541394"/>
           </a:xfrm>
           <a:prstGeom prst="rect">
             <a:avLst/>
@@ -9386,7 +9386,7 @@
               </a:defRPr>
             </a:pPr>
             <a:r>
-              <a:t>51 минута = 31 минута пешком + 20 минут на месте</a:t>
+              <a:t>53 минуты = 33 минуты пешком + 20 минут на месте</a:t>
             </a:r>
           </a:p>
         </p:txBody>
@@ -9408,7 +9408,7 @@
         <p:spPr>
           <a:xfrm>
             <a:off x="533400" y="3314700"/>
-            <a:ext cx="6477000" cy="2291230"/>
+            <a:ext cx="6477000" cy="2298069"/>
           </a:xfrm>
           <a:prstGeom prst="rect">
             <a:avLst/>
@@ -9633,7 +9633,7 @@
               </a:defRPr>
             </a:pPr>
             <a:r>
-              <a:t>Сценарий смоделирован. Время — оценка; линии на карте не являются навигацией.</a:t>
+              <a:t>EXPO: сплошные линии по OSM; пунктир — оценка соединений. Входы и перекрытия не проверены.</a:t>
             </a:r>
           </a:p>
         </p:txBody>
@@ -10503,7 +10503,7 @@
               </a:defRPr>
             </a:pPr>
             <a:r>
-              <a:t>Снимок: 18.10.2026 · © OpenStreetMap contributors / ODbL · Дата сбора ≠ проверка заведения.</a:t>
+              <a:t>EXPO: 1 122 пешеходных пути · Снимок 18.10.2026 · © OpenStreetMap contributors / ODbL.</a:t>
             </a:r>
           </a:p>
         </p:txBody>
@@ -11888,7 +11888,7 @@
               </a:defRPr>
             </a:pPr>
             <a:r>
-              <a:t>Живой Gemini проверен локально и на hosted-демо · 18.10.2026.</a:t>
+              <a:t>Живой Gemini проверен локально и на hosted-демо · 19.10.2026 (Астана).</a:t>
             </a:r>
           </a:p>
         </p:txBody>
@@ -12106,7 +12106,7 @@
               </a:defRPr>
             </a:pPr>
             <a:r>
-              <a:t>07 / КОНТРОЛЬ И КОНТЕКСТ</a:t>
+              <a:t>07 / НОВЫЕ ВОЗМОЖНОСТИ</a:t>
             </a:r>
           </a:p>
         </p:txBody>
@@ -12151,7 +12151,7 @@
               </a:defRPr>
             </a:pPr>
             <a:r>
-              <a:t>Маршрут, который можно изменить.</a:t>
+              <a:t>Места складываются в историю. Время — в план.</a:t>
             </a:r>
           </a:p>
         </p:txBody>
@@ -12248,7 +12248,7 @@
       </p:sp>
       <p:pic>
         <p:nvPicPr>
-          <p:cNvPr id="8" name="Picture 7" descr="editing.png"/>
+          <p:cNvPr id="8" name="Picture 7" descr="story.png"/>
           <p:cNvPicPr>
             <a:picLocks noChangeAspect="1"/>
           </p:cNvPicPr>
@@ -12262,38 +12262,59 @@
         </p:blipFill>
         <p:spPr>
           <a:xfrm>
-            <a:off x="533400" y="2133600"/>
-            <a:ext cx="6553200" cy="1411671"/>
+            <a:off x="533400" y="2057400"/>
+            <a:ext cx="6370785" cy="3962400"/>
           </a:xfrm>
           <a:prstGeom prst="rect">
             <a:avLst/>
           </a:prstGeom>
         </p:spPr>
       </p:pic>
-      <p:pic>
-        <p:nvPicPr>
-          <p:cNvPr id="9" name="Picture 8" descr="group.png"/>
-          <p:cNvPicPr>
-            <a:picLocks noChangeAspect="1"/>
-          </p:cNvPicPr>
-          <p:nvPr/>
-        </p:nvPicPr>
-        <p:blipFill>
-          <a:blip r:embed="rId3"/>
-          <a:stretch>
-            <a:fillRect/>
-          </a:stretch>
-        </p:blipFill>
-        <p:spPr>
-          <a:xfrm>
-            <a:off x="533400" y="4648200"/>
-            <a:ext cx="6553200" cy="1238672"/>
-          </a:xfrm>
-          <a:prstGeom prst="rect">
-            <a:avLst/>
-          </a:prstGeom>
-        </p:spPr>
-      </p:pic>
+      <p:sp>
+        <p:nvSpPr>
+          <p:cNvPr id="9" name="TextBox 8"/>
+          <p:cNvSpPr txBox="1"/>
+          <p:nvPr/>
+        </p:nvSpPr>
+        <p:spPr>
+          <a:xfrm>
+            <a:off x="7581900" y="2133600"/>
+            <a:ext cx="4000500" cy="413308"/>
+          </a:xfrm>
+          <a:prstGeom prst="rect">
+            <a:avLst/>
+          </a:prstGeom>
+          <a:noFill/>
+        </p:spPr>
+        <p:txBody>
+          <a:bodyPr wrap="none" lIns="0" rIns="0" tIns="0" bIns="0">
+            <a:spAutoFit/>
+          </a:bodyPr>
+          <a:lstStyle/>
+          <a:p>
+            <a:pPr>
+              <a:lnSpc>
+                <a:spcPts val="2534"/>
+              </a:lnSpc>
+              <a:spcBef>
+                <a:spcPts val="0"/>
+              </a:spcBef>
+              <a:spcAft>
+                <a:spcPts val="0"/>
+              </a:spcAft>
+              <a:defRPr sz="1980" b="0">
+                <a:solidFill>
+                  <a:srgbClr val="203E36"/>
+                </a:solidFill>
+                <a:latin typeface="Noto Serif"/>
+              </a:defRPr>
+            </a:pPr>
+            <a:r>
+              <a:t>Три истории по источникам</a:t>
+            </a:r>
+          </a:p>
+        </p:txBody>
+      </p:sp>
       <p:sp>
         <p:nvSpPr>
           <p:cNvPr id="10" name="TextBox 9"/>
@@ -12302,31 +12323,120 @@
         </p:nvSpPr>
         <p:spPr>
           <a:xfrm>
-            <a:off x="7429500" y="2171700"/>
-            <a:ext cx="3962400" cy="432816"/>
-          </a:xfrm>
-          <a:prstGeom prst="rect">
-            <a:avLst/>
-          </a:prstGeom>
-          <a:noFill/>
-        </p:spPr>
-        <p:txBody>
-          <a:bodyPr wrap="none" lIns="0" rIns="0" tIns="0" bIns="0">
-            <a:spAutoFit/>
-          </a:bodyPr>
-          <a:lstStyle/>
-          <a:p>
-            <a:pPr>
-              <a:lnSpc>
-                <a:spcPts val="2688"/>
-              </a:lnSpc>
-              <a:spcBef>
-                <a:spcPts val="0"/>
-              </a:spcBef>
-              <a:spcAft>
-                <a:spcPts val="0"/>
-              </a:spcAft>
-              <a:defRPr sz="2100" b="0">
+            <a:off x="7581900" y="2590800"/>
+            <a:ext cx="3962400" cy="852220"/>
+          </a:xfrm>
+          <a:prstGeom prst="rect">
+            <a:avLst/>
+          </a:prstGeom>
+          <a:noFill/>
+        </p:spPr>
+        <p:txBody>
+          <a:bodyPr wrap="none" lIns="0" rIns="0" tIns="0" bIns="0">
+            <a:spAutoFit/>
+          </a:bodyPr>
+          <a:lstStyle/>
+          <a:p>
+            <a:pPr>
+              <a:lnSpc>
+                <a:spcPts val="1996"/>
+              </a:lnSpc>
+              <a:spcBef>
+                <a:spcPts val="0"/>
+              </a:spcBef>
+              <a:spcAft>
+                <a:spcPts val="0"/>
+              </a:spcAft>
+              <a:defRPr sz="1560" b="0">
+                <a:solidFill>
+                  <a:srgbClr val="687768"/>
+                </a:solidFill>
+                <a:latin typeface="Noto Sans"/>
+              </a:defRPr>
+            </a:pPr>
+            <a:r>
+              <a:t>EXPO, городские символы и</a:t>
+            </a:r>
+          </a:p>
+          <a:p>
+            <a:pPr>
+              <a:lnSpc>
+                <a:spcPts val="1996"/>
+              </a:lnSpc>
+              <a:spcBef>
+                <a:spcPts val="0"/>
+              </a:spcBef>
+              <a:spcAft>
+                <a:spcPts val="0"/>
+              </a:spcAft>
+              <a:defRPr sz="1560" b="0">
+                <a:solidFill>
+                  <a:srgbClr val="687768"/>
+                </a:solidFill>
+                <a:latin typeface="Noto Sans"/>
+              </a:defRPr>
+            </a:pPr>
+            <a:r>
+              <a:t>палеонтология. Вопрос на каждой</a:t>
+            </a:r>
+          </a:p>
+          <a:p>
+            <a:pPr>
+              <a:lnSpc>
+                <a:spcPts val="1996"/>
+              </a:lnSpc>
+              <a:spcBef>
+                <a:spcPts val="0"/>
+              </a:spcBef>
+              <a:spcAft>
+                <a:spcPts val="0"/>
+              </a:spcAft>
+              <a:defRPr sz="1560" b="0">
+                <a:solidFill>
+                  <a:srgbClr val="687768"/>
+                </a:solidFill>
+                <a:latin typeface="Noto Sans"/>
+              </a:defRPr>
+            </a:pPr>
+            <a:r>
+              <a:t>остановке.</a:t>
+            </a:r>
+          </a:p>
+        </p:txBody>
+      </p:sp>
+      <p:sp>
+        <p:nvSpPr>
+          <p:cNvPr id="11" name="TextBox 10"/>
+          <p:cNvSpPr txBox="1"/>
+          <p:nvPr/>
+        </p:nvSpPr>
+        <p:spPr>
+          <a:xfrm>
+            <a:off x="7581900" y="3581400"/>
+            <a:ext cx="3962400" cy="413308"/>
+          </a:xfrm>
+          <a:prstGeom prst="rect">
+            <a:avLst/>
+          </a:prstGeom>
+          <a:noFill/>
+        </p:spPr>
+        <p:txBody>
+          <a:bodyPr wrap="none" lIns="0" rIns="0" tIns="0" bIns="0">
+            <a:spAutoFit/>
+          </a:bodyPr>
+          <a:lstStyle/>
+          <a:p>
+            <a:pPr>
+              <a:lnSpc>
+                <a:spcPts val="2534"/>
+              </a:lnSpc>
+              <a:spcBef>
+                <a:spcPts val="0"/>
+              </a:spcBef>
+              <a:spcAft>
+                <a:spcPts val="0"/>
+              </a:spcAft>
+              <a:defRPr sz="1980" b="0">
                 <a:solidFill>
                   <a:srgbClr val="203E36"/>
                 </a:solidFill>
@@ -12334,44 +12444,44 @@
               </a:defRPr>
             </a:pPr>
             <a:r>
-              <a:t>Оставить важное</a:t>
-            </a:r>
-          </a:p>
-        </p:txBody>
-      </p:sp>
-      <p:sp>
-        <p:nvSpPr>
-          <p:cNvPr id="11" name="TextBox 10"/>
-          <p:cNvSpPr txBox="1"/>
-          <p:nvPr/>
-        </p:nvSpPr>
-        <p:spPr>
-          <a:xfrm>
-            <a:off x="7429500" y="2628900"/>
-            <a:ext cx="3962400" cy="881481"/>
-          </a:xfrm>
-          <a:prstGeom prst="rect">
-            <a:avLst/>
-          </a:prstGeom>
-          <a:noFill/>
-        </p:spPr>
-        <p:txBody>
-          <a:bodyPr wrap="none" lIns="0" rIns="0" tIns="0" bIns="0">
-            <a:spAutoFit/>
-          </a:bodyPr>
-          <a:lstStyle/>
-          <a:p>
-            <a:pPr>
-              <a:lnSpc>
-                <a:spcPts val="2073"/>
-              </a:lnSpc>
-              <a:spcBef>
-                <a:spcPts val="0"/>
-              </a:spcBef>
-              <a:spcAft>
-                <a:spcPts val="0"/>
-              </a:spcAft>
-              <a:defRPr sz="1620" b="0">
+              <a:t>Понятный выход из тупика</a:t>
+            </a:r>
+          </a:p>
+        </p:txBody>
+      </p:sp>
+      <p:sp>
+        <p:nvSpPr>
+          <p:cNvPr id="12" name="TextBox 11"/>
+          <p:cNvSpPr txBox="1"/>
+          <p:nvPr/>
+        </p:nvSpPr>
+        <p:spPr>
+          <a:xfrm>
+            <a:off x="7581900" y="4038600"/>
+            <a:ext cx="3962400" cy="852220"/>
+          </a:xfrm>
+          <a:prstGeom prst="rect">
+            <a:avLst/>
+          </a:prstGeom>
+          <a:noFill/>
+        </p:spPr>
+        <p:txBody>
+          <a:bodyPr wrap="none" lIns="0" rIns="0" tIns="0" bIns="0">
+            <a:spAutoFit/>
+          </a:bodyPr>
+          <a:lstStyle/>
+          <a:p>
+            <a:pPr>
+              <a:lnSpc>
+                <a:spcPts val="1996"/>
+              </a:lnSpc>
+              <a:spcBef>
+                <a:spcPts val="0"/>
+              </a:spcBef>
+              <a:spcAft>
+                <a:spcPts val="0"/>
+              </a:spcAft>
+              <a:defRPr sz="1560" b="0">
                 <a:solidFill>
                   <a:srgbClr val="687768"/>
                 </a:solidFill>
@@ -12379,21 +12489,21 @@
               </a:defRPr>
             </a:pPr>
             <a:r>
-              <a:t>Закрепить остановку. Заменить</a:t>
-            </a:r>
-          </a:p>
-          <a:p>
-            <a:pPr>
-              <a:lnSpc>
-                <a:spcPts val="2073"/>
-              </a:lnSpc>
-              <a:spcBef>
-                <a:spcPts val="0"/>
-              </a:spcBef>
-              <a:spcAft>
-                <a:spcPts val="0"/>
-              </a:spcAft>
-              <a:defRPr sz="1620" b="0">
+              <a:t>Не хватает времени? Применить</a:t>
+            </a:r>
+          </a:p>
+          <a:p>
+            <a:pPr>
+              <a:lnSpc>
+                <a:spcPts val="1996"/>
+              </a:lnSpc>
+              <a:spcBef>
+                <a:spcPts val="0"/>
+              </a:spcBef>
+              <a:spcAft>
+                <a:spcPts val="0"/>
+              </a:spcAft>
+              <a:defRPr sz="1560" b="0">
                 <a:solidFill>
                   <a:srgbClr val="687768"/>
                 </a:solidFill>
@@ -12401,21 +12511,21 @@
               </a:defRPr>
             </a:pPr>
             <a:r>
-              <a:t>соседнюю. Увидеть изменение</a:t>
-            </a:r>
-          </a:p>
-          <a:p>
-            <a:pPr>
-              <a:lnSpc>
-                <a:spcPts val="2073"/>
-              </a:lnSpc>
-              <a:spcBef>
-                <a:spcPts val="0"/>
-              </a:spcBef>
-              <a:spcAft>
-                <a:spcPts val="0"/>
-              </a:spcAft>
-              <a:defRPr sz="1620" b="0">
+              <a:t>проверенный вариант или вернуть</a:t>
+            </a:r>
+          </a:p>
+          <a:p>
+            <a:pPr>
+              <a:lnSpc>
+                <a:spcPts val="1996"/>
+              </a:lnSpc>
+              <a:spcBef>
+                <a:spcPts val="0"/>
+              </a:spcBef>
+              <a:spcAft>
+                <a:spcPts val="0"/>
+              </a:spcAft>
+              <a:defRPr sz="1560" b="0">
                 <a:solidFill>
                   <a:srgbClr val="687768"/>
                 </a:solidFill>
@@ -12423,44 +12533,44 @@
               </a:defRPr>
             </a:pPr>
             <a:r>
-              <a:t>времени и отменить.</a:t>
-            </a:r>
-          </a:p>
-        </p:txBody>
-      </p:sp>
-      <p:sp>
-        <p:nvSpPr>
-          <p:cNvPr id="12" name="TextBox 11"/>
-          <p:cNvSpPr txBox="1"/>
-          <p:nvPr/>
-        </p:nvSpPr>
-        <p:spPr>
-          <a:xfrm>
-            <a:off x="7429500" y="3695700"/>
-            <a:ext cx="3962400" cy="432816"/>
-          </a:xfrm>
-          <a:prstGeom prst="rect">
-            <a:avLst/>
-          </a:prstGeom>
-          <a:noFill/>
-        </p:spPr>
-        <p:txBody>
-          <a:bodyPr wrap="none" lIns="0" rIns="0" tIns="0" bIns="0">
-            <a:spAutoFit/>
-          </a:bodyPr>
-          <a:lstStyle/>
-          <a:p>
-            <a:pPr>
-              <a:lnSpc>
-                <a:spcPts val="2688"/>
-              </a:lnSpc>
-              <a:spcBef>
-                <a:spcPts val="0"/>
-              </a:spcBef>
-              <a:spcAft>
-                <a:spcPts val="0"/>
-              </a:spcAft>
-              <a:defRPr sz="2100" b="0">
+              <a:t>условия.</a:t>
+            </a:r>
+          </a:p>
+        </p:txBody>
+      </p:sp>
+      <p:sp>
+        <p:nvSpPr>
+          <p:cNvPr id="13" name="TextBox 12"/>
+          <p:cNvSpPr txBox="1"/>
+          <p:nvPr/>
+        </p:nvSpPr>
+        <p:spPr>
+          <a:xfrm>
+            <a:off x="7581900" y="5029200"/>
+            <a:ext cx="3962400" cy="413308"/>
+          </a:xfrm>
+          <a:prstGeom prst="rect">
+            <a:avLst/>
+          </a:prstGeom>
+          <a:noFill/>
+        </p:spPr>
+        <p:txBody>
+          <a:bodyPr wrap="none" lIns="0" rIns="0" tIns="0" bIns="0">
+            <a:spAutoFit/>
+          </a:bodyPr>
+          <a:lstStyle/>
+          <a:p>
+            <a:pPr>
+              <a:lnSpc>
+                <a:spcPts val="2534"/>
+              </a:lnSpc>
+              <a:spcBef>
+                <a:spcPts val="0"/>
+              </a:spcBef>
+              <a:spcAft>
+                <a:spcPts val="0"/>
+              </a:spcAft>
+              <a:defRPr sz="1980" b="0">
                 <a:solidFill>
                   <a:srgbClr val="203E36"/>
                 </a:solidFill>
@@ -12468,44 +12578,44 @@
               </a:defRPr>
             </a:pPr>
             <a:r>
-              <a:t>Учесть компанию</a:t>
-            </a:r>
-          </a:p>
-        </p:txBody>
-      </p:sp>
-      <p:sp>
-        <p:nvSpPr>
-          <p:cNvPr id="13" name="TextBox 12"/>
-          <p:cNvSpPr txBox="1"/>
-          <p:nvPr/>
-        </p:nvSpPr>
-        <p:spPr>
-          <a:xfrm>
-            <a:off x="7429500" y="4152900"/>
-            <a:ext cx="3962400" cy="881481"/>
-          </a:xfrm>
-          <a:prstGeom prst="rect">
-            <a:avLst/>
-          </a:prstGeom>
-          <a:noFill/>
-        </p:spPr>
-        <p:txBody>
-          <a:bodyPr wrap="none" lIns="0" rIns="0" tIns="0" bIns="0">
-            <a:spAutoFit/>
-          </a:bodyPr>
-          <a:lstStyle/>
-          <a:p>
-            <a:pPr>
-              <a:lnSpc>
-                <a:spcPts val="2073"/>
-              </a:lnSpc>
-              <a:spcBef>
-                <a:spcPts val="0"/>
-              </a:spcBef>
-              <a:spcAft>
-                <a:spcPts val="0"/>
-              </a:spcAft>
-              <a:defRPr sz="1620" b="0">
+              <a:t>Возвращение с запасом</a:t>
+            </a:r>
+          </a:p>
+        </p:txBody>
+      </p:sp>
+      <p:sp>
+        <p:nvSpPr>
+          <p:cNvPr id="14" name="TextBox 13"/>
+          <p:cNvSpPr txBox="1"/>
+          <p:nvPr/>
+        </p:nvSpPr>
+        <p:spPr>
+          <a:xfrm>
+            <a:off x="7581900" y="5486400"/>
+            <a:ext cx="3962400" cy="345033"/>
+          </a:xfrm>
+          <a:prstGeom prst="rect">
+            <a:avLst/>
+          </a:prstGeom>
+          <a:noFill/>
+        </p:spPr>
+        <p:txBody>
+          <a:bodyPr wrap="none" lIns="0" rIns="0" tIns="0" bIns="0">
+            <a:spAutoFit/>
+          </a:bodyPr>
+          <a:lstStyle/>
+          <a:p>
+            <a:pPr>
+              <a:lnSpc>
+                <a:spcPts val="1996"/>
+              </a:lnSpc>
+              <a:spcBef>
+                <a:spcPts val="0"/>
+              </a:spcBef>
+              <a:spcAft>
+                <a:spcPts val="0"/>
+              </a:spcAft>
+              <a:defRPr sz="1560" b="0">
                 <a:solidFill>
                   <a:srgbClr val="687768"/>
                 </a:solidFill>
@@ -12513,141 +12623,7 @@
               </a:defRPr>
             </a:pPr>
             <a:r>
-              <a:t>2–5 интересов, видимый компромисс</a:t>
-            </a:r>
-          </a:p>
-          <a:p>
-            <a:pPr>
-              <a:lnSpc>
-                <a:spcPts val="2073"/>
-              </a:lnSpc>
-              <a:spcBef>
-                <a:spcPts val="0"/>
-              </a:spcBef>
-              <a:spcAft>
-                <a:spcPts val="0"/>
-              </a:spcAft>
-              <a:defRPr sz="1620" b="0">
-                <a:solidFill>
-                  <a:srgbClr val="687768"/>
-                </a:solidFill>
-                <a:latin typeface="Noto Sans"/>
-              </a:defRPr>
-            </a:pPr>
-            <a:r>
-              <a:t>и план Б на дождь или меньше</a:t>
-            </a:r>
-          </a:p>
-          <a:p>
-            <a:pPr>
-              <a:lnSpc>
-                <a:spcPts val="2073"/>
-              </a:lnSpc>
-              <a:spcBef>
-                <a:spcPts val="0"/>
-              </a:spcBef>
-              <a:spcAft>
-                <a:spcPts val="0"/>
-              </a:spcAft>
-              <a:defRPr sz="1620" b="0">
-                <a:solidFill>
-                  <a:srgbClr val="687768"/>
-                </a:solidFill>
-                <a:latin typeface="Noto Sans"/>
-              </a:defRPr>
-            </a:pPr>
-            <a:r>
-              <a:t>времени.</a:t>
-            </a:r>
-          </a:p>
-        </p:txBody>
-      </p:sp>
-      <p:sp>
-        <p:nvSpPr>
-          <p:cNvPr id="14" name="TextBox 13"/>
-          <p:cNvSpPr txBox="1"/>
-          <p:nvPr/>
-        </p:nvSpPr>
-        <p:spPr>
-          <a:xfrm>
-            <a:off x="7429500" y="5219700"/>
-            <a:ext cx="3962400" cy="432816"/>
-          </a:xfrm>
-          <a:prstGeom prst="rect">
-            <a:avLst/>
-          </a:prstGeom>
-          <a:noFill/>
-        </p:spPr>
-        <p:txBody>
-          <a:bodyPr wrap="none" lIns="0" rIns="0" tIns="0" bIns="0">
-            <a:spAutoFit/>
-          </a:bodyPr>
-          <a:lstStyle/>
-          <a:p>
-            <a:pPr>
-              <a:lnSpc>
-                <a:spcPts val="2688"/>
-              </a:lnSpc>
-              <a:spcBef>
-                <a:spcPts val="0"/>
-              </a:spcBef>
-              <a:spcAft>
-                <a:spcPts val="0"/>
-              </a:spcAft>
-              <a:defRPr sz="2100" b="0">
-                <a:solidFill>
-                  <a:srgbClr val="203E36"/>
-                </a:solidFill>
-                <a:latin typeface="Noto Serif"/>
-              </a:defRPr>
-            </a:pPr>
-            <a:r>
-              <a:t>Учитывать отказ</a:t>
-            </a:r>
-          </a:p>
-        </p:txBody>
-      </p:sp>
-      <p:sp>
-        <p:nvSpPr>
-          <p:cNvPr id="15" name="TextBox 14"/>
-          <p:cNvSpPr txBox="1"/>
-          <p:nvPr/>
-        </p:nvSpPr>
-        <p:spPr>
-          <a:xfrm>
-            <a:off x="7429500" y="5638800"/>
-            <a:ext cx="3962400" cy="335280"/>
-          </a:xfrm>
-          <a:prstGeom prst="rect">
-            <a:avLst/>
-          </a:prstGeom>
-          <a:noFill/>
-        </p:spPr>
-        <p:txBody>
-          <a:bodyPr wrap="none" lIns="0" rIns="0" tIns="0" bIns="0">
-            <a:spAutoFit/>
-          </a:bodyPr>
-          <a:lstStyle/>
-          <a:p>
-            <a:pPr>
-              <a:lnSpc>
-                <a:spcPts val="1920"/>
-              </a:lnSpc>
-              <a:spcBef>
-                <a:spcPts val="0"/>
-              </a:spcBef>
-              <a:spcAft>
-                <a:spcPts val="0"/>
-              </a:spcAft>
-              <a:defRPr sz="1500" b="0">
-                <a:solidFill>
-                  <a:srgbClr val="687768"/>
-                </a:solidFill>
-                <a:latin typeface="Noto Sans"/>
-              </a:defRPr>
-            </a:pPr>
-            <a:r>
-              <a:t>«Не хочу кофе, только парк» — без кафе.</a:t>
+              <a:t>Дедлайн, резерв и видимое расписание.</a:t>
             </a:r>
           </a:p>
         </p:txBody>
@@ -13624,7 +13600,7 @@
               </a:defRPr>
             </a:pPr>
             <a:r>
-              <a:t>57</a:t>
+              <a:t>75</a:t>
             </a:r>
           </a:p>
         </p:txBody>
@@ -13894,7 +13870,7 @@
               </a:defRPr>
             </a:pPr>
             <a:r>
-              <a:t>17 / 17</a:t>
+              <a:t>25 / 25</a:t>
             </a:r>
           </a:p>
         </p:txBody>
@@ -14029,7 +14005,7 @@
               </a:defRPr>
             </a:pPr>
             <a:r>
-              <a:t>48 / 48</a:t>
+              <a:t>62 / 62</a:t>
             </a:r>
           </a:p>
         </p:txBody>
@@ -14119,7 +14095,7 @@
               </a:defRPr>
             </a:pPr>
             <a:r>
-              <a:t>Ещё 100 сочетаний: карточки, карта и время относятся к одному маршруту. Пользовательский пилот впереди.</a:t>
+              <a:t>Ещё 6 тестов сбора графа и 100 сочетаний согласованности маршрута. Пользовательский пилот впереди.</a:t>
             </a:r>
           </a:p>
         </p:txBody>

--- a/presentation/Qadam_ArcSolo_pitch_RU.pptx
+++ b/presentation/Qadam_ArcSolo_pitch_RU.pptx
@@ -671,7 +671,7 @@
           <a:p/>
           <a:p>
             <a:r>
-              <a:t>Все пять запланированных улучшений работают: точнее понимаем время и отказ, строим пешеходные пути в EXPO, связываем места в истории, предлагаем проверенный выход из пустого результата и учитываем срок возвращения с запасом. Но сеть пока покрывает один район, входы не проверены на месте, а понимание языка остаётся эвристическим. Дальше нужны расширение графа, обновление источников и проверка казахского. Пользовательские сессии отложены; спрос и удобство пока не доказаны.</a:t>
+              <a:t>Все пять запланированных улучшений работают: точнее понимаем время и отказ, строим пешеходные пути в пяти районах, связываем места в истории, предлагаем проверенный выход из пустого результата и учитываем срок возвращения с запасом. Теперь пути собраны в пяти районах, а не только в EXPO. Добавлены местные факты о пяти местах, неясное время требует подтверждения, карточки показывают реальный переход от предыдущей остановки. Входы не проверены на месте; нужны обновление источников и проверка казахского. Пользовательские сессии отложены; спрос и удобство пока не доказаны.</a:t>
             </a:r>
           </a:p>
         </p:txBody>
@@ -747,7 +747,7 @@
           <a:p/>
           <a:p>
             <a:r>
-              <a:t>Qadam превращает свободный час в небольшой понятный план. Пользователь видит реальные места, ограничения и возможность изменить решение. Работают сбор данных, интерфейс, генерация и проверки. Уже работают истории, пути в EXPO, восстановление плана и возврат с запасом. Спасибо! Готовы показать любой сценарий.</a:t>
+              <a:t>Qadam превращает свободный час в небольшой понятный план. Пользователь видит реальные места, ограничения и возможность изменить решение. Работают сбор данных, интерфейс, генерация и проверки. Уже работают истории, пути в пяти районах, восстановление плана и возврат с запасом. Спасибо! Готовы показать любой сценарий.</a:t>
             </a:r>
           </a:p>
         </p:txBody>
@@ -1051,7 +1051,7 @@
           <a:p/>
           <a:p>
             <a:r>
-              <a:t>Сбор данных автоматизирован. Скрипт получает OpenStreetMap, фильтрует категории и удаляет дубликаты. В снимке триста мест в пяти районах. У ста двух есть часы, у двадцати шести — тег доступности. Отдельный слой обогащает четырнадцать записей: двадцать пять фактов о тринадцати местах и ограничения доступа. Первичные источники уточнили понедельник в музее и вход в кампус. Дата исследования не означает проверку на месте.</a:t>
+              <a:t>Сбор данных автоматизирован. Скрипт получает OpenStreetMap, фильтрует категории и удаляет дубликаты. В снимке триста мест в пяти районах. У ста двух есть часы, у двадцати шести — тег доступности. Отдельный слой обогащает девятнадцать записей: тридцать два факта о восемнадцати местах и ограничения доступа. Первичные источники уточнили понедельник в музее и вход в кампус. Дата исследования не означает проверку на месте.</a:t>
             </a:r>
           </a:p>
         </p:txBody>
@@ -1355,7 +1355,7 @@
           <a:p/>
           <a:p>
             <a:r>
-              <a:t>Проходят семьдесят пять тестов кода, шесть проверок сборщика графа, двадцать пять приёмочных сценариев и шестьдесят две браузерные проверок. Целевой аудит сложных запросов улучшился с трёх до десяти из десяти; ещё двенадцать перефразировок прошли. Проверены обходы, односторонние пути, разрывы сети, дедлайны и неполные истории. Живой Gemini работает. Это инженерная проверка конкретных примеров, не общая точность и не пользовательское исследование.</a:t>
+              <a:t>Проходят восемьдесят шесть тестов кода, шесть проверок сборщика графа, двадцать пять приёмочных сценариев и семьдесят три проверки браузера. Целевой аудит сложных запросов улучшился с трёх до десяти из десяти; ещё двенадцать перефразировок прошли. Проверены обходы, односторонние пути, разрывы сети, дедлайны и неполные истории. Живой Gemini работает. Это инженерная проверка конкретных примеров, не общая точность и не пользовательское исследование.</a:t>
             </a:r>
           </a:p>
         </p:txBody>
@@ -6310,7 +6310,7 @@
               </a:defRPr>
             </a:pPr>
             <a:r>
-              <a:t>Граф только в EXPO</a:t>
+              <a:t>Входы не проверены</a:t>
             </a:r>
           </a:p>
         </p:txBody>
@@ -6369,7 +6369,7 @@
         <p:spPr>
           <a:xfrm>
             <a:off x="6057900" y="3261360"/>
-            <a:ext cx="5334000" cy="345033"/>
+            <a:ext cx="5334000" cy="598627"/>
           </a:xfrm>
           <a:prstGeom prst="rect">
             <a:avLst/>
@@ -6400,7 +6400,29 @@
               </a:defRPr>
             </a:pPr>
             <a:r>
-              <a:t>Проверить входы и расширить на другие районы.</a:t>
+              <a:t>Пять районов на карте; проверить входы и</a:t>
+            </a:r>
+          </a:p>
+          <a:p>
+            <a:pPr>
+              <a:lnSpc>
+                <a:spcPts val="1996"/>
+              </a:lnSpc>
+              <a:spcBef>
+                <a:spcPts val="0"/>
+              </a:spcBef>
+              <a:spcAft>
+                <a:spcPts val="0"/>
+              </a:spcAft>
+              <a:defRPr sz="1560" b="0">
+                <a:solidFill>
+                  <a:srgbClr val="687768"/>
+                </a:solidFill>
+                <a:latin typeface="Noto Sans"/>
+              </a:defRPr>
+            </a:pPr>
+            <a:r>
+              <a:t>перекрытия.</a:t>
             </a:r>
           </a:p>
         </p:txBody>
@@ -6827,7 +6849,7 @@
               </a:defRPr>
             </a:pPr>
             <a:r>
-              <a:t>Все пять улучшений внедрены. Следующий шаг — расширить покрытие и качество данных.</a:t>
+              <a:t>Понимаем «полчаса» и 1h30m. Неясное время просим подтвердить.</a:t>
             </a:r>
           </a:p>
         </p:txBody>
@@ -7337,7 +7359,7 @@
               </a:defRPr>
             </a:pPr>
             <a:r>
-              <a:t>Код открыт на GitHub. Размещённое демо приватное; доступны локальный запуск и видео.</a:t>
+              <a:t>Код и планировщик доступны публично. Живой Gemini — в локальном приложении и видео.</a:t>
             </a:r>
           </a:p>
         </p:txBody>
@@ -10166,7 +10188,7 @@
               </a:defRPr>
             </a:pPr>
             <a:r>
-              <a:t>25</a:t>
+              <a:t>32</a:t>
             </a:r>
           </a:p>
         </p:txBody>
@@ -10211,7 +10233,7 @@
               </a:defRPr>
             </a:pPr>
             <a:r>
-              <a:t>фактов из источников</a:t>
+              <a:t>факта из источников</a:t>
             </a:r>
           </a:p>
         </p:txBody>
@@ -10301,7 +10323,7 @@
               </a:defRPr>
             </a:pPr>
             <a:r>
-              <a:t>14</a:t>
+              <a:t>19</a:t>
             </a:r>
           </a:p>
         </p:txBody>
@@ -10436,7 +10458,7 @@
               </a:defRPr>
             </a:pPr>
             <a:r>
-              <a:t>5 районов · 102 записи с часами · 26 тегов доступности. 25 фактов о 13 местах.</a:t>
+              <a:t>5 районов · 102 записи с часами · 26 тегов доступности. 32 факта о 18 местах.</a:t>
             </a:r>
           </a:p>
           <a:p>
@@ -10503,7 +10525,7 @@
               </a:defRPr>
             </a:pPr>
             <a:r>
-              <a:t>EXPO: 1 122 пешеходных пути · Снимок 18.10.2026 · © OpenStreetMap contributors / ODbL.</a:t>
+              <a:t>Пять районов: 5 188 пешеходных путей · Снимок 18.10.2026 · © OpenStreetMap contributors / ODbL.</a:t>
             </a:r>
           </a:p>
         </p:txBody>
@@ -11888,7 +11910,7 @@
               </a:defRPr>
             </a:pPr>
             <a:r>
-              <a:t>Живой Gemini проверен локально и на hosted-демо · 19.10.2026 (Астана).</a:t>
+              <a:t>Живой Gemini — локально и в видео; публичное демо без платной генерации.</a:t>
             </a:r>
           </a:p>
         </p:txBody>
@@ -12931,7 +12953,7 @@
         <p:spPr>
           <a:xfrm>
             <a:off x="533400" y="2133600"/>
-            <a:ext cx="6400800" cy="2460286"/>
+            <a:ext cx="6400800" cy="2892864"/>
           </a:xfrm>
           <a:prstGeom prst="rect">
             <a:avLst/>
@@ -13600,7 +13622,7 @@
               </a:defRPr>
             </a:pPr>
             <a:r>
-              <a:t>75</a:t>
+              <a:t>86</a:t>
             </a:r>
           </a:p>
         </p:txBody>
@@ -14005,7 +14027,7 @@
               </a:defRPr>
             </a:pPr>
             <a:r>
-              <a:t>62 / 62</a:t>
+              <a:t>73 / 73</a:t>
             </a:r>
           </a:p>
         </p:txBody>

--- a/presentation/Qadam_ArcSolo_pitch_RU.pptx
+++ b/presentation/Qadam_ArcSolo_pitch_RU.pptx
@@ -671,7 +671,7 @@
           <a:p/>
           <a:p>
             <a:r>
-              <a:t>Все пять запланированных улучшений работают: точнее понимаем время и отказ, строим пешеходные пути в пяти районах, связываем места в истории, предлагаем проверенный выход из пустого результата и учитываем срок возвращения с запасом. Теперь пути собраны в пяти районах, а не только в EXPO. Добавлены местные факты о пяти местах, неясное время требует подтверждения, карточки показывают реальный переход от предыдущей остановки. Входы не проверены на месте; нужны обновление источников и проверка казахского. Пользовательские сессии отложены; спрос и удобство пока не доказаны.</a:t>
+              <a:t>Основные возможности работают: точнее понимаем время и отказ, строим пешеходные пути в пяти районах, связываем места в истории, предлагаем проверенный выход из пустого результата и учитываем срок возвращения с запасом. Теперь пути собраны в пяти районах, а не только в EXPO. Добавлены местные факты о пяти местах, неясное время требует подтверждения, карточки показывают реальный переход от предыдущей остановки. Входы не проверены на месте; нужны обновление источников и проверка казахского. Пользовательские сессии отложены; спрос и удобство пока не доказаны.</a:t>
             </a:r>
           </a:p>
         </p:txBody>
@@ -747,7 +747,7 @@
           <a:p/>
           <a:p>
             <a:r>
-              <a:t>Qadam превращает свободный час в небольшой понятный план. Пользователь видит реальные места, ограничения и возможность изменить решение. Работают сбор данных, интерфейс, генерация и проверки. Уже работают истории, пути в пяти районах, восстановление плана и возврат с запасом. Спасибо! Готовы показать любой сценарий.</a:t>
+              <a:t>Qadam превращает свободный час в небольшой понятный план. Пользователь видит реальные места, ограничения и возможность изменить решение. Работают сбор данных, интерфейс, генерация и проверки. План адаптируется уже во время прогулки: меняется оставшийся путь, сохраняется исходное обязательство вернуться. Жюри может проверить это в репетиции. Спасибо! Готовы показать любой сценарий.</a:t>
             </a:r>
           </a:p>
         </p:txBody>
@@ -975,7 +975,7 @@
           <a:p/>
           <a:p>
             <a:r>
-              <a:t>Покажем час возле EXPO. Две остановки занимают примерно пятьдесят три минуты, включая возвращение. Сплошная линия следует связным пешеходным путям OSM, пунктир — примерным соединениям. Добавим возвращение к пятнадцати часам и пять минут запаса: маршрут ещё помещается, это видно в расписании. Затем выберем историю EXPO с двумя часами и пределом перехода тридцать минут. Главы связаны источниками и вопросами для наблюдения. Уменьшим время: история станет неполной, а система предложит уже проверенное увеличение времени. Применяем его — обе главы снова в плане. Текущее состояние входов всё равно требует проверки.</a:t>
+              <a:t>Покажем час возле EXPO. Две остановки занимают примерно пятьдесят три минуты, включая возвращение. Сплошная линия следует связным пешеходным путям OSM, пунктир — примерным соединениям. Добавим возвращение к пятнадцати часам и пять минут запаса. Запускаем репетицию «Идём вместе». Представим, что пришли в кафе, а оно недоступно. Отмечаем это, затем теряем пятнадцать минут. Точка изменилась, остаток времени уменьшился, но срок пятнадцать часов сохранён. Добавляем дождь: уличные посещения исчезают, ограничения остаются. Можно выбрать возвращение сейчас. Указание недоступности действует только в нашей прогулке, общую базу оно не меняет. Реальное состояние входов требует проверки.</a:t>
             </a:r>
           </a:p>
         </p:txBody>
@@ -1203,7 +1203,7 @@
           <a:p/>
           <a:p>
             <a:r>
-              <a:t>Мы добавили три короткие истории, а не просто ещё один список мест. У каждой главы есть вопрос, первоисточник и условия посещения. Когда одна остановка не вписывается, приложение честно показывает часть истории. Альтернатива предварительно рассчитана тем же планировщиком и не снимает ограничения доступа или ходьбы. Дедлайн включает возвращение, а запас вычитается до планирования. Можно закреплять и менять места, учитывать компанию и сравнивать план на дождь.</a:t>
+              <a:t>Главный новый сценарий: мы пришли в кафе, а оно недоступно. Затем потеряли пятнадцать минут и начался дождь. Qadam пересчитывает только оставшийся план от подтверждённой точки. Срок возвращения и первоначальный старт не меняются, запас не тратится молча. Завершённые места не добавляются снова. Если посещение уже не помещается, остаётся возвращение; если и оно не успевает, приложение прямо показывает это. Жюри может проверить всё в явно обозначенной репетиции. В реальной прогулке часы обновляются при действиях, местоположение подтверждает человек.</a:t>
             </a:r>
           </a:p>
         </p:txBody>
@@ -1355,7 +1355,7 @@
           <a:p/>
           <a:p>
             <a:r>
-              <a:t>Проходят восемьдесят шесть тестов кода, шесть проверок сборщика графа, двадцать пять приёмочных сценариев и семьдесят три проверки браузера. Целевой аудит сложных запросов улучшился с трёх до десяти из десяти; ещё двенадцать перефразировок прошли. Проверены обходы, односторонние пути, разрывы сети, дедлайны и неполные истории. Живой Gemini работает. Это инженерная проверка конкретных примеров, не общая точность и не пользовательское исследование.</a:t>
+              <a:t>Проходят сто три теста кода, шесть проверок сборщика графа, двадцать пять приёмочных сценариев и девяносто восемь проверок браузера. Целевой аудит сложных запросов улучшился с трёх до десяти из десяти; ещё двенадцать перефразировок прошли. Проверены обходы, односторонние пути, разрывы сети, дедлайны и неполные истории. Живой Gemini работает. Это инженерная проверка конкретных примеров, не общая точность и не пользовательское исследование.</a:t>
             </a:r>
           </a:p>
         </p:txBody>
@@ -7269,7 +7269,7 @@
               </a:defRPr>
             </a:pPr>
             <a:r>
-              <a:t>План Б и возвращение с запасом.</a:t>
+              <a:t>Сопровождение прогулки и возвращение с запасом.</a:t>
             </a:r>
           </a:p>
         </p:txBody>
@@ -12128,7 +12128,7 @@
               </a:defRPr>
             </a:pPr>
             <a:r>
-              <a:t>07 / НОВЫЕ ВОЗМОЖНОСТИ</a:t>
+              <a:t>07 / ИДЁМ ВМЕСТЕ</a:t>
             </a:r>
           </a:p>
         </p:txBody>
@@ -12173,7 +12173,7 @@
               </a:defRPr>
             </a:pPr>
             <a:r>
-              <a:t>Места складываются в историю. Время — в план.</a:t>
+              <a:t>Кафе недоступно. Потеряли 15 минут. Что дальше?</a:t>
             </a:r>
           </a:p>
         </p:txBody>
@@ -12270,7 +12270,7 @@
       </p:sp>
       <p:pic>
         <p:nvPicPr>
-          <p:cNvPr id="8" name="Picture 7" descr="story.png"/>
+          <p:cNvPr id="8" name="Picture 7" descr="companion.png"/>
           <p:cNvPicPr>
             <a:picLocks noChangeAspect="1"/>
           </p:cNvPicPr>
@@ -12284,8 +12284,8 @@
         </p:blipFill>
         <p:spPr>
           <a:xfrm>
-            <a:off x="533400" y="2057400"/>
-            <a:ext cx="6370785" cy="3962400"/>
+            <a:off x="533400" y="2019300"/>
+            <a:ext cx="4291537" cy="4114800"/>
           </a:xfrm>
           <a:prstGeom prst="rect">
             <a:avLst/>
@@ -12300,31 +12300,31 @@
         </p:nvSpPr>
         <p:spPr>
           <a:xfrm>
-            <a:off x="7581900" y="2133600"/>
-            <a:ext cx="4000500" cy="413308"/>
-          </a:xfrm>
-          <a:prstGeom prst="rect">
-            <a:avLst/>
-          </a:prstGeom>
-          <a:noFill/>
-        </p:spPr>
-        <p:txBody>
-          <a:bodyPr wrap="none" lIns="0" rIns="0" tIns="0" bIns="0">
-            <a:spAutoFit/>
-          </a:bodyPr>
-          <a:lstStyle/>
-          <a:p>
-            <a:pPr>
-              <a:lnSpc>
-                <a:spcPts val="2534"/>
-              </a:lnSpc>
-              <a:spcBef>
-                <a:spcPts val="0"/>
-              </a:spcBef>
-              <a:spcAft>
-                <a:spcPts val="0"/>
-              </a:spcAft>
-              <a:defRPr sz="1980" b="0">
+            <a:off x="6438900" y="2209800"/>
+            <a:ext cx="5067300" cy="471830"/>
+          </a:xfrm>
+          <a:prstGeom prst="rect">
+            <a:avLst/>
+          </a:prstGeom>
+          <a:noFill/>
+        </p:spPr>
+        <p:txBody>
+          <a:bodyPr wrap="none" lIns="0" rIns="0" tIns="0" bIns="0">
+            <a:spAutoFit/>
+          </a:bodyPr>
+          <a:lstStyle/>
+          <a:p>
+            <a:pPr>
+              <a:lnSpc>
+                <a:spcPts val="2995"/>
+              </a:lnSpc>
+              <a:spcBef>
+                <a:spcPts val="0"/>
+              </a:spcBef>
+              <a:spcAft>
+                <a:spcPts val="0"/>
+              </a:spcAft>
+              <a:defRPr sz="2340" b="0">
                 <a:solidFill>
                   <a:srgbClr val="203E36"/>
                 </a:solidFill>
@@ -12332,7 +12332,7 @@
               </a:defRPr>
             </a:pPr>
             <a:r>
-              <a:t>Три истории по источникам</a:t>
+              <a:t>Тот же срок. Новая точка.</a:t>
             </a:r>
           </a:p>
         </p:txBody>
@@ -12345,31 +12345,31 @@
         </p:nvSpPr>
         <p:spPr>
           <a:xfrm>
-            <a:off x="7581900" y="2590800"/>
-            <a:ext cx="3962400" cy="852220"/>
-          </a:xfrm>
-          <a:prstGeom prst="rect">
-            <a:avLst/>
-          </a:prstGeom>
-          <a:noFill/>
-        </p:spPr>
-        <p:txBody>
-          <a:bodyPr wrap="none" lIns="0" rIns="0" tIns="0" bIns="0">
-            <a:spAutoFit/>
-          </a:bodyPr>
-          <a:lstStyle/>
-          <a:p>
-            <a:pPr>
-              <a:lnSpc>
-                <a:spcPts val="1996"/>
-              </a:lnSpc>
-              <a:spcBef>
-                <a:spcPts val="0"/>
-              </a:spcBef>
-              <a:spcAft>
-                <a:spcPts val="0"/>
-              </a:spcAft>
-              <a:defRPr sz="1560" b="0">
+            <a:off x="6438900" y="2705100"/>
+            <a:ext cx="4991100" cy="940003"/>
+          </a:xfrm>
+          <a:prstGeom prst="rect">
+            <a:avLst/>
+          </a:prstGeom>
+          <a:noFill/>
+        </p:spPr>
+        <p:txBody>
+          <a:bodyPr wrap="none" lIns="0" rIns="0" tIns="0" bIns="0">
+            <a:spAutoFit/>
+          </a:bodyPr>
+          <a:lstStyle/>
+          <a:p>
+            <a:pPr>
+              <a:lnSpc>
+                <a:spcPts val="2227"/>
+              </a:lnSpc>
+              <a:spcBef>
+                <a:spcPts val="0"/>
+              </a:spcBef>
+              <a:spcAft>
+                <a:spcPts val="0"/>
+              </a:spcAft>
+              <a:defRPr sz="1739" b="0">
                 <a:solidFill>
                   <a:srgbClr val="687768"/>
                 </a:solidFill>
@@ -12377,21 +12377,21 @@
               </a:defRPr>
             </a:pPr>
             <a:r>
-              <a:t>EXPO, городские символы и</a:t>
-            </a:r>
-          </a:p>
-          <a:p>
-            <a:pPr>
-              <a:lnSpc>
-                <a:spcPts val="1996"/>
-              </a:lnSpc>
-              <a:spcBef>
-                <a:spcPts val="0"/>
-              </a:spcBef>
-              <a:spcAft>
-                <a:spcPts val="0"/>
-              </a:spcAft>
-              <a:defRPr sz="1560" b="0">
+              <a:t>Остаток маршрута пересчитан от</a:t>
+            </a:r>
+          </a:p>
+          <a:p>
+            <a:pPr>
+              <a:lnSpc>
+                <a:spcPts val="2227"/>
+              </a:lnSpc>
+              <a:spcBef>
+                <a:spcPts val="0"/>
+              </a:spcBef>
+              <a:spcAft>
+                <a:spcPts val="0"/>
+              </a:spcAft>
+              <a:defRPr sz="1739" b="0">
                 <a:solidFill>
                   <a:srgbClr val="687768"/>
                 </a:solidFill>
@@ -12399,21 +12399,21 @@
               </a:defRPr>
             </a:pPr>
             <a:r>
-              <a:t>палеонтология. Вопрос на каждой</a:t>
-            </a:r>
-          </a:p>
-          <a:p>
-            <a:pPr>
-              <a:lnSpc>
-                <a:spcPts val="1996"/>
-              </a:lnSpc>
-              <a:spcBef>
-                <a:spcPts val="0"/>
-              </a:spcBef>
-              <a:spcAft>
-                <a:spcPts val="0"/>
-              </a:spcAft>
-              <a:defRPr sz="1560" b="0">
+              <a:t>подтверждённого места. Возвращение — к</a:t>
+            </a:r>
+          </a:p>
+          <a:p>
+            <a:pPr>
+              <a:lnSpc>
+                <a:spcPts val="2227"/>
+              </a:lnSpc>
+              <a:spcBef>
+                <a:spcPts val="0"/>
+              </a:spcBef>
+              <a:spcAft>
+                <a:spcPts val="0"/>
+              </a:spcAft>
+              <a:defRPr sz="1739" b="0">
                 <a:solidFill>
                   <a:srgbClr val="687768"/>
                 </a:solidFill>
@@ -12421,7 +12421,7 @@
               </a:defRPr>
             </a:pPr>
             <a:r>
-              <a:t>остановке.</a:t>
+              <a:t>исходному старту.</a:t>
             </a:r>
           </a:p>
         </p:txBody>
@@ -12434,31 +12434,31 @@
         </p:nvSpPr>
         <p:spPr>
           <a:xfrm>
-            <a:off x="7581900" y="3581400"/>
-            <a:ext cx="3962400" cy="413308"/>
-          </a:xfrm>
-          <a:prstGeom prst="rect">
-            <a:avLst/>
-          </a:prstGeom>
-          <a:noFill/>
-        </p:spPr>
-        <p:txBody>
-          <a:bodyPr wrap="none" lIns="0" rIns="0" tIns="0" bIns="0">
-            <a:spAutoFit/>
-          </a:bodyPr>
-          <a:lstStyle/>
-          <a:p>
-            <a:pPr>
-              <a:lnSpc>
-                <a:spcPts val="2534"/>
-              </a:lnSpc>
-              <a:spcBef>
-                <a:spcPts val="0"/>
-              </a:spcBef>
-              <a:spcAft>
-                <a:spcPts val="0"/>
-              </a:spcAft>
-              <a:defRPr sz="1980" b="0">
+            <a:off x="6438900" y="3771900"/>
+            <a:ext cx="5067300" cy="432816"/>
+          </a:xfrm>
+          <a:prstGeom prst="rect">
+            <a:avLst/>
+          </a:prstGeom>
+          <a:noFill/>
+        </p:spPr>
+        <p:txBody>
+          <a:bodyPr wrap="none" lIns="0" rIns="0" tIns="0" bIns="0">
+            <a:spAutoFit/>
+          </a:bodyPr>
+          <a:lstStyle/>
+          <a:p>
+            <a:pPr>
+              <a:lnSpc>
+                <a:spcPts val="2688"/>
+              </a:lnSpc>
+              <a:spcBef>
+                <a:spcPts val="0"/>
+              </a:spcBef>
+              <a:spcAft>
+                <a:spcPts val="0"/>
+              </a:spcAft>
+              <a:defRPr sz="2100" b="0">
                 <a:solidFill>
                   <a:srgbClr val="203E36"/>
                 </a:solidFill>
@@ -12466,7 +12466,7 @@
               </a:defRPr>
             </a:pPr>
             <a:r>
-              <a:t>Понятный выход из тупика</a:t>
+              <a:t>Запас не исчезает молча</a:t>
             </a:r>
           </a:p>
         </p:txBody>
@@ -12479,31 +12479,31 @@
         </p:nvSpPr>
         <p:spPr>
           <a:xfrm>
-            <a:off x="7581900" y="4038600"/>
-            <a:ext cx="3962400" cy="852220"/>
-          </a:xfrm>
-          <a:prstGeom prst="rect">
-            <a:avLst/>
-          </a:prstGeom>
-          <a:noFill/>
-        </p:spPr>
-        <p:txBody>
-          <a:bodyPr wrap="none" lIns="0" rIns="0" tIns="0" bIns="0">
-            <a:spAutoFit/>
-          </a:bodyPr>
-          <a:lstStyle/>
-          <a:p>
-            <a:pPr>
-              <a:lnSpc>
-                <a:spcPts val="1996"/>
-              </a:lnSpc>
-              <a:spcBef>
-                <a:spcPts val="0"/>
-              </a:spcBef>
-              <a:spcAft>
-                <a:spcPts val="0"/>
-              </a:spcAft>
-              <a:defRPr sz="1560" b="0">
+            <a:off x="6438900" y="4229100"/>
+            <a:ext cx="4991100" cy="637641"/>
+          </a:xfrm>
+          <a:prstGeom prst="rect">
+            <a:avLst/>
+          </a:prstGeom>
+          <a:noFill/>
+        </p:spPr>
+        <p:txBody>
+          <a:bodyPr wrap="none" lIns="0" rIns="0" tIns="0" bIns="0">
+            <a:spAutoFit/>
+          </a:bodyPr>
+          <a:lstStyle/>
+          <a:p>
+            <a:pPr>
+              <a:lnSpc>
+                <a:spcPts val="2150"/>
+              </a:lnSpc>
+              <a:spcBef>
+                <a:spcPts val="0"/>
+              </a:spcBef>
+              <a:spcAft>
+                <a:spcPts val="0"/>
+              </a:spcAft>
+              <a:defRPr sz="1680" b="0">
                 <a:solidFill>
                   <a:srgbClr val="687768"/>
                 </a:solidFill>
@@ -12511,21 +12511,21 @@
               </a:defRPr>
             </a:pPr>
             <a:r>
-              <a:t>Не хватает времени? Применить</a:t>
-            </a:r>
-          </a:p>
-          <a:p>
-            <a:pPr>
-              <a:lnSpc>
-                <a:spcPts val="1996"/>
-              </a:lnSpc>
-              <a:spcBef>
-                <a:spcPts val="0"/>
-              </a:spcBef>
-              <a:spcAft>
-                <a:spcPts val="0"/>
-              </a:spcAft>
-              <a:defRPr sz="1560" b="0">
+              <a:t>Если уже не успеваем, видны опоздание и</a:t>
+            </a:r>
+          </a:p>
+          <a:p>
+            <a:pPr>
+              <a:lnSpc>
+                <a:spcPts val="2150"/>
+              </a:lnSpc>
+              <a:spcBef>
+                <a:spcPts val="0"/>
+              </a:spcBef>
+              <a:spcAft>
+                <a:spcPts val="0"/>
+              </a:spcAft>
+              <a:defRPr sz="1680" b="0">
                 <a:solidFill>
                   <a:srgbClr val="687768"/>
                 </a:solidFill>
@@ -12533,21 +12533,89 @@
               </a:defRPr>
             </a:pPr>
             <a:r>
-              <a:t>проверенный вариант или вернуть</a:t>
-            </a:r>
-          </a:p>
-          <a:p>
-            <a:pPr>
-              <a:lnSpc>
-                <a:spcPts val="1996"/>
-              </a:lnSpc>
-              <a:spcBef>
-                <a:spcPts val="0"/>
-              </a:spcBef>
-              <a:spcAft>
-                <a:spcPts val="0"/>
-              </a:spcAft>
-              <a:defRPr sz="1560" b="0">
+              <a:t>нехватка резерва. Можно сразу возвращаться.</a:t>
+            </a:r>
+          </a:p>
+        </p:txBody>
+      </p:sp>
+      <p:sp>
+        <p:nvSpPr>
+          <p:cNvPr id="13" name="TextBox 12"/>
+          <p:cNvSpPr txBox="1"/>
+          <p:nvPr/>
+        </p:nvSpPr>
+        <p:spPr>
+          <a:xfrm>
+            <a:off x="6438900" y="5295900"/>
+            <a:ext cx="5067300" cy="393801"/>
+          </a:xfrm>
+          <a:prstGeom prst="rect">
+            <a:avLst/>
+          </a:prstGeom>
+          <a:noFill/>
+        </p:spPr>
+        <p:txBody>
+          <a:bodyPr wrap="none" lIns="0" rIns="0" tIns="0" bIns="0">
+            <a:spAutoFit/>
+          </a:bodyPr>
+          <a:lstStyle/>
+          <a:p>
+            <a:pPr>
+              <a:lnSpc>
+                <a:spcPts val="2380"/>
+              </a:lnSpc>
+              <a:spcBef>
+                <a:spcPts val="0"/>
+              </a:spcBef>
+              <a:spcAft>
+                <a:spcPts val="0"/>
+              </a:spcAft>
+              <a:defRPr sz="1859" b="0">
+                <a:solidFill>
+                  <a:srgbClr val="203E36"/>
+                </a:solidFill>
+                <a:latin typeface="Noto Serif"/>
+              </a:defRPr>
+            </a:pPr>
+            <a:r>
+              <a:t>Для жюри — явная репетиция</a:t>
+            </a:r>
+          </a:p>
+        </p:txBody>
+      </p:sp>
+      <p:sp>
+        <p:nvSpPr>
+          <p:cNvPr id="14" name="TextBox 13"/>
+          <p:cNvSpPr txBox="1"/>
+          <p:nvPr/>
+        </p:nvSpPr>
+        <p:spPr>
+          <a:xfrm>
+            <a:off x="6438900" y="5676900"/>
+            <a:ext cx="4953000" cy="559612"/>
+          </a:xfrm>
+          <a:prstGeom prst="rect">
+            <a:avLst/>
+          </a:prstGeom>
+          <a:noFill/>
+        </p:spPr>
+        <p:txBody>
+          <a:bodyPr wrap="none" lIns="0" rIns="0" tIns="0" bIns="0">
+            <a:spAutoFit/>
+          </a:bodyPr>
+          <a:lstStyle/>
+          <a:p>
+            <a:pPr>
+              <a:lnSpc>
+                <a:spcPts val="1843"/>
+              </a:lnSpc>
+              <a:spcBef>
+                <a:spcPts val="0"/>
+              </a:spcBef>
+              <a:spcAft>
+                <a:spcPts val="0"/>
+              </a:spcAft>
+              <a:defRPr sz="1439" b="0">
                 <a:solidFill>
                   <a:srgbClr val="687768"/>
                 </a:solidFill>
@@ -12555,89 +12623,21 @@
               </a:defRPr>
             </a:pPr>
             <a:r>
-              <a:t>условия.</a:t>
-            </a:r>
-          </a:p>
-        </p:txBody>
-      </p:sp>
-      <p:sp>
-        <p:nvSpPr>
-          <p:cNvPr id="13" name="TextBox 12"/>
-          <p:cNvSpPr txBox="1"/>
-          <p:nvPr/>
-        </p:nvSpPr>
-        <p:spPr>
-          <a:xfrm>
-            <a:off x="7581900" y="5029200"/>
-            <a:ext cx="3962400" cy="413308"/>
-          </a:xfrm>
-          <a:prstGeom prst="rect">
-            <a:avLst/>
-          </a:prstGeom>
-          <a:noFill/>
-        </p:spPr>
-        <p:txBody>
-          <a:bodyPr wrap="none" lIns="0" rIns="0" tIns="0" bIns="0">
-            <a:spAutoFit/>
-          </a:bodyPr>
-          <a:lstStyle/>
-          <a:p>
-            <a:pPr>
-              <a:lnSpc>
-                <a:spcPts val="2534"/>
-              </a:lnSpc>
-              <a:spcBef>
-                <a:spcPts val="0"/>
-              </a:spcBef>
-              <a:spcAft>
-                <a:spcPts val="0"/>
-              </a:spcAft>
-              <a:defRPr sz="1980" b="0">
-                <a:solidFill>
-                  <a:srgbClr val="203E36"/>
-                </a:solidFill>
-                <a:latin typeface="Noto Serif"/>
-              </a:defRPr>
-            </a:pPr>
-            <a:r>
-              <a:t>Возвращение с запасом</a:t>
-            </a:r>
-          </a:p>
-        </p:txBody>
-      </p:sp>
-      <p:sp>
-        <p:nvSpPr>
-          <p:cNvPr id="14" name="TextBox 13"/>
-          <p:cNvSpPr txBox="1"/>
-          <p:nvPr/>
-        </p:nvSpPr>
-        <p:spPr>
-          <a:xfrm>
-            <a:off x="7581900" y="5486400"/>
-            <a:ext cx="3962400" cy="345033"/>
-          </a:xfrm>
-          <a:prstGeom prst="rect">
-            <a:avLst/>
-          </a:prstGeom>
-          <a:noFill/>
-        </p:spPr>
-        <p:txBody>
-          <a:bodyPr wrap="none" lIns="0" rIns="0" tIns="0" bIns="0">
-            <a:spAutoFit/>
-          </a:bodyPr>
-          <a:lstStyle/>
-          <a:p>
-            <a:pPr>
-              <a:lnSpc>
-                <a:spcPts val="1996"/>
-              </a:lnSpc>
-              <a:spcBef>
-                <a:spcPts val="0"/>
-              </a:spcBef>
-              <a:spcAft>
-                <a:spcPts val="0"/>
-              </a:spcAft>
-              <a:defRPr sz="1560" b="0">
+              <a:t>Для прогулки — часы устройства и ручное</a:t>
+            </a:r>
+          </a:p>
+          <a:p>
+            <a:pPr>
+              <a:lnSpc>
+                <a:spcPts val="1843"/>
+              </a:lnSpc>
+              <a:spcBef>
+                <a:spcPts val="0"/>
+              </a:spcBef>
+              <a:spcAft>
+                <a:spcPts val="0"/>
+              </a:spcAft>
+              <a:defRPr sz="1439" b="0">
                 <a:solidFill>
                   <a:srgbClr val="687768"/>
                 </a:solidFill>
@@ -12645,7 +12645,7 @@
               </a:defRPr>
             </a:pPr>
             <a:r>
-              <a:t>Дедлайн, резерв и видимое расписание.</a:t>
+              <a:t>подтверждение. Без фонового GPS.</a:t>
             </a:r>
           </a:p>
         </p:txBody>
@@ -13622,7 +13622,7 @@
               </a:defRPr>
             </a:pPr>
             <a:r>
-              <a:t>86</a:t>
+              <a:t>103</a:t>
             </a:r>
           </a:p>
         </p:txBody>
@@ -14027,7 +14027,7 @@
               </a:defRPr>
             </a:pPr>
             <a:r>
-              <a:t>73 / 73</a:t>
+              <a:t>98 / 98</a:t>
             </a:r>
           </a:p>
         </p:txBody>

--- a/presentation/Qadam_ArcSolo_pitch_RU.pptx
+++ b/presentation/Qadam_ArcSolo_pitch_RU.pptx
@@ -519,7 +519,7 @@
           <a:p/>
           <a:p>
             <a:r>
-              <a:t>Здравствуйте! Мы — ArcSolo, и это Qadam: помощник по коротким прогулкам в Астане. Представьте, что вы возле MEGA Silk Way и у вас свободен час. Хочется успеть что-то приятное, а не потратить время на поиск. Qadam предлагает конкретные места и считает прогулку вместе с возвращением. Его основа — реальные данные и понятные ограничения.</a:t>
+              <a:t>Здравствуйте! Мы — ArcSolo, это Qadam. Представьте: у вас час возле EXPO, но кафе оказалось недоступно. Вы потеряли ещё пятнадцать минут, а вернуться нужно к трём. Qadam перестраивает оставшуюся прогулку, сохраняя первоначальный срок и точку возвращения. Покажем это в репетиции. Маршрут опирается на реальные места, источники и явные ограничения; время остаётся оценкой.</a:t>
             </a:r>
           </a:p>
         </p:txBody>
@@ -975,7 +975,7 @@
           <a:p/>
           <a:p>
             <a:r>
-              <a:t>Покажем час возле EXPO. Две остановки занимают примерно пятьдесят три минуты, включая возвращение. Сплошная линия следует связным пешеходным путям OSM, пунктир — примерным соединениям. Добавим возвращение к пятнадцати часам и пять минут запаса. Запускаем репетицию «Идём вместе». Представим, что пришли в кафе, а оно недоступно. Отмечаем это, затем теряем пятнадцать минут. Точка изменилась, остаток времени уменьшился, но срок пятнадцать часов сохранён. Добавляем дождь: уличные посещения исчезают, ограничения остаются. Можно выбрать возвращение сейчас. Указание недоступности действует только в нашей прогулке, общую базу оно не меняет. Реальное состояние входов требует проверки.</a:t>
+              <a:t>Покажем час возле EXPO. Две остановки занимают примерно пятьдесят три минуты, включая возвращение. Сплошная линия следует связным пешеходным путям OSM, пунктир — примерным соединениям. На первом экране нажимаем «Попробовать Идём вместе»: репетиция уже настроена на возвращение к пятнадцати часам с пятью минутами запаса. Представим, что пришли в кафе, а оно недоступно. Отмечаем это, затем теряем пятнадцать минут. Точка изменилась, остаток времени уменьшился, но срок пятнадцать часов сохранён. Добавляем дождь: уличные посещения исчезают, ограничения остаются. Можно выбрать возвращение сейчас. Указание недоступности действует только в нашей прогулке, общую базу оно не меняет. Реальное состояние входов требует проверки.</a:t>
             </a:r>
           </a:p>
         </p:txBody>
@@ -1355,7 +1355,7 @@
           <a:p/>
           <a:p>
             <a:r>
-              <a:t>Проходят сто три теста кода, шесть проверок сборщика графа, двадцать пять приёмочных сценариев и девяносто восемь проверок браузера. Целевой аудит сложных запросов улучшился с трёх до десяти из десяти; ещё двенадцать перефразировок прошли. Проверены обходы, односторонние пути, разрывы сети, дедлайны и неполные истории. Живой Gemini работает. Это инженерная проверка конкретных примеров, не общая точность и не пользовательское исследование.</a:t>
+              <a:t>Проходят сто три теста кода, шесть проверок сборщика графа, двадцать пять приёмочных сценариев и сто шесть проверок браузера. Целевой аудит сложных запросов улучшился с трёх до десяти из десяти; ещё двенадцать перефразировок прошли. Проверены обходы, односторонние пути, разрывы сети, дедлайны и неполные истории. Живой Gemini работает. Это инженерная проверка конкретных примеров, не общая точность и не пользовательское исследование.</a:t>
             </a:r>
           </a:p>
         </p:txBody>
@@ -4534,7 +4534,7 @@
               </a:defRPr>
             </a:pPr>
             <a:r>
-              <a:t>Астана — за один свободный час.</a:t>
+              <a:t>Кафе недоступно. Вернуться нужно к 15:00.</a:t>
             </a:r>
           </a:p>
         </p:txBody>
@@ -4714,7 +4714,7 @@
               </a:defRPr>
             </a:pPr>
             <a:r>
-              <a:t>Маленькая прогулка.</a:t>
+              <a:t>Планы меняются.</a:t>
             </a:r>
           </a:p>
           <a:p>
@@ -4736,7 +4736,7 @@
               </a:defRPr>
             </a:pPr>
             <a:r>
-              <a:t>Реальные места. Честные ограничения.</a:t>
+              <a:t>Срок возвращения остаётся.</a:t>
             </a:r>
           </a:p>
         </p:txBody>
@@ -12953,7 +12953,7 @@
         <p:spPr>
           <a:xfrm>
             <a:off x="533400" y="2133600"/>
-            <a:ext cx="6400800" cy="2892864"/>
+            <a:ext cx="6400800" cy="3021285"/>
           </a:xfrm>
           <a:prstGeom prst="rect">
             <a:avLst/>
@@ -14027,7 +14027,7 @@
               </a:defRPr>
             </a:pPr>
             <a:r>
-              <a:t>98 / 98</a:t>
+              <a:t>106 / 106</a:t>
             </a:r>
           </a:p>
         </p:txBody>
